--- a/design.pptx
+++ b/design.pptx
@@ -6,6 +6,8 @@
   </p:sldMasterIdLst>
   <p:sldIdLst>
     <p:sldId id="256" r:id="rId2"/>
+    <p:sldId id="257" r:id="rId3"/>
+    <p:sldId id="258" r:id="rId4"/>
   </p:sldIdLst>
   <p:sldSz cx="12192000" cy="6858000"/>
   <p:notesSz cx="6858000" cy="9144000"/>
@@ -104,6 +106,11 @@
       </a:defRPr>
     </a:lvl9pPr>
   </p:defaultTextStyle>
+  <p:extLst>
+    <p:ext uri="{EFAFB233-063F-42B5-8137-9DF3F51BA10A}">
+      <p15:sldGuideLst xmlns:p15="http://schemas.microsoft.com/office/powerpoint/2012/main"/>
+    </p:ext>
+  </p:extLst>
 </p:presentation>
 </file>
 
@@ -254,7 +261,7 @@
           <a:p>
             <a:fld id="{9D438905-DEFC-F846-8BB0-00C4187231C1}" type="datetimeFigureOut">
               <a:rPr kumimoji="1" lang="ja-JP" altLang="en-US" smtClean="0"/>
-              <a:t>2026/1/10</a:t>
+              <a:t>2026/2/7</a:t>
             </a:fld>
             <a:endParaRPr kumimoji="1" lang="ja-JP" altLang="en-US"/>
           </a:p>
@@ -484,7 +491,7 @@
           <a:p>
             <a:fld id="{9D438905-DEFC-F846-8BB0-00C4187231C1}" type="datetimeFigureOut">
               <a:rPr kumimoji="1" lang="ja-JP" altLang="en-US" smtClean="0"/>
-              <a:t>2026/1/10</a:t>
+              <a:t>2026/2/7</a:t>
             </a:fld>
             <a:endParaRPr kumimoji="1" lang="ja-JP" altLang="en-US"/>
           </a:p>
@@ -724,7 +731,7 @@
           <a:p>
             <a:fld id="{9D438905-DEFC-F846-8BB0-00C4187231C1}" type="datetimeFigureOut">
               <a:rPr kumimoji="1" lang="ja-JP" altLang="en-US" smtClean="0"/>
-              <a:t>2026/1/10</a:t>
+              <a:t>2026/2/7</a:t>
             </a:fld>
             <a:endParaRPr kumimoji="1" lang="ja-JP" altLang="en-US"/>
           </a:p>
@@ -954,7 +961,7 @@
           <a:p>
             <a:fld id="{9D438905-DEFC-F846-8BB0-00C4187231C1}" type="datetimeFigureOut">
               <a:rPr kumimoji="1" lang="ja-JP" altLang="en-US" smtClean="0"/>
-              <a:t>2026/1/10</a:t>
+              <a:t>2026/2/7</a:t>
             </a:fld>
             <a:endParaRPr kumimoji="1" lang="ja-JP" altLang="en-US"/>
           </a:p>
@@ -1229,7 +1236,7 @@
           <a:p>
             <a:fld id="{9D438905-DEFC-F846-8BB0-00C4187231C1}" type="datetimeFigureOut">
               <a:rPr kumimoji="1" lang="ja-JP" altLang="en-US" smtClean="0"/>
-              <a:t>2026/1/10</a:t>
+              <a:t>2026/2/7</a:t>
             </a:fld>
             <a:endParaRPr kumimoji="1" lang="ja-JP" altLang="en-US"/>
           </a:p>
@@ -1558,7 +1565,7 @@
           <a:p>
             <a:fld id="{9D438905-DEFC-F846-8BB0-00C4187231C1}" type="datetimeFigureOut">
               <a:rPr kumimoji="1" lang="ja-JP" altLang="en-US" smtClean="0"/>
-              <a:t>2026/1/10</a:t>
+              <a:t>2026/2/7</a:t>
             </a:fld>
             <a:endParaRPr kumimoji="1" lang="ja-JP" altLang="en-US"/>
           </a:p>
@@ -2034,7 +2041,7 @@
           <a:p>
             <a:fld id="{9D438905-DEFC-F846-8BB0-00C4187231C1}" type="datetimeFigureOut">
               <a:rPr kumimoji="1" lang="ja-JP" altLang="en-US" smtClean="0"/>
-              <a:t>2026/1/10</a:t>
+              <a:t>2026/2/7</a:t>
             </a:fld>
             <a:endParaRPr kumimoji="1" lang="ja-JP" altLang="en-US"/>
           </a:p>
@@ -2175,7 +2182,7 @@
           <a:p>
             <a:fld id="{9D438905-DEFC-F846-8BB0-00C4187231C1}" type="datetimeFigureOut">
               <a:rPr kumimoji="1" lang="ja-JP" altLang="en-US" smtClean="0"/>
-              <a:t>2026/1/10</a:t>
+              <a:t>2026/2/7</a:t>
             </a:fld>
             <a:endParaRPr kumimoji="1" lang="ja-JP" altLang="en-US"/>
           </a:p>
@@ -2288,7 +2295,7 @@
           <a:p>
             <a:fld id="{9D438905-DEFC-F846-8BB0-00C4187231C1}" type="datetimeFigureOut">
               <a:rPr kumimoji="1" lang="ja-JP" altLang="en-US" smtClean="0"/>
-              <a:t>2026/1/10</a:t>
+              <a:t>2026/2/7</a:t>
             </a:fld>
             <a:endParaRPr kumimoji="1" lang="ja-JP" altLang="en-US"/>
           </a:p>
@@ -2631,7 +2638,7 @@
           <a:p>
             <a:fld id="{9D438905-DEFC-F846-8BB0-00C4187231C1}" type="datetimeFigureOut">
               <a:rPr kumimoji="1" lang="ja-JP" altLang="en-US" smtClean="0"/>
-              <a:t>2026/1/10</a:t>
+              <a:t>2026/2/7</a:t>
             </a:fld>
             <a:endParaRPr kumimoji="1" lang="ja-JP" altLang="en-US"/>
           </a:p>
@@ -2919,7 +2926,7 @@
           <a:p>
             <a:fld id="{9D438905-DEFC-F846-8BB0-00C4187231C1}" type="datetimeFigureOut">
               <a:rPr kumimoji="1" lang="ja-JP" altLang="en-US" smtClean="0"/>
-              <a:t>2026/1/10</a:t>
+              <a:t>2026/2/7</a:t>
             </a:fld>
             <a:endParaRPr kumimoji="1" lang="ja-JP" altLang="en-US"/>
           </a:p>
@@ -3192,7 +3199,7 @@
           <a:p>
             <a:fld id="{9D438905-DEFC-F846-8BB0-00C4187231C1}" type="datetimeFigureOut">
               <a:rPr kumimoji="1" lang="ja-JP" altLang="en-US" smtClean="0"/>
-              <a:t>2026/1/10</a:t>
+              <a:t>2026/2/7</a:t>
             </a:fld>
             <a:endParaRPr kumimoji="1" lang="ja-JP" altLang="en-US"/>
           </a:p>
@@ -7200,6 +7207,6590 @@
 </p:sld>
 </file>
 
+<file path=ppt/slides/slide2.xml><?xml version="1.0" encoding="utf-8"?>
+<p:sld xmlns:a="http://schemas.openxmlformats.org/drawingml/2006/main" xmlns:r="http://schemas.openxmlformats.org/officeDocument/2006/relationships" xmlns:p="http://schemas.openxmlformats.org/presentationml/2006/main">
+  <p:cSld>
+    <p:spTree>
+      <p:nvGrpSpPr>
+        <p:cNvPr id="1" name="">
+          <a:extLst>
+            <a:ext uri="{FF2B5EF4-FFF2-40B4-BE49-F238E27FC236}">
+              <a16:creationId xmlns:a16="http://schemas.microsoft.com/office/drawing/2014/main" id="{91E549B4-E8C8-9487-F4E0-D38756A4B8BB}"/>
+            </a:ext>
+          </a:extLst>
+        </p:cNvPr>
+        <p:cNvGrpSpPr/>
+        <p:nvPr/>
+      </p:nvGrpSpPr>
+      <p:grpSpPr>
+        <a:xfrm>
+          <a:off x="0" y="0"/>
+          <a:ext cx="0" cy="0"/>
+          <a:chOff x="0" y="0"/>
+          <a:chExt cx="0" cy="0"/>
+        </a:xfrm>
+      </p:grpSpPr>
+      <p:pic>
+        <p:nvPicPr>
+          <p:cNvPr id="9" name="グラフィックス 8">
+            <a:extLst>
+              <a:ext uri="{FF2B5EF4-FFF2-40B4-BE49-F238E27FC236}">
+                <a16:creationId xmlns:a16="http://schemas.microsoft.com/office/drawing/2014/main" id="{DC339121-A019-758C-2FB5-DD46E1C5C43D}"/>
+              </a:ext>
+            </a:extLst>
+          </p:cNvPr>
+          <p:cNvPicPr>
+            <a:picLocks noChangeAspect="1"/>
+          </p:cNvPicPr>
+          <p:nvPr/>
+        </p:nvPicPr>
+        <p:blipFill>
+          <a:blip r:embed="rId2">
+            <a:extLst>
+              <a:ext uri="{96DAC541-7B7A-43D3-8B79-37D633B846F1}">
+                <asvg:svgBlip xmlns:asvg="http://schemas.microsoft.com/office/drawing/2016/SVG/main" r:embed="rId3"/>
+              </a:ext>
+            </a:extLst>
+          </a:blip>
+          <a:srcRect l="23290" t="6158" r="61766"/>
+          <a:stretch/>
+        </p:blipFill>
+        <p:spPr>
+          <a:xfrm>
+            <a:off x="5593494" y="1161535"/>
+            <a:ext cx="2117122" cy="3068080"/>
+          </a:xfrm>
+          <a:prstGeom prst="rect">
+            <a:avLst/>
+          </a:prstGeom>
+        </p:spPr>
+      </p:pic>
+      <p:grpSp>
+        <p:nvGrpSpPr>
+          <p:cNvPr id="2" name="グループ化 1">
+            <a:extLst>
+              <a:ext uri="{FF2B5EF4-FFF2-40B4-BE49-F238E27FC236}">
+                <a16:creationId xmlns:a16="http://schemas.microsoft.com/office/drawing/2014/main" id="{6B42779F-E056-17D4-1CCA-FB520FA31D3B}"/>
+              </a:ext>
+            </a:extLst>
+          </p:cNvPr>
+          <p:cNvGrpSpPr/>
+          <p:nvPr/>
+        </p:nvGrpSpPr>
+        <p:grpSpPr>
+          <a:xfrm rot="16200000">
+            <a:off x="3084885" y="980616"/>
+            <a:ext cx="2117123" cy="2387558"/>
+            <a:chOff x="2943151" y="1613009"/>
+            <a:chExt cx="2117123" cy="2387558"/>
+          </a:xfrm>
+        </p:grpSpPr>
+        <p:pic>
+          <p:nvPicPr>
+            <p:cNvPr id="7" name="図 6" descr="ダイアグラム, 概略図&#10;&#10;AI によって生成されたコンテンツは間違っている可能性があります。">
+              <a:extLst>
+                <a:ext uri="{FF2B5EF4-FFF2-40B4-BE49-F238E27FC236}">
+                  <a16:creationId xmlns:a16="http://schemas.microsoft.com/office/drawing/2014/main" id="{780A9594-9EFB-B854-35A5-7C49349CC285}"/>
+                </a:ext>
+              </a:extLst>
+            </p:cNvPr>
+            <p:cNvPicPr>
+              <a:picLocks noChangeAspect="1"/>
+            </p:cNvPicPr>
+            <p:nvPr/>
+          </p:nvPicPr>
+          <p:blipFill>
+            <a:blip r:embed="rId4"/>
+            <a:stretch>
+              <a:fillRect/>
+            </a:stretch>
+          </p:blipFill>
+          <p:spPr>
+            <a:xfrm>
+              <a:off x="2943151" y="1613009"/>
+              <a:ext cx="2117123" cy="2387558"/>
+            </a:xfrm>
+            <a:prstGeom prst="rect">
+              <a:avLst/>
+            </a:prstGeom>
+          </p:spPr>
+        </p:pic>
+        <p:cxnSp>
+          <p:nvCxnSpPr>
+            <p:cNvPr id="18" name="カギ線コネクタ 17">
+              <a:extLst>
+                <a:ext uri="{FF2B5EF4-FFF2-40B4-BE49-F238E27FC236}">
+                  <a16:creationId xmlns:a16="http://schemas.microsoft.com/office/drawing/2014/main" id="{8F53A937-58CF-6E09-B9A3-3AB07E4A9C3C}"/>
+                </a:ext>
+              </a:extLst>
+            </p:cNvPr>
+            <p:cNvCxnSpPr>
+              <a:cxnSpLocks/>
+              <a:stCxn id="28" idx="2"/>
+              <a:endCxn id="45" idx="0"/>
+            </p:cNvCxnSpPr>
+            <p:nvPr/>
+          </p:nvCxnSpPr>
+          <p:spPr>
+            <a:xfrm flipH="1">
+              <a:off x="3117845" y="2619053"/>
+              <a:ext cx="493763" cy="870542"/>
+            </a:xfrm>
+            <a:prstGeom prst="bentConnector2">
+              <a:avLst/>
+            </a:prstGeom>
+            <a:ln w="63500">
+              <a:solidFill>
+                <a:srgbClr val="FF0000"/>
+              </a:solidFill>
+              <a:prstDash val="sysDot"/>
+            </a:ln>
+          </p:spPr>
+          <p:style>
+            <a:lnRef idx="2">
+              <a:schemeClr val="accent1"/>
+            </a:lnRef>
+            <a:fillRef idx="0">
+              <a:schemeClr val="accent1"/>
+            </a:fillRef>
+            <a:effectRef idx="1">
+              <a:schemeClr val="accent1"/>
+            </a:effectRef>
+            <a:fontRef idx="minor">
+              <a:schemeClr val="tx1"/>
+            </a:fontRef>
+          </p:style>
+        </p:cxnSp>
+        <p:cxnSp>
+          <p:nvCxnSpPr>
+            <p:cNvPr id="26" name="カギ線コネクタ 25">
+              <a:extLst>
+                <a:ext uri="{FF2B5EF4-FFF2-40B4-BE49-F238E27FC236}">
+                  <a16:creationId xmlns:a16="http://schemas.microsoft.com/office/drawing/2014/main" id="{F5324D36-AFD7-3A84-8D55-0E658ABA5384}"/>
+                </a:ext>
+              </a:extLst>
+            </p:cNvPr>
+            <p:cNvCxnSpPr>
+              <a:cxnSpLocks/>
+              <a:endCxn id="36" idx="2"/>
+            </p:cNvCxnSpPr>
+            <p:nvPr/>
+          </p:nvCxnSpPr>
+          <p:spPr>
+            <a:xfrm flipV="1">
+              <a:off x="3701023" y="2609154"/>
+              <a:ext cx="858630" cy="634043"/>
+            </a:xfrm>
+            <a:prstGeom prst="bentConnector3">
+              <a:avLst>
+                <a:gd name="adj1" fmla="val 50000"/>
+              </a:avLst>
+            </a:prstGeom>
+            <a:ln w="63500">
+              <a:solidFill>
+                <a:schemeClr val="tx1">
+                  <a:lumMod val="50000"/>
+                  <a:lumOff val="50000"/>
+                </a:schemeClr>
+              </a:solidFill>
+              <a:prstDash val="sysDot"/>
+            </a:ln>
+          </p:spPr>
+          <p:style>
+            <a:lnRef idx="2">
+              <a:schemeClr val="accent1"/>
+            </a:lnRef>
+            <a:fillRef idx="0">
+              <a:schemeClr val="accent1"/>
+            </a:fillRef>
+            <a:effectRef idx="1">
+              <a:schemeClr val="accent1"/>
+            </a:effectRef>
+            <a:fontRef idx="minor">
+              <a:schemeClr val="tx1"/>
+            </a:fontRef>
+          </p:style>
+        </p:cxnSp>
+      </p:grpSp>
+      <p:cxnSp>
+        <p:nvCxnSpPr>
+          <p:cNvPr id="33" name="カギ線コネクタ 32">
+            <a:extLst>
+              <a:ext uri="{FF2B5EF4-FFF2-40B4-BE49-F238E27FC236}">
+                <a16:creationId xmlns:a16="http://schemas.microsoft.com/office/drawing/2014/main" id="{D7EE8863-5E5B-E820-CF31-8717FBF7CF2C}"/>
+              </a:ext>
+            </a:extLst>
+          </p:cNvPr>
+          <p:cNvCxnSpPr>
+            <a:cxnSpLocks/>
+            <a:stCxn id="20" idx="4"/>
+            <a:endCxn id="21" idx="0"/>
+          </p:cNvCxnSpPr>
+          <p:nvPr/>
+        </p:nvCxnSpPr>
+        <p:spPr>
+          <a:xfrm flipV="1">
+            <a:off x="4983235" y="1387799"/>
+            <a:ext cx="844502" cy="156360"/>
+          </a:xfrm>
+          <a:prstGeom prst="bentConnector3">
+            <a:avLst>
+              <a:gd name="adj1" fmla="val 50000"/>
+            </a:avLst>
+          </a:prstGeom>
+          <a:ln w="63500">
+            <a:solidFill>
+              <a:srgbClr val="00B0F0"/>
+            </a:solidFill>
+            <a:prstDash val="sysDot"/>
+          </a:ln>
+        </p:spPr>
+        <p:style>
+          <a:lnRef idx="2">
+            <a:schemeClr val="accent1"/>
+          </a:lnRef>
+          <a:fillRef idx="0">
+            <a:schemeClr val="accent1"/>
+          </a:fillRef>
+          <a:effectRef idx="1">
+            <a:schemeClr val="accent1"/>
+          </a:effectRef>
+          <a:fontRef idx="minor">
+            <a:schemeClr val="tx1"/>
+          </a:fontRef>
+        </p:style>
+      </p:cxnSp>
+      <p:cxnSp>
+        <p:nvCxnSpPr>
+          <p:cNvPr id="50" name="カギ線コネクタ 49">
+            <a:extLst>
+              <a:ext uri="{FF2B5EF4-FFF2-40B4-BE49-F238E27FC236}">
+                <a16:creationId xmlns:a16="http://schemas.microsoft.com/office/drawing/2014/main" id="{239E8FFA-C386-5712-77D7-CACA95A78FE3}"/>
+              </a:ext>
+            </a:extLst>
+          </p:cNvPr>
+          <p:cNvCxnSpPr>
+            <a:cxnSpLocks/>
+            <a:stCxn id="13" idx="6"/>
+            <a:endCxn id="17" idx="6"/>
+          </p:cNvCxnSpPr>
+          <p:nvPr/>
+        </p:nvCxnSpPr>
+        <p:spPr>
+          <a:xfrm rot="5400000" flipH="1" flipV="1">
+            <a:off x="5934929" y="-40257"/>
+            <a:ext cx="132607" cy="2848097"/>
+          </a:xfrm>
+          <a:prstGeom prst="bentConnector3">
+            <a:avLst>
+              <a:gd name="adj1" fmla="val 274823"/>
+            </a:avLst>
+          </a:prstGeom>
+          <a:ln w="63500">
+            <a:solidFill>
+              <a:srgbClr val="00B050"/>
+            </a:solidFill>
+            <a:prstDash val="sysDot"/>
+          </a:ln>
+        </p:spPr>
+        <p:style>
+          <a:lnRef idx="2">
+            <a:schemeClr val="accent1"/>
+          </a:lnRef>
+          <a:fillRef idx="0">
+            <a:schemeClr val="accent1"/>
+          </a:fillRef>
+          <a:effectRef idx="1">
+            <a:schemeClr val="accent1"/>
+          </a:effectRef>
+          <a:fontRef idx="minor">
+            <a:schemeClr val="tx1"/>
+          </a:fontRef>
+        </p:style>
+      </p:cxnSp>
+      <p:sp>
+        <p:nvSpPr>
+          <p:cNvPr id="55" name="正方形/長方形 54">
+            <a:extLst>
+              <a:ext uri="{FF2B5EF4-FFF2-40B4-BE49-F238E27FC236}">
+                <a16:creationId xmlns:a16="http://schemas.microsoft.com/office/drawing/2014/main" id="{3C70F710-CBEA-1C7C-B723-E76EA9840757}"/>
+              </a:ext>
+            </a:extLst>
+          </p:cNvPr>
+          <p:cNvSpPr/>
+          <p:nvPr/>
+        </p:nvSpPr>
+        <p:spPr>
+          <a:xfrm>
+            <a:off x="8473604" y="1582151"/>
+            <a:ext cx="304622" cy="2399924"/>
+          </a:xfrm>
+          <a:prstGeom prst="rect">
+            <a:avLst/>
+          </a:prstGeom>
+        </p:spPr>
+        <p:style>
+          <a:lnRef idx="2">
+            <a:schemeClr val="accent1">
+              <a:shade val="15000"/>
+            </a:schemeClr>
+          </a:lnRef>
+          <a:fillRef idx="1">
+            <a:schemeClr val="accent1"/>
+          </a:fillRef>
+          <a:effectRef idx="0">
+            <a:schemeClr val="accent1"/>
+          </a:effectRef>
+          <a:fontRef idx="minor">
+            <a:schemeClr val="lt1"/>
+          </a:fontRef>
+        </p:style>
+        <p:txBody>
+          <a:bodyPr rtlCol="0" anchor="ctr"/>
+          <a:lstStyle/>
+          <a:p>
+            <a:pPr algn="ctr"/>
+            <a:endParaRPr kumimoji="1" lang="ja-JP" altLang="en-US"/>
+          </a:p>
+        </p:txBody>
+      </p:sp>
+      <p:grpSp>
+        <p:nvGrpSpPr>
+          <p:cNvPr id="66" name="グループ化 65">
+            <a:extLst>
+              <a:ext uri="{FF2B5EF4-FFF2-40B4-BE49-F238E27FC236}">
+                <a16:creationId xmlns:a16="http://schemas.microsoft.com/office/drawing/2014/main" id="{FA5878F9-9EF6-3AF7-E819-0B2BB5633BD3}"/>
+              </a:ext>
+            </a:extLst>
+          </p:cNvPr>
+          <p:cNvGrpSpPr/>
+          <p:nvPr/>
+        </p:nvGrpSpPr>
+        <p:grpSpPr>
+          <a:xfrm>
+            <a:off x="8521957" y="1605506"/>
+            <a:ext cx="195648" cy="2000390"/>
+            <a:chOff x="7331138" y="1309815"/>
+            <a:chExt cx="195648" cy="2000390"/>
+          </a:xfrm>
+        </p:grpSpPr>
+        <p:grpSp>
+          <p:nvGrpSpPr>
+            <p:cNvPr id="60" name="グループ化 59">
+              <a:extLst>
+                <a:ext uri="{FF2B5EF4-FFF2-40B4-BE49-F238E27FC236}">
+                  <a16:creationId xmlns:a16="http://schemas.microsoft.com/office/drawing/2014/main" id="{D212183C-8340-8297-BF7B-58CB79C633C9}"/>
+                </a:ext>
+              </a:extLst>
+            </p:cNvPr>
+            <p:cNvGrpSpPr/>
+            <p:nvPr/>
+          </p:nvGrpSpPr>
+          <p:grpSpPr>
+            <a:xfrm>
+              <a:off x="7341967" y="1309815"/>
+              <a:ext cx="184819" cy="1097435"/>
+              <a:chOff x="7341967" y="1309815"/>
+              <a:chExt cx="184819" cy="1097435"/>
+            </a:xfrm>
+          </p:grpSpPr>
+          <p:sp>
+            <p:nvSpPr>
+              <p:cNvPr id="56" name="円/楕円 55">
+                <a:extLst>
+                  <a:ext uri="{FF2B5EF4-FFF2-40B4-BE49-F238E27FC236}">
+                    <a16:creationId xmlns:a16="http://schemas.microsoft.com/office/drawing/2014/main" id="{45E2981D-A59E-6318-BA68-B5462E821B56}"/>
+                  </a:ext>
+                </a:extLst>
+              </p:cNvPr>
+              <p:cNvSpPr/>
+              <p:nvPr/>
+            </p:nvSpPr>
+            <p:spPr>
+              <a:xfrm>
+                <a:off x="7358447" y="1309815"/>
+                <a:ext cx="168339" cy="174795"/>
+              </a:xfrm>
+              <a:prstGeom prst="ellipse">
+                <a:avLst/>
+              </a:prstGeom>
+              <a:solidFill>
+                <a:schemeClr val="bg1"/>
+              </a:solidFill>
+              <a:ln>
+                <a:solidFill>
+                  <a:schemeClr val="tx1"/>
+                </a:solidFill>
+              </a:ln>
+            </p:spPr>
+            <p:style>
+              <a:lnRef idx="2">
+                <a:schemeClr val="accent1">
+                  <a:shade val="15000"/>
+                </a:schemeClr>
+              </a:lnRef>
+              <a:fillRef idx="1">
+                <a:schemeClr val="accent1"/>
+              </a:fillRef>
+              <a:effectRef idx="0">
+                <a:schemeClr val="accent1"/>
+              </a:effectRef>
+              <a:fontRef idx="minor">
+                <a:schemeClr val="lt1"/>
+              </a:fontRef>
+            </p:style>
+            <p:txBody>
+              <a:bodyPr rtlCol="0" anchor="ctr"/>
+              <a:lstStyle/>
+              <a:p>
+                <a:pPr algn="ctr"/>
+                <a:endParaRPr kumimoji="1" lang="ja-JP" altLang="en-US"/>
+              </a:p>
+            </p:txBody>
+          </p:sp>
+          <p:sp>
+            <p:nvSpPr>
+              <p:cNvPr id="57" name="円/楕円 56">
+                <a:extLst>
+                  <a:ext uri="{FF2B5EF4-FFF2-40B4-BE49-F238E27FC236}">
+                    <a16:creationId xmlns:a16="http://schemas.microsoft.com/office/drawing/2014/main" id="{21D131D4-498E-0876-F339-71356F091A33}"/>
+                  </a:ext>
+                </a:extLst>
+              </p:cNvPr>
+              <p:cNvSpPr/>
+              <p:nvPr/>
+            </p:nvSpPr>
+            <p:spPr>
+              <a:xfrm>
+                <a:off x="7350207" y="1622853"/>
+                <a:ext cx="168339" cy="174795"/>
+              </a:xfrm>
+              <a:prstGeom prst="ellipse">
+                <a:avLst/>
+              </a:prstGeom>
+              <a:solidFill>
+                <a:schemeClr val="bg1"/>
+              </a:solidFill>
+              <a:ln>
+                <a:solidFill>
+                  <a:schemeClr val="tx1"/>
+                </a:solidFill>
+              </a:ln>
+            </p:spPr>
+            <p:style>
+              <a:lnRef idx="2">
+                <a:schemeClr val="accent1">
+                  <a:shade val="15000"/>
+                </a:schemeClr>
+              </a:lnRef>
+              <a:fillRef idx="1">
+                <a:schemeClr val="accent1"/>
+              </a:fillRef>
+              <a:effectRef idx="0">
+                <a:schemeClr val="accent1"/>
+              </a:effectRef>
+              <a:fontRef idx="minor">
+                <a:schemeClr val="lt1"/>
+              </a:fontRef>
+            </p:style>
+            <p:txBody>
+              <a:bodyPr rtlCol="0" anchor="ctr"/>
+              <a:lstStyle/>
+              <a:p>
+                <a:pPr algn="ctr"/>
+                <a:endParaRPr kumimoji="1" lang="ja-JP" altLang="en-US"/>
+              </a:p>
+            </p:txBody>
+          </p:sp>
+          <p:sp>
+            <p:nvSpPr>
+              <p:cNvPr id="58" name="円/楕円 57">
+                <a:extLst>
+                  <a:ext uri="{FF2B5EF4-FFF2-40B4-BE49-F238E27FC236}">
+                    <a16:creationId xmlns:a16="http://schemas.microsoft.com/office/drawing/2014/main" id="{E612E7D0-B399-C90E-70D0-A873D7138022}"/>
+                  </a:ext>
+                </a:extLst>
+              </p:cNvPr>
+              <p:cNvSpPr/>
+              <p:nvPr/>
+            </p:nvSpPr>
+            <p:spPr>
+              <a:xfrm>
+                <a:off x="7350207" y="1919417"/>
+                <a:ext cx="168339" cy="174795"/>
+              </a:xfrm>
+              <a:prstGeom prst="ellipse">
+                <a:avLst/>
+              </a:prstGeom>
+              <a:solidFill>
+                <a:schemeClr val="bg1"/>
+              </a:solidFill>
+              <a:ln>
+                <a:solidFill>
+                  <a:schemeClr val="tx1"/>
+                </a:solidFill>
+              </a:ln>
+            </p:spPr>
+            <p:style>
+              <a:lnRef idx="2">
+                <a:schemeClr val="accent1">
+                  <a:shade val="15000"/>
+                </a:schemeClr>
+              </a:lnRef>
+              <a:fillRef idx="1">
+                <a:schemeClr val="accent1"/>
+              </a:fillRef>
+              <a:effectRef idx="0">
+                <a:schemeClr val="accent1"/>
+              </a:effectRef>
+              <a:fontRef idx="minor">
+                <a:schemeClr val="lt1"/>
+              </a:fontRef>
+            </p:style>
+            <p:txBody>
+              <a:bodyPr rtlCol="0" anchor="ctr"/>
+              <a:lstStyle/>
+              <a:p>
+                <a:pPr algn="ctr"/>
+                <a:endParaRPr kumimoji="1" lang="ja-JP" altLang="en-US"/>
+              </a:p>
+            </p:txBody>
+          </p:sp>
+          <p:sp>
+            <p:nvSpPr>
+              <p:cNvPr id="59" name="円/楕円 58">
+                <a:extLst>
+                  <a:ext uri="{FF2B5EF4-FFF2-40B4-BE49-F238E27FC236}">
+                    <a16:creationId xmlns:a16="http://schemas.microsoft.com/office/drawing/2014/main" id="{B3F04FC1-96A4-7AD8-2195-DEBFB98C8CFA}"/>
+                  </a:ext>
+                </a:extLst>
+              </p:cNvPr>
+              <p:cNvSpPr/>
+              <p:nvPr/>
+            </p:nvSpPr>
+            <p:spPr>
+              <a:xfrm>
+                <a:off x="7341967" y="2232455"/>
+                <a:ext cx="168339" cy="174795"/>
+              </a:xfrm>
+              <a:prstGeom prst="ellipse">
+                <a:avLst/>
+              </a:prstGeom>
+              <a:solidFill>
+                <a:schemeClr val="bg1"/>
+              </a:solidFill>
+              <a:ln>
+                <a:solidFill>
+                  <a:schemeClr val="tx1"/>
+                </a:solidFill>
+              </a:ln>
+            </p:spPr>
+            <p:style>
+              <a:lnRef idx="2">
+                <a:schemeClr val="accent1">
+                  <a:shade val="15000"/>
+                </a:schemeClr>
+              </a:lnRef>
+              <a:fillRef idx="1">
+                <a:schemeClr val="accent1"/>
+              </a:fillRef>
+              <a:effectRef idx="0">
+                <a:schemeClr val="accent1"/>
+              </a:effectRef>
+              <a:fontRef idx="minor">
+                <a:schemeClr val="lt1"/>
+              </a:fontRef>
+            </p:style>
+            <p:txBody>
+              <a:bodyPr rtlCol="0" anchor="ctr"/>
+              <a:lstStyle/>
+              <a:p>
+                <a:pPr algn="ctr"/>
+                <a:endParaRPr kumimoji="1" lang="ja-JP" altLang="en-US"/>
+              </a:p>
+            </p:txBody>
+          </p:sp>
+        </p:grpSp>
+        <p:grpSp>
+          <p:nvGrpSpPr>
+            <p:cNvPr id="61" name="グループ化 60">
+              <a:extLst>
+                <a:ext uri="{FF2B5EF4-FFF2-40B4-BE49-F238E27FC236}">
+                  <a16:creationId xmlns:a16="http://schemas.microsoft.com/office/drawing/2014/main" id="{29E06606-BB35-DF02-C60B-9282CE29F419}"/>
+                </a:ext>
+              </a:extLst>
+            </p:cNvPr>
+            <p:cNvGrpSpPr/>
+            <p:nvPr/>
+          </p:nvGrpSpPr>
+          <p:grpSpPr>
+            <a:xfrm>
+              <a:off x="7331138" y="2525808"/>
+              <a:ext cx="176579" cy="784397"/>
+              <a:chOff x="7350207" y="1309815"/>
+              <a:chExt cx="176579" cy="784397"/>
+            </a:xfrm>
+          </p:grpSpPr>
+          <p:sp>
+            <p:nvSpPr>
+              <p:cNvPr id="62" name="円/楕円 61">
+                <a:extLst>
+                  <a:ext uri="{FF2B5EF4-FFF2-40B4-BE49-F238E27FC236}">
+                    <a16:creationId xmlns:a16="http://schemas.microsoft.com/office/drawing/2014/main" id="{28673F24-90DC-3A55-C21B-4D526752E075}"/>
+                  </a:ext>
+                </a:extLst>
+              </p:cNvPr>
+              <p:cNvSpPr/>
+              <p:nvPr/>
+            </p:nvSpPr>
+            <p:spPr>
+              <a:xfrm>
+                <a:off x="7358447" y="1309815"/>
+                <a:ext cx="168339" cy="174795"/>
+              </a:xfrm>
+              <a:prstGeom prst="ellipse">
+                <a:avLst/>
+              </a:prstGeom>
+              <a:solidFill>
+                <a:schemeClr val="bg1"/>
+              </a:solidFill>
+              <a:ln>
+                <a:solidFill>
+                  <a:schemeClr val="tx1"/>
+                </a:solidFill>
+              </a:ln>
+            </p:spPr>
+            <p:style>
+              <a:lnRef idx="2">
+                <a:schemeClr val="accent1">
+                  <a:shade val="15000"/>
+                </a:schemeClr>
+              </a:lnRef>
+              <a:fillRef idx="1">
+                <a:schemeClr val="accent1"/>
+              </a:fillRef>
+              <a:effectRef idx="0">
+                <a:schemeClr val="accent1"/>
+              </a:effectRef>
+              <a:fontRef idx="minor">
+                <a:schemeClr val="lt1"/>
+              </a:fontRef>
+            </p:style>
+            <p:txBody>
+              <a:bodyPr rtlCol="0" anchor="ctr"/>
+              <a:lstStyle/>
+              <a:p>
+                <a:pPr algn="ctr"/>
+                <a:endParaRPr kumimoji="1" lang="ja-JP" altLang="en-US"/>
+              </a:p>
+            </p:txBody>
+          </p:sp>
+          <p:sp>
+            <p:nvSpPr>
+              <p:cNvPr id="63" name="円/楕円 62">
+                <a:extLst>
+                  <a:ext uri="{FF2B5EF4-FFF2-40B4-BE49-F238E27FC236}">
+                    <a16:creationId xmlns:a16="http://schemas.microsoft.com/office/drawing/2014/main" id="{3E59A946-999E-4C08-3C4C-7182765C84E1}"/>
+                  </a:ext>
+                </a:extLst>
+              </p:cNvPr>
+              <p:cNvSpPr/>
+              <p:nvPr/>
+            </p:nvSpPr>
+            <p:spPr>
+              <a:xfrm>
+                <a:off x="7350207" y="1622853"/>
+                <a:ext cx="168339" cy="174795"/>
+              </a:xfrm>
+              <a:prstGeom prst="ellipse">
+                <a:avLst/>
+              </a:prstGeom>
+              <a:solidFill>
+                <a:schemeClr val="bg1"/>
+              </a:solidFill>
+              <a:ln>
+                <a:solidFill>
+                  <a:schemeClr val="tx1"/>
+                </a:solidFill>
+              </a:ln>
+            </p:spPr>
+            <p:style>
+              <a:lnRef idx="2">
+                <a:schemeClr val="accent1">
+                  <a:shade val="15000"/>
+                </a:schemeClr>
+              </a:lnRef>
+              <a:fillRef idx="1">
+                <a:schemeClr val="accent1"/>
+              </a:fillRef>
+              <a:effectRef idx="0">
+                <a:schemeClr val="accent1"/>
+              </a:effectRef>
+              <a:fontRef idx="minor">
+                <a:schemeClr val="lt1"/>
+              </a:fontRef>
+            </p:style>
+            <p:txBody>
+              <a:bodyPr rtlCol="0" anchor="ctr"/>
+              <a:lstStyle/>
+              <a:p>
+                <a:pPr algn="ctr"/>
+                <a:endParaRPr kumimoji="1" lang="ja-JP" altLang="en-US"/>
+              </a:p>
+            </p:txBody>
+          </p:sp>
+          <p:sp>
+            <p:nvSpPr>
+              <p:cNvPr id="64" name="円/楕円 63">
+                <a:extLst>
+                  <a:ext uri="{FF2B5EF4-FFF2-40B4-BE49-F238E27FC236}">
+                    <a16:creationId xmlns:a16="http://schemas.microsoft.com/office/drawing/2014/main" id="{CCE4174B-90F7-9603-713F-E6E3F99F241F}"/>
+                  </a:ext>
+                </a:extLst>
+              </p:cNvPr>
+              <p:cNvSpPr/>
+              <p:nvPr/>
+            </p:nvSpPr>
+            <p:spPr>
+              <a:xfrm>
+                <a:off x="7350207" y="1919417"/>
+                <a:ext cx="168339" cy="174795"/>
+              </a:xfrm>
+              <a:prstGeom prst="ellipse">
+                <a:avLst/>
+              </a:prstGeom>
+              <a:solidFill>
+                <a:schemeClr val="bg1"/>
+              </a:solidFill>
+              <a:ln>
+                <a:solidFill>
+                  <a:schemeClr val="tx1"/>
+                </a:solidFill>
+              </a:ln>
+            </p:spPr>
+            <p:style>
+              <a:lnRef idx="2">
+                <a:schemeClr val="accent1">
+                  <a:shade val="15000"/>
+                </a:schemeClr>
+              </a:lnRef>
+              <a:fillRef idx="1">
+                <a:schemeClr val="accent1"/>
+              </a:fillRef>
+              <a:effectRef idx="0">
+                <a:schemeClr val="accent1"/>
+              </a:effectRef>
+              <a:fontRef idx="minor">
+                <a:schemeClr val="lt1"/>
+              </a:fontRef>
+            </p:style>
+            <p:txBody>
+              <a:bodyPr rtlCol="0" anchor="ctr"/>
+              <a:lstStyle/>
+              <a:p>
+                <a:pPr algn="ctr"/>
+                <a:endParaRPr kumimoji="1" lang="ja-JP" altLang="en-US"/>
+              </a:p>
+            </p:txBody>
+          </p:sp>
+        </p:grpSp>
+      </p:grpSp>
+      <p:sp>
+        <p:nvSpPr>
+          <p:cNvPr id="67" name="テキスト ボックス 66">
+            <a:extLst>
+              <a:ext uri="{FF2B5EF4-FFF2-40B4-BE49-F238E27FC236}">
+                <a16:creationId xmlns:a16="http://schemas.microsoft.com/office/drawing/2014/main" id="{F51791EC-75D2-A855-6FCC-5415F0A4E17A}"/>
+              </a:ext>
+            </a:extLst>
+          </p:cNvPr>
+          <p:cNvSpPr txBox="1"/>
+          <p:nvPr/>
+        </p:nvSpPr>
+        <p:spPr>
+          <a:xfrm>
+            <a:off x="8834819" y="1627951"/>
+            <a:ext cx="697627" cy="2031325"/>
+          </a:xfrm>
+          <a:prstGeom prst="rect">
+            <a:avLst/>
+          </a:prstGeom>
+          <a:noFill/>
+        </p:spPr>
+        <p:txBody>
+          <a:bodyPr wrap="none" rtlCol="0">
+            <a:spAutoFit/>
+          </a:bodyPr>
+          <a:lstStyle/>
+          <a:p>
+            <a:r>
+              <a:rPr kumimoji="1" lang="en-US" altLang="ja-JP" dirty="0"/>
+              <a:t>GND</a:t>
+            </a:r>
+          </a:p>
+          <a:p>
+            <a:r>
+              <a:rPr lang="en-US" altLang="ja-JP" dirty="0"/>
+              <a:t>VCC</a:t>
+            </a:r>
+          </a:p>
+          <a:p>
+            <a:r>
+              <a:rPr kumimoji="1" lang="en-US" altLang="ja-JP" dirty="0"/>
+              <a:t>SCL</a:t>
+            </a:r>
+          </a:p>
+          <a:p>
+            <a:r>
+              <a:rPr lang="en-US" altLang="ja-JP" dirty="0"/>
+              <a:t>SDA</a:t>
+            </a:r>
+          </a:p>
+          <a:p>
+            <a:r>
+              <a:rPr kumimoji="1" lang="en-US" altLang="ja-JP" dirty="0"/>
+              <a:t>RES</a:t>
+            </a:r>
+          </a:p>
+          <a:p>
+            <a:r>
+              <a:rPr kumimoji="1" lang="en-US" altLang="ja-JP" dirty="0"/>
+              <a:t>DC</a:t>
+            </a:r>
+          </a:p>
+          <a:p>
+            <a:r>
+              <a:rPr lang="en-US" altLang="ja-JP" dirty="0"/>
+              <a:t>CS</a:t>
+            </a:r>
+          </a:p>
+        </p:txBody>
+      </p:sp>
+      <p:cxnSp>
+        <p:nvCxnSpPr>
+          <p:cNvPr id="69" name="カギ線コネクタ 68">
+            <a:extLst>
+              <a:ext uri="{FF2B5EF4-FFF2-40B4-BE49-F238E27FC236}">
+                <a16:creationId xmlns:a16="http://schemas.microsoft.com/office/drawing/2014/main" id="{00885DB0-726D-5ED9-A181-E99115DBCA7E}"/>
+              </a:ext>
+            </a:extLst>
+          </p:cNvPr>
+          <p:cNvCxnSpPr>
+            <a:cxnSpLocks/>
+            <a:stCxn id="45" idx="2"/>
+            <a:endCxn id="75" idx="4"/>
+          </p:cNvCxnSpPr>
+          <p:nvPr/>
+        </p:nvCxnSpPr>
+        <p:spPr>
+          <a:xfrm rot="5400000" flipH="1" flipV="1">
+            <a:off x="6855214" y="1064627"/>
+            <a:ext cx="136243" cy="4019370"/>
+          </a:xfrm>
+          <a:prstGeom prst="bentConnector3">
+            <a:avLst>
+              <a:gd name="adj1" fmla="val -1137667"/>
+            </a:avLst>
+          </a:prstGeom>
+          <a:ln w="63500">
+            <a:solidFill>
+              <a:srgbClr val="FF0000"/>
+            </a:solidFill>
+            <a:prstDash val="sysDot"/>
+          </a:ln>
+        </p:spPr>
+        <p:style>
+          <a:lnRef idx="2">
+            <a:schemeClr val="accent1"/>
+          </a:lnRef>
+          <a:fillRef idx="0">
+            <a:schemeClr val="accent1"/>
+          </a:fillRef>
+          <a:effectRef idx="1">
+            <a:schemeClr val="accent1"/>
+          </a:effectRef>
+          <a:fontRef idx="minor">
+            <a:schemeClr val="tx1"/>
+          </a:fontRef>
+        </p:style>
+      </p:cxnSp>
+      <p:cxnSp>
+        <p:nvCxnSpPr>
+          <p:cNvPr id="73" name="カギ線コネクタ 72">
+            <a:extLst>
+              <a:ext uri="{FF2B5EF4-FFF2-40B4-BE49-F238E27FC236}">
+                <a16:creationId xmlns:a16="http://schemas.microsoft.com/office/drawing/2014/main" id="{42FFB249-D507-484A-7D64-66F4F8F0DF0E}"/>
+              </a:ext>
+            </a:extLst>
+          </p:cNvPr>
+          <p:cNvCxnSpPr>
+            <a:cxnSpLocks/>
+            <a:stCxn id="62" idx="6"/>
+            <a:endCxn id="57" idx="6"/>
+          </p:cNvCxnSpPr>
+          <p:nvPr/>
+        </p:nvCxnSpPr>
+        <p:spPr>
+          <a:xfrm flipV="1">
+            <a:off x="8698536" y="2005942"/>
+            <a:ext cx="10829" cy="902955"/>
+          </a:xfrm>
+          <a:prstGeom prst="bentConnector3">
+            <a:avLst>
+              <a:gd name="adj1" fmla="val 2210998"/>
+            </a:avLst>
+          </a:prstGeom>
+          <a:ln w="63500">
+            <a:solidFill>
+              <a:srgbClr val="FF0000"/>
+            </a:solidFill>
+            <a:prstDash val="sysDot"/>
+          </a:ln>
+        </p:spPr>
+        <p:style>
+          <a:lnRef idx="2">
+            <a:schemeClr val="accent1"/>
+          </a:lnRef>
+          <a:fillRef idx="0">
+            <a:schemeClr val="accent1"/>
+          </a:fillRef>
+          <a:effectRef idx="1">
+            <a:schemeClr val="accent1"/>
+          </a:effectRef>
+          <a:fontRef idx="minor">
+            <a:schemeClr val="tx1"/>
+          </a:fontRef>
+        </p:style>
+      </p:cxnSp>
+      <p:cxnSp>
+        <p:nvCxnSpPr>
+          <p:cNvPr id="84" name="カギ線コネクタ 83">
+            <a:extLst>
+              <a:ext uri="{FF2B5EF4-FFF2-40B4-BE49-F238E27FC236}">
+                <a16:creationId xmlns:a16="http://schemas.microsoft.com/office/drawing/2014/main" id="{FD922344-C5A0-9198-AC45-11D9038387B4}"/>
+              </a:ext>
+            </a:extLst>
+          </p:cNvPr>
+          <p:cNvCxnSpPr>
+            <a:cxnSpLocks/>
+            <a:stCxn id="56" idx="0"/>
+            <a:endCxn id="36" idx="6"/>
+          </p:cNvCxnSpPr>
+          <p:nvPr/>
+        </p:nvCxnSpPr>
+        <p:spPr>
+          <a:xfrm rot="16200000" flipV="1">
+            <a:off x="6210929" y="-817001"/>
+            <a:ext cx="157390" cy="4687624"/>
+          </a:xfrm>
+          <a:prstGeom prst="bentConnector3">
+            <a:avLst>
+              <a:gd name="adj1" fmla="val 473650"/>
+            </a:avLst>
+          </a:prstGeom>
+          <a:ln w="63500">
+            <a:solidFill>
+              <a:schemeClr val="tx1">
+                <a:lumMod val="50000"/>
+                <a:lumOff val="50000"/>
+              </a:schemeClr>
+            </a:solidFill>
+            <a:prstDash val="sysDot"/>
+          </a:ln>
+        </p:spPr>
+        <p:style>
+          <a:lnRef idx="2">
+            <a:schemeClr val="accent1"/>
+          </a:lnRef>
+          <a:fillRef idx="0">
+            <a:schemeClr val="accent1"/>
+          </a:fillRef>
+          <a:effectRef idx="1">
+            <a:schemeClr val="accent1"/>
+          </a:effectRef>
+          <a:fontRef idx="minor">
+            <a:schemeClr val="tx1"/>
+          </a:fontRef>
+        </p:style>
+      </p:cxnSp>
+      <p:cxnSp>
+        <p:nvCxnSpPr>
+          <p:cNvPr id="88" name="カギ線コネクタ 87">
+            <a:extLst>
+              <a:ext uri="{FF2B5EF4-FFF2-40B4-BE49-F238E27FC236}">
+                <a16:creationId xmlns:a16="http://schemas.microsoft.com/office/drawing/2014/main" id="{45DF8403-F1E7-F07C-D14C-DF7CC3C73780}"/>
+              </a:ext>
+            </a:extLst>
+          </p:cNvPr>
+          <p:cNvCxnSpPr>
+            <a:cxnSpLocks/>
+            <a:stCxn id="91" idx="4"/>
+            <a:endCxn id="63" idx="2"/>
+          </p:cNvCxnSpPr>
+          <p:nvPr/>
+        </p:nvCxnSpPr>
+        <p:spPr>
+          <a:xfrm flipV="1">
+            <a:off x="6406298" y="3221935"/>
+            <a:ext cx="2115659" cy="1075317"/>
+          </a:xfrm>
+          <a:prstGeom prst="bentConnector3">
+            <a:avLst>
+              <a:gd name="adj1" fmla="val 89853"/>
+            </a:avLst>
+          </a:prstGeom>
+          <a:ln w="63500">
+            <a:solidFill>
+              <a:srgbClr val="00B0F0"/>
+            </a:solidFill>
+          </a:ln>
+        </p:spPr>
+        <p:style>
+          <a:lnRef idx="2">
+            <a:schemeClr val="accent1"/>
+          </a:lnRef>
+          <a:fillRef idx="0">
+            <a:schemeClr val="accent1"/>
+          </a:fillRef>
+          <a:effectRef idx="1">
+            <a:schemeClr val="accent1"/>
+          </a:effectRef>
+          <a:fontRef idx="minor">
+            <a:schemeClr val="tx1"/>
+          </a:fontRef>
+        </p:style>
+      </p:cxnSp>
+      <p:cxnSp>
+        <p:nvCxnSpPr>
+          <p:cNvPr id="90" name="カギ線コネクタ 89">
+            <a:extLst>
+              <a:ext uri="{FF2B5EF4-FFF2-40B4-BE49-F238E27FC236}">
+                <a16:creationId xmlns:a16="http://schemas.microsoft.com/office/drawing/2014/main" id="{6A271042-22B6-6EFF-6CA3-7AE318A0DE49}"/>
+              </a:ext>
+            </a:extLst>
+          </p:cNvPr>
+          <p:cNvCxnSpPr>
+            <a:cxnSpLocks/>
+            <a:stCxn id="83" idx="2"/>
+            <a:endCxn id="64" idx="4"/>
+          </p:cNvCxnSpPr>
+          <p:nvPr/>
+        </p:nvCxnSpPr>
+        <p:spPr>
+          <a:xfrm rot="16200000" flipH="1">
+            <a:off x="7454434" y="2454202"/>
+            <a:ext cx="303147" cy="2000240"/>
+          </a:xfrm>
+          <a:prstGeom prst="bentConnector3">
+            <a:avLst>
+              <a:gd name="adj1" fmla="val 414367"/>
+            </a:avLst>
+          </a:prstGeom>
+          <a:ln w="63500">
+            <a:solidFill>
+              <a:schemeClr val="accent2"/>
+            </a:solidFill>
+            <a:prstDash val="sysDot"/>
+          </a:ln>
+        </p:spPr>
+        <p:style>
+          <a:lnRef idx="2">
+            <a:schemeClr val="accent1"/>
+          </a:lnRef>
+          <a:fillRef idx="0">
+            <a:schemeClr val="accent1"/>
+          </a:fillRef>
+          <a:effectRef idx="1">
+            <a:schemeClr val="accent1"/>
+          </a:effectRef>
+          <a:fontRef idx="minor">
+            <a:schemeClr val="tx1"/>
+          </a:fontRef>
+        </p:style>
+      </p:cxnSp>
+      <p:cxnSp>
+        <p:nvCxnSpPr>
+          <p:cNvPr id="93" name="カギ線コネクタ 92">
+            <a:extLst>
+              <a:ext uri="{FF2B5EF4-FFF2-40B4-BE49-F238E27FC236}">
+                <a16:creationId xmlns:a16="http://schemas.microsoft.com/office/drawing/2014/main" id="{659D8A86-386C-E2D8-1797-75ABB1875C5E}"/>
+              </a:ext>
+            </a:extLst>
+          </p:cNvPr>
+          <p:cNvCxnSpPr>
+            <a:cxnSpLocks/>
+            <a:stCxn id="301" idx="2"/>
+            <a:endCxn id="302" idx="2"/>
+          </p:cNvCxnSpPr>
+          <p:nvPr/>
+        </p:nvCxnSpPr>
+        <p:spPr>
+          <a:xfrm rot="5400000" flipH="1">
+            <a:off x="5019790" y="1799782"/>
+            <a:ext cx="1633080" cy="3162071"/>
+          </a:xfrm>
+          <a:prstGeom prst="bentConnector3">
+            <a:avLst>
+              <a:gd name="adj1" fmla="val -14196"/>
+            </a:avLst>
+          </a:prstGeom>
+          <a:ln w="63500">
+            <a:solidFill>
+              <a:schemeClr val="accent5"/>
+            </a:solidFill>
+          </a:ln>
+        </p:spPr>
+        <p:style>
+          <a:lnRef idx="2">
+            <a:schemeClr val="accent1"/>
+          </a:lnRef>
+          <a:fillRef idx="0">
+            <a:schemeClr val="accent1"/>
+          </a:fillRef>
+          <a:effectRef idx="1">
+            <a:schemeClr val="accent1"/>
+          </a:effectRef>
+          <a:fontRef idx="minor">
+            <a:schemeClr val="tx1"/>
+          </a:fontRef>
+        </p:style>
+      </p:cxnSp>
+      <p:cxnSp>
+        <p:nvCxnSpPr>
+          <p:cNvPr id="102" name="カギ線コネクタ 101">
+            <a:extLst>
+              <a:ext uri="{FF2B5EF4-FFF2-40B4-BE49-F238E27FC236}">
+                <a16:creationId xmlns:a16="http://schemas.microsoft.com/office/drawing/2014/main" id="{8D9E4EF6-AB1B-6C8D-7A23-F52D656B953F}"/>
+              </a:ext>
+            </a:extLst>
+          </p:cNvPr>
+          <p:cNvCxnSpPr>
+            <a:cxnSpLocks/>
+            <a:stCxn id="101" idx="4"/>
+            <a:endCxn id="58" idx="2"/>
+          </p:cNvCxnSpPr>
+          <p:nvPr/>
+        </p:nvCxnSpPr>
+        <p:spPr>
+          <a:xfrm flipV="1">
+            <a:off x="7517175" y="2302506"/>
+            <a:ext cx="1023851" cy="1503790"/>
+          </a:xfrm>
+          <a:prstGeom prst="bentConnector3">
+            <a:avLst>
+              <a:gd name="adj1" fmla="val 62759"/>
+            </a:avLst>
+          </a:prstGeom>
+          <a:ln w="63500">
+            <a:solidFill>
+              <a:srgbClr val="FFC000"/>
+            </a:solidFill>
+            <a:prstDash val="sysDot"/>
+          </a:ln>
+        </p:spPr>
+        <p:style>
+          <a:lnRef idx="2">
+            <a:schemeClr val="accent1"/>
+          </a:lnRef>
+          <a:fillRef idx="0">
+            <a:schemeClr val="accent1"/>
+          </a:fillRef>
+          <a:effectRef idx="1">
+            <a:schemeClr val="accent1"/>
+          </a:effectRef>
+          <a:fontRef idx="minor">
+            <a:schemeClr val="tx1"/>
+          </a:fontRef>
+        </p:style>
+      </p:cxnSp>
+      <p:cxnSp>
+        <p:nvCxnSpPr>
+          <p:cNvPr id="109" name="カギ線コネクタ 108">
+            <a:extLst>
+              <a:ext uri="{FF2B5EF4-FFF2-40B4-BE49-F238E27FC236}">
+                <a16:creationId xmlns:a16="http://schemas.microsoft.com/office/drawing/2014/main" id="{45EA102B-6AC1-5CA9-72C6-D7D40EA1B346}"/>
+              </a:ext>
+            </a:extLst>
+          </p:cNvPr>
+          <p:cNvCxnSpPr>
+            <a:cxnSpLocks/>
+            <a:stCxn id="292" idx="4"/>
+            <a:endCxn id="59" idx="2"/>
+          </p:cNvCxnSpPr>
+          <p:nvPr/>
+        </p:nvCxnSpPr>
+        <p:spPr>
+          <a:xfrm flipV="1">
+            <a:off x="7507280" y="2615544"/>
+            <a:ext cx="1025506" cy="587090"/>
+          </a:xfrm>
+          <a:prstGeom prst="bentConnector3">
+            <a:avLst>
+              <a:gd name="adj1" fmla="val 50000"/>
+            </a:avLst>
+          </a:prstGeom>
+          <a:ln w="63500">
+            <a:solidFill>
+              <a:schemeClr val="tx1">
+                <a:lumMod val="50000"/>
+                <a:lumOff val="50000"/>
+              </a:schemeClr>
+            </a:solidFill>
+          </a:ln>
+        </p:spPr>
+        <p:style>
+          <a:lnRef idx="2">
+            <a:schemeClr val="accent1"/>
+          </a:lnRef>
+          <a:fillRef idx="0">
+            <a:schemeClr val="accent1"/>
+          </a:fillRef>
+          <a:effectRef idx="1">
+            <a:schemeClr val="accent1"/>
+          </a:effectRef>
+          <a:fontRef idx="minor">
+            <a:schemeClr val="tx1"/>
+          </a:fontRef>
+        </p:style>
+      </p:cxnSp>
+      <p:grpSp>
+        <p:nvGrpSpPr>
+          <p:cNvPr id="127" name="グループ化 126">
+            <a:extLst>
+              <a:ext uri="{FF2B5EF4-FFF2-40B4-BE49-F238E27FC236}">
+                <a16:creationId xmlns:a16="http://schemas.microsoft.com/office/drawing/2014/main" id="{9826CEEE-7C30-86B9-0DAA-CCF8E4A119A7}"/>
+              </a:ext>
+            </a:extLst>
+          </p:cNvPr>
+          <p:cNvGrpSpPr/>
+          <p:nvPr/>
+        </p:nvGrpSpPr>
+        <p:grpSpPr>
+          <a:xfrm rot="16200000">
+            <a:off x="2910126" y="754678"/>
+            <a:ext cx="422151" cy="746987"/>
+            <a:chOff x="4618386" y="586941"/>
+            <a:chExt cx="422151" cy="746987"/>
+          </a:xfrm>
+        </p:grpSpPr>
+        <p:sp>
+          <p:nvSpPr>
+            <p:cNvPr id="128" name="正方形/長方形 127">
+              <a:extLst>
+                <a:ext uri="{FF2B5EF4-FFF2-40B4-BE49-F238E27FC236}">
+                  <a16:creationId xmlns:a16="http://schemas.microsoft.com/office/drawing/2014/main" id="{991F6782-AB8B-D262-1C8A-0D7501E11C19}"/>
+                </a:ext>
+              </a:extLst>
+            </p:cNvPr>
+            <p:cNvSpPr/>
+            <p:nvPr/>
+          </p:nvSpPr>
+          <p:spPr>
+            <a:xfrm>
+              <a:off x="4618386" y="586941"/>
+              <a:ext cx="422151" cy="746987"/>
+            </a:xfrm>
+            <a:prstGeom prst="rect">
+              <a:avLst/>
+            </a:prstGeom>
+          </p:spPr>
+          <p:style>
+            <a:lnRef idx="2">
+              <a:schemeClr val="accent1">
+                <a:shade val="15000"/>
+              </a:schemeClr>
+            </a:lnRef>
+            <a:fillRef idx="1">
+              <a:schemeClr val="accent1"/>
+            </a:fillRef>
+            <a:effectRef idx="0">
+              <a:schemeClr val="accent1"/>
+            </a:effectRef>
+            <a:fontRef idx="minor">
+              <a:schemeClr val="lt1"/>
+            </a:fontRef>
+          </p:style>
+          <p:txBody>
+            <a:bodyPr rtlCol="0" anchor="ctr"/>
+            <a:lstStyle/>
+            <a:p>
+              <a:pPr algn="ctr"/>
+              <a:endParaRPr kumimoji="1" lang="ja-JP" altLang="en-US"/>
+            </a:p>
+          </p:txBody>
+        </p:sp>
+        <p:grpSp>
+          <p:nvGrpSpPr>
+            <p:cNvPr id="129" name="グループ化 128">
+              <a:extLst>
+                <a:ext uri="{FF2B5EF4-FFF2-40B4-BE49-F238E27FC236}">
+                  <a16:creationId xmlns:a16="http://schemas.microsoft.com/office/drawing/2014/main" id="{EF739820-F3F3-BE0D-051C-90DF792EAD3F}"/>
+                </a:ext>
+              </a:extLst>
+            </p:cNvPr>
+            <p:cNvGrpSpPr/>
+            <p:nvPr/>
+          </p:nvGrpSpPr>
+          <p:grpSpPr>
+            <a:xfrm>
+              <a:off x="4735154" y="680547"/>
+              <a:ext cx="176579" cy="487833"/>
+              <a:chOff x="8159036" y="1423788"/>
+              <a:chExt cx="176579" cy="487833"/>
+            </a:xfrm>
+          </p:grpSpPr>
+          <p:sp>
+            <p:nvSpPr>
+              <p:cNvPr id="130" name="円/楕円 129">
+                <a:extLst>
+                  <a:ext uri="{FF2B5EF4-FFF2-40B4-BE49-F238E27FC236}">
+                    <a16:creationId xmlns:a16="http://schemas.microsoft.com/office/drawing/2014/main" id="{8A1008AF-3E80-9F23-42F3-01C9F8F13A88}"/>
+                  </a:ext>
+                </a:extLst>
+              </p:cNvPr>
+              <p:cNvSpPr/>
+              <p:nvPr/>
+            </p:nvSpPr>
+            <p:spPr>
+              <a:xfrm>
+                <a:off x="8167276" y="1423788"/>
+                <a:ext cx="168339" cy="174795"/>
+              </a:xfrm>
+              <a:prstGeom prst="ellipse">
+                <a:avLst/>
+              </a:prstGeom>
+              <a:solidFill>
+                <a:schemeClr val="bg1"/>
+              </a:solidFill>
+              <a:ln>
+                <a:solidFill>
+                  <a:schemeClr val="tx1"/>
+                </a:solidFill>
+              </a:ln>
+            </p:spPr>
+            <p:style>
+              <a:lnRef idx="2">
+                <a:schemeClr val="accent1">
+                  <a:shade val="15000"/>
+                </a:schemeClr>
+              </a:lnRef>
+              <a:fillRef idx="1">
+                <a:schemeClr val="accent1"/>
+              </a:fillRef>
+              <a:effectRef idx="0">
+                <a:schemeClr val="accent1"/>
+              </a:effectRef>
+              <a:fontRef idx="minor">
+                <a:schemeClr val="lt1"/>
+              </a:fontRef>
+            </p:style>
+            <p:txBody>
+              <a:bodyPr rtlCol="0" anchor="ctr"/>
+              <a:lstStyle/>
+              <a:p>
+                <a:pPr algn="ctr"/>
+                <a:endParaRPr kumimoji="1" lang="ja-JP" altLang="en-US"/>
+              </a:p>
+            </p:txBody>
+          </p:sp>
+          <p:sp>
+            <p:nvSpPr>
+              <p:cNvPr id="131" name="円/楕円 130">
+                <a:extLst>
+                  <a:ext uri="{FF2B5EF4-FFF2-40B4-BE49-F238E27FC236}">
+                    <a16:creationId xmlns:a16="http://schemas.microsoft.com/office/drawing/2014/main" id="{CD422A1B-9700-F666-351E-875E5C408C74}"/>
+                  </a:ext>
+                </a:extLst>
+              </p:cNvPr>
+              <p:cNvSpPr/>
+              <p:nvPr/>
+            </p:nvSpPr>
+            <p:spPr>
+              <a:xfrm>
+                <a:off x="8159036" y="1736826"/>
+                <a:ext cx="168339" cy="174795"/>
+              </a:xfrm>
+              <a:prstGeom prst="ellipse">
+                <a:avLst/>
+              </a:prstGeom>
+              <a:solidFill>
+                <a:schemeClr val="bg1"/>
+              </a:solidFill>
+              <a:ln>
+                <a:solidFill>
+                  <a:schemeClr val="tx1"/>
+                </a:solidFill>
+              </a:ln>
+            </p:spPr>
+            <p:style>
+              <a:lnRef idx="2">
+                <a:schemeClr val="accent1">
+                  <a:shade val="15000"/>
+                </a:schemeClr>
+              </a:lnRef>
+              <a:fillRef idx="1">
+                <a:schemeClr val="accent1"/>
+              </a:fillRef>
+              <a:effectRef idx="0">
+                <a:schemeClr val="accent1"/>
+              </a:effectRef>
+              <a:fontRef idx="minor">
+                <a:schemeClr val="lt1"/>
+              </a:fontRef>
+            </p:style>
+            <p:txBody>
+              <a:bodyPr rtlCol="0" anchor="ctr"/>
+              <a:lstStyle/>
+              <a:p>
+                <a:pPr algn="ctr"/>
+                <a:endParaRPr kumimoji="1" lang="ja-JP" altLang="en-US"/>
+              </a:p>
+            </p:txBody>
+          </p:sp>
+        </p:grpSp>
+      </p:grpSp>
+      <p:sp>
+        <p:nvSpPr>
+          <p:cNvPr id="133" name="テキスト ボックス 132">
+            <a:extLst>
+              <a:ext uri="{FF2B5EF4-FFF2-40B4-BE49-F238E27FC236}">
+                <a16:creationId xmlns:a16="http://schemas.microsoft.com/office/drawing/2014/main" id="{8BF82E38-701B-AFCC-BEE4-CDFF84056A60}"/>
+              </a:ext>
+            </a:extLst>
+          </p:cNvPr>
+          <p:cNvSpPr txBox="1"/>
+          <p:nvPr/>
+        </p:nvSpPr>
+        <p:spPr>
+          <a:xfrm rot="5400000">
+            <a:off x="2689222" y="1356425"/>
+            <a:ext cx="697627" cy="646331"/>
+          </a:xfrm>
+          <a:prstGeom prst="rect">
+            <a:avLst/>
+          </a:prstGeom>
+          <a:noFill/>
+        </p:spPr>
+        <p:txBody>
+          <a:bodyPr wrap="none" rtlCol="0">
+            <a:spAutoFit/>
+          </a:bodyPr>
+          <a:lstStyle/>
+          <a:p>
+            <a:r>
+              <a:rPr kumimoji="1" lang="en-US" altLang="ja-JP" dirty="0"/>
+              <a:t>VIN</a:t>
+            </a:r>
+          </a:p>
+          <a:p>
+            <a:r>
+              <a:rPr kumimoji="1" lang="en-US" altLang="ja-JP" dirty="0"/>
+              <a:t>GND</a:t>
+            </a:r>
+            <a:endParaRPr kumimoji="1" lang="ja-JP" altLang="en-US"/>
+          </a:p>
+        </p:txBody>
+      </p:sp>
+      <p:cxnSp>
+        <p:nvCxnSpPr>
+          <p:cNvPr id="137" name="カギ線コネクタ 136">
+            <a:extLst>
+              <a:ext uri="{FF2B5EF4-FFF2-40B4-BE49-F238E27FC236}">
+                <a16:creationId xmlns:a16="http://schemas.microsoft.com/office/drawing/2014/main" id="{BB2C950D-DD5D-6A53-15D4-70E8B79CA364}"/>
+              </a:ext>
+            </a:extLst>
+          </p:cNvPr>
+          <p:cNvCxnSpPr>
+            <a:cxnSpLocks/>
+            <a:stCxn id="53" idx="0"/>
+            <a:endCxn id="45" idx="4"/>
+          </p:cNvCxnSpPr>
+          <p:nvPr/>
+        </p:nvCxnSpPr>
+        <p:spPr>
+          <a:xfrm rot="10800000" flipV="1">
+            <a:off x="5001048" y="2288343"/>
+            <a:ext cx="824710" cy="769919"/>
+          </a:xfrm>
+          <a:prstGeom prst="bentConnector3">
+            <a:avLst>
+              <a:gd name="adj1" fmla="val 50000"/>
+            </a:avLst>
+          </a:prstGeom>
+          <a:ln w="63500">
+            <a:solidFill>
+              <a:srgbClr val="FF0000"/>
+            </a:solidFill>
+          </a:ln>
+        </p:spPr>
+        <p:style>
+          <a:lnRef idx="2">
+            <a:schemeClr val="accent1"/>
+          </a:lnRef>
+          <a:fillRef idx="0">
+            <a:schemeClr val="accent1"/>
+          </a:fillRef>
+          <a:effectRef idx="1">
+            <a:schemeClr val="accent1"/>
+          </a:effectRef>
+          <a:fontRef idx="minor">
+            <a:schemeClr val="tx1"/>
+          </a:fontRef>
+        </p:style>
+      </p:cxnSp>
+      <p:cxnSp>
+        <p:nvCxnSpPr>
+          <p:cNvPr id="171" name="カギ線コネクタ 170">
+            <a:extLst>
+              <a:ext uri="{FF2B5EF4-FFF2-40B4-BE49-F238E27FC236}">
+                <a16:creationId xmlns:a16="http://schemas.microsoft.com/office/drawing/2014/main" id="{B9DE638A-650A-5579-431E-DB5976866DA0}"/>
+              </a:ext>
+            </a:extLst>
+          </p:cNvPr>
+          <p:cNvCxnSpPr>
+            <a:cxnSpLocks/>
+            <a:stCxn id="95" idx="4"/>
+            <a:endCxn id="91" idx="6"/>
+          </p:cNvCxnSpPr>
+          <p:nvPr/>
+        </p:nvCxnSpPr>
+        <p:spPr>
+          <a:xfrm>
+            <a:off x="6004516" y="3503585"/>
+            <a:ext cx="314385" cy="709498"/>
+          </a:xfrm>
+          <a:prstGeom prst="bentConnector2">
+            <a:avLst/>
+          </a:prstGeom>
+          <a:ln w="63500">
+            <a:solidFill>
+              <a:srgbClr val="00B0F0"/>
+            </a:solidFill>
+            <a:prstDash val="sysDot"/>
+          </a:ln>
+        </p:spPr>
+        <p:style>
+          <a:lnRef idx="2">
+            <a:schemeClr val="accent1"/>
+          </a:lnRef>
+          <a:fillRef idx="0">
+            <a:schemeClr val="accent1"/>
+          </a:fillRef>
+          <a:effectRef idx="1">
+            <a:schemeClr val="accent1"/>
+          </a:effectRef>
+          <a:fontRef idx="minor">
+            <a:schemeClr val="tx1"/>
+          </a:fontRef>
+        </p:style>
+      </p:cxnSp>
+      <p:cxnSp>
+        <p:nvCxnSpPr>
+          <p:cNvPr id="192" name="カギ線コネクタ 191">
+            <a:extLst>
+              <a:ext uri="{FF2B5EF4-FFF2-40B4-BE49-F238E27FC236}">
+                <a16:creationId xmlns:a16="http://schemas.microsoft.com/office/drawing/2014/main" id="{029823A8-874A-E48D-057A-59D53C544A41}"/>
+              </a:ext>
+            </a:extLst>
+          </p:cNvPr>
+          <p:cNvCxnSpPr>
+            <a:cxnSpLocks/>
+            <a:stCxn id="83" idx="0"/>
+            <a:endCxn id="80" idx="4"/>
+          </p:cNvCxnSpPr>
+          <p:nvPr/>
+        </p:nvCxnSpPr>
+        <p:spPr>
+          <a:xfrm rot="10800000">
+            <a:off x="6006495" y="3208683"/>
+            <a:ext cx="511994" cy="9897"/>
+          </a:xfrm>
+          <a:prstGeom prst="bentConnector3">
+            <a:avLst>
+              <a:gd name="adj1" fmla="val 50000"/>
+            </a:avLst>
+          </a:prstGeom>
+          <a:ln w="63500">
+            <a:solidFill>
+              <a:schemeClr val="accent2"/>
+            </a:solidFill>
+            <a:prstDash val="sysDot"/>
+          </a:ln>
+        </p:spPr>
+        <p:style>
+          <a:lnRef idx="2">
+            <a:schemeClr val="accent1"/>
+          </a:lnRef>
+          <a:fillRef idx="0">
+            <a:schemeClr val="accent1"/>
+          </a:fillRef>
+          <a:effectRef idx="1">
+            <a:schemeClr val="accent1"/>
+          </a:effectRef>
+          <a:fontRef idx="minor">
+            <a:schemeClr val="tx1"/>
+          </a:fontRef>
+        </p:style>
+      </p:cxnSp>
+      <p:cxnSp>
+        <p:nvCxnSpPr>
+          <p:cNvPr id="217" name="カギ線コネクタ 216">
+            <a:extLst>
+              <a:ext uri="{FF2B5EF4-FFF2-40B4-BE49-F238E27FC236}">
+                <a16:creationId xmlns:a16="http://schemas.microsoft.com/office/drawing/2014/main" id="{0591E666-F918-A02F-446F-3D6729A5DC9A}"/>
+              </a:ext>
+            </a:extLst>
+          </p:cNvPr>
+          <p:cNvCxnSpPr>
+            <a:cxnSpLocks/>
+            <a:stCxn id="71" idx="4"/>
+          </p:cNvCxnSpPr>
+          <p:nvPr/>
+        </p:nvCxnSpPr>
+        <p:spPr>
+          <a:xfrm>
+            <a:off x="4664583" y="2068654"/>
+            <a:ext cx="1195675" cy="524024"/>
+          </a:xfrm>
+          <a:prstGeom prst="bentConnector3">
+            <a:avLst>
+              <a:gd name="adj1" fmla="val 50000"/>
+            </a:avLst>
+          </a:prstGeom>
+          <a:ln w="63500">
+            <a:solidFill>
+              <a:schemeClr val="tx1">
+                <a:lumMod val="50000"/>
+                <a:lumOff val="50000"/>
+              </a:schemeClr>
+            </a:solidFill>
+            <a:prstDash val="sysDot"/>
+          </a:ln>
+        </p:spPr>
+        <p:style>
+          <a:lnRef idx="2">
+            <a:schemeClr val="accent1"/>
+          </a:lnRef>
+          <a:fillRef idx="0">
+            <a:schemeClr val="accent1"/>
+          </a:fillRef>
+          <a:effectRef idx="1">
+            <a:schemeClr val="accent1"/>
+          </a:effectRef>
+          <a:fontRef idx="minor">
+            <a:schemeClr val="tx1"/>
+          </a:fontRef>
+        </p:style>
+      </p:cxnSp>
+      <p:sp>
+        <p:nvSpPr>
+          <p:cNvPr id="227" name="左中かっこ 226">
+            <a:extLst>
+              <a:ext uri="{FF2B5EF4-FFF2-40B4-BE49-F238E27FC236}">
+                <a16:creationId xmlns:a16="http://schemas.microsoft.com/office/drawing/2014/main" id="{92BBADB6-AE33-0B48-FAEF-5E330B77E82F}"/>
+              </a:ext>
+            </a:extLst>
+          </p:cNvPr>
+          <p:cNvSpPr/>
+          <p:nvPr/>
+        </p:nvSpPr>
+        <p:spPr>
+          <a:xfrm rot="16200000">
+            <a:off x="5248424" y="4793376"/>
+            <a:ext cx="282897" cy="905626"/>
+          </a:xfrm>
+          <a:prstGeom prst="leftBrace">
+            <a:avLst/>
+          </a:prstGeom>
+        </p:spPr>
+        <p:style>
+          <a:lnRef idx="2">
+            <a:schemeClr val="accent1"/>
+          </a:lnRef>
+          <a:fillRef idx="0">
+            <a:schemeClr val="accent1"/>
+          </a:fillRef>
+          <a:effectRef idx="1">
+            <a:schemeClr val="accent1"/>
+          </a:effectRef>
+          <a:fontRef idx="minor">
+            <a:schemeClr val="tx1"/>
+          </a:fontRef>
+        </p:style>
+        <p:txBody>
+          <a:bodyPr rtlCol="0" anchor="ctr"/>
+          <a:lstStyle/>
+          <a:p>
+            <a:pPr algn="ctr"/>
+            <a:endParaRPr kumimoji="1" lang="ja-JP" altLang="en-US"/>
+          </a:p>
+        </p:txBody>
+      </p:sp>
+      <p:sp>
+        <p:nvSpPr>
+          <p:cNvPr id="228" name="テキスト ボックス 227">
+            <a:extLst>
+              <a:ext uri="{FF2B5EF4-FFF2-40B4-BE49-F238E27FC236}">
+                <a16:creationId xmlns:a16="http://schemas.microsoft.com/office/drawing/2014/main" id="{6128C241-8809-3D43-D62E-8712332AF60B}"/>
+              </a:ext>
+            </a:extLst>
+          </p:cNvPr>
+          <p:cNvSpPr txBox="1"/>
+          <p:nvPr/>
+        </p:nvSpPr>
+        <p:spPr>
+          <a:xfrm>
+            <a:off x="5009800" y="5476830"/>
+            <a:ext cx="760144" cy="369332"/>
+          </a:xfrm>
+          <a:prstGeom prst="rect">
+            <a:avLst/>
+          </a:prstGeom>
+          <a:noFill/>
+        </p:spPr>
+        <p:txBody>
+          <a:bodyPr wrap="none" rtlCol="0">
+            <a:spAutoFit/>
+          </a:bodyPr>
+          <a:lstStyle/>
+          <a:p>
+            <a:r>
+              <a:rPr kumimoji="1" lang="en-US" altLang="ja-JP" dirty="0"/>
+              <a:t>6pins</a:t>
+            </a:r>
+            <a:endParaRPr kumimoji="1" lang="ja-JP" altLang="en-US"/>
+          </a:p>
+        </p:txBody>
+      </p:sp>
+      <p:sp>
+        <p:nvSpPr>
+          <p:cNvPr id="229" name="左中かっこ 228">
+            <a:extLst>
+              <a:ext uri="{FF2B5EF4-FFF2-40B4-BE49-F238E27FC236}">
+                <a16:creationId xmlns:a16="http://schemas.microsoft.com/office/drawing/2014/main" id="{61A8FDD9-68DB-6EBD-5E6A-6DCE3BE47F5E}"/>
+              </a:ext>
+            </a:extLst>
+          </p:cNvPr>
+          <p:cNvSpPr/>
+          <p:nvPr/>
+        </p:nvSpPr>
+        <p:spPr>
+          <a:xfrm rot="10800000">
+            <a:off x="9047289" y="4133136"/>
+            <a:ext cx="224116" cy="659816"/>
+          </a:xfrm>
+          <a:prstGeom prst="leftBrace">
+            <a:avLst/>
+          </a:prstGeom>
+        </p:spPr>
+        <p:style>
+          <a:lnRef idx="2">
+            <a:schemeClr val="accent1"/>
+          </a:lnRef>
+          <a:fillRef idx="0">
+            <a:schemeClr val="accent1"/>
+          </a:fillRef>
+          <a:effectRef idx="1">
+            <a:schemeClr val="accent1"/>
+          </a:effectRef>
+          <a:fontRef idx="minor">
+            <a:schemeClr val="tx1"/>
+          </a:fontRef>
+        </p:style>
+        <p:txBody>
+          <a:bodyPr rtlCol="0" anchor="ctr"/>
+          <a:lstStyle/>
+          <a:p>
+            <a:pPr algn="ctr"/>
+            <a:endParaRPr kumimoji="1" lang="ja-JP" altLang="en-US"/>
+          </a:p>
+        </p:txBody>
+      </p:sp>
+      <p:sp>
+        <p:nvSpPr>
+          <p:cNvPr id="230" name="テキスト ボックス 229">
+            <a:extLst>
+              <a:ext uri="{FF2B5EF4-FFF2-40B4-BE49-F238E27FC236}">
+                <a16:creationId xmlns:a16="http://schemas.microsoft.com/office/drawing/2014/main" id="{D12B8023-6C81-759D-8F05-A577D9F90E66}"/>
+              </a:ext>
+            </a:extLst>
+          </p:cNvPr>
+          <p:cNvSpPr txBox="1"/>
+          <p:nvPr/>
+        </p:nvSpPr>
+        <p:spPr>
+          <a:xfrm>
+            <a:off x="9310389" y="4284550"/>
+            <a:ext cx="760144" cy="369332"/>
+          </a:xfrm>
+          <a:prstGeom prst="rect">
+            <a:avLst/>
+          </a:prstGeom>
+          <a:noFill/>
+        </p:spPr>
+        <p:txBody>
+          <a:bodyPr wrap="none" rtlCol="0">
+            <a:spAutoFit/>
+          </a:bodyPr>
+          <a:lstStyle/>
+          <a:p>
+            <a:r>
+              <a:rPr lang="en-US" altLang="ja-JP" dirty="0"/>
+              <a:t>2</a:t>
+            </a:r>
+            <a:r>
+              <a:rPr kumimoji="1" lang="en-US" altLang="ja-JP" dirty="0"/>
+              <a:t>pins</a:t>
+            </a:r>
+            <a:endParaRPr kumimoji="1" lang="ja-JP" altLang="en-US"/>
+          </a:p>
+        </p:txBody>
+      </p:sp>
+      <p:sp>
+        <p:nvSpPr>
+          <p:cNvPr id="250" name="左中かっこ 249">
+            <a:extLst>
+              <a:ext uri="{FF2B5EF4-FFF2-40B4-BE49-F238E27FC236}">
+                <a16:creationId xmlns:a16="http://schemas.microsoft.com/office/drawing/2014/main" id="{30029AB4-E221-E123-EDDE-E052A5C5F4A2}"/>
+              </a:ext>
+            </a:extLst>
+          </p:cNvPr>
+          <p:cNvSpPr/>
+          <p:nvPr/>
+        </p:nvSpPr>
+        <p:spPr>
+          <a:xfrm rot="10800000">
+            <a:off x="8954067" y="689543"/>
+            <a:ext cx="224116" cy="659816"/>
+          </a:xfrm>
+          <a:prstGeom prst="leftBrace">
+            <a:avLst/>
+          </a:prstGeom>
+        </p:spPr>
+        <p:style>
+          <a:lnRef idx="2">
+            <a:schemeClr val="accent1"/>
+          </a:lnRef>
+          <a:fillRef idx="0">
+            <a:schemeClr val="accent1"/>
+          </a:fillRef>
+          <a:effectRef idx="1">
+            <a:schemeClr val="accent1"/>
+          </a:effectRef>
+          <a:fontRef idx="minor">
+            <a:schemeClr val="tx1"/>
+          </a:fontRef>
+        </p:style>
+        <p:txBody>
+          <a:bodyPr rtlCol="0" anchor="ctr"/>
+          <a:lstStyle/>
+          <a:p>
+            <a:pPr algn="ctr"/>
+            <a:endParaRPr kumimoji="1" lang="ja-JP" altLang="en-US"/>
+          </a:p>
+        </p:txBody>
+      </p:sp>
+      <p:sp>
+        <p:nvSpPr>
+          <p:cNvPr id="251" name="テキスト ボックス 250">
+            <a:extLst>
+              <a:ext uri="{FF2B5EF4-FFF2-40B4-BE49-F238E27FC236}">
+                <a16:creationId xmlns:a16="http://schemas.microsoft.com/office/drawing/2014/main" id="{BB8AC2E5-B480-4065-E6AE-DD82CAC24867}"/>
+              </a:ext>
+            </a:extLst>
+          </p:cNvPr>
+          <p:cNvSpPr txBox="1"/>
+          <p:nvPr/>
+        </p:nvSpPr>
+        <p:spPr>
+          <a:xfrm>
+            <a:off x="9217167" y="840957"/>
+            <a:ext cx="760144" cy="369332"/>
+          </a:xfrm>
+          <a:prstGeom prst="rect">
+            <a:avLst/>
+          </a:prstGeom>
+          <a:noFill/>
+        </p:spPr>
+        <p:txBody>
+          <a:bodyPr wrap="none" rtlCol="0">
+            <a:spAutoFit/>
+          </a:bodyPr>
+          <a:lstStyle/>
+          <a:p>
+            <a:r>
+              <a:rPr lang="en-US" altLang="ja-JP" dirty="0"/>
+              <a:t>2</a:t>
+            </a:r>
+            <a:r>
+              <a:rPr kumimoji="1" lang="en-US" altLang="ja-JP" dirty="0"/>
+              <a:t>pins</a:t>
+            </a:r>
+            <a:endParaRPr kumimoji="1" lang="ja-JP" altLang="en-US"/>
+          </a:p>
+        </p:txBody>
+      </p:sp>
+      <p:sp>
+        <p:nvSpPr>
+          <p:cNvPr id="252" name="左中かっこ 251">
+            <a:extLst>
+              <a:ext uri="{FF2B5EF4-FFF2-40B4-BE49-F238E27FC236}">
+                <a16:creationId xmlns:a16="http://schemas.microsoft.com/office/drawing/2014/main" id="{6525D0F8-A5DF-9ED2-D4A2-D577BDCBCAF8}"/>
+              </a:ext>
+            </a:extLst>
+          </p:cNvPr>
+          <p:cNvSpPr/>
+          <p:nvPr/>
+        </p:nvSpPr>
+        <p:spPr>
+          <a:xfrm rot="16200000">
+            <a:off x="7627345" y="5014708"/>
+            <a:ext cx="246861" cy="376877"/>
+          </a:xfrm>
+          <a:prstGeom prst="leftBrace">
+            <a:avLst/>
+          </a:prstGeom>
+        </p:spPr>
+        <p:style>
+          <a:lnRef idx="2">
+            <a:schemeClr val="accent1"/>
+          </a:lnRef>
+          <a:fillRef idx="0">
+            <a:schemeClr val="accent1"/>
+          </a:fillRef>
+          <a:effectRef idx="1">
+            <a:schemeClr val="accent1"/>
+          </a:effectRef>
+          <a:fontRef idx="minor">
+            <a:schemeClr val="tx1"/>
+          </a:fontRef>
+        </p:style>
+        <p:txBody>
+          <a:bodyPr rtlCol="0" anchor="ctr"/>
+          <a:lstStyle/>
+          <a:p>
+            <a:pPr algn="ctr"/>
+            <a:endParaRPr kumimoji="1" lang="ja-JP" altLang="en-US"/>
+          </a:p>
+        </p:txBody>
+      </p:sp>
+      <p:sp>
+        <p:nvSpPr>
+          <p:cNvPr id="253" name="テキスト ボックス 252">
+            <a:extLst>
+              <a:ext uri="{FF2B5EF4-FFF2-40B4-BE49-F238E27FC236}">
+                <a16:creationId xmlns:a16="http://schemas.microsoft.com/office/drawing/2014/main" id="{E77BCAD4-6E20-6D36-99D1-151D86546BC1}"/>
+              </a:ext>
+            </a:extLst>
+          </p:cNvPr>
+          <p:cNvSpPr txBox="1"/>
+          <p:nvPr/>
+        </p:nvSpPr>
+        <p:spPr>
+          <a:xfrm>
+            <a:off x="7434545" y="5329055"/>
+            <a:ext cx="760144" cy="369332"/>
+          </a:xfrm>
+          <a:prstGeom prst="rect">
+            <a:avLst/>
+          </a:prstGeom>
+          <a:noFill/>
+        </p:spPr>
+        <p:txBody>
+          <a:bodyPr wrap="none" rtlCol="0">
+            <a:spAutoFit/>
+          </a:bodyPr>
+          <a:lstStyle/>
+          <a:p>
+            <a:r>
+              <a:rPr lang="en-US" altLang="ja-JP" dirty="0"/>
+              <a:t>3</a:t>
+            </a:r>
+            <a:r>
+              <a:rPr kumimoji="1" lang="en-US" altLang="ja-JP" dirty="0"/>
+              <a:t>pins</a:t>
+            </a:r>
+            <a:endParaRPr kumimoji="1" lang="ja-JP" altLang="en-US"/>
+          </a:p>
+        </p:txBody>
+      </p:sp>
+      <p:sp>
+        <p:nvSpPr>
+          <p:cNvPr id="292" name="円/楕円 291">
+            <a:extLst>
+              <a:ext uri="{FF2B5EF4-FFF2-40B4-BE49-F238E27FC236}">
+                <a16:creationId xmlns:a16="http://schemas.microsoft.com/office/drawing/2014/main" id="{52C79760-96C8-E267-DA7C-66C73CFE0A78}"/>
+              </a:ext>
+            </a:extLst>
+          </p:cNvPr>
+          <p:cNvSpPr/>
+          <p:nvPr/>
+        </p:nvSpPr>
+        <p:spPr>
+          <a:xfrm rot="16200000">
+            <a:off x="7335713" y="3115237"/>
+            <a:ext cx="168339" cy="174795"/>
+          </a:xfrm>
+          <a:prstGeom prst="ellipse">
+            <a:avLst/>
+          </a:prstGeom>
+          <a:solidFill>
+            <a:schemeClr val="bg1"/>
+          </a:solidFill>
+          <a:ln>
+            <a:solidFill>
+              <a:schemeClr val="tx1"/>
+            </a:solidFill>
+          </a:ln>
+        </p:spPr>
+        <p:style>
+          <a:lnRef idx="2">
+            <a:schemeClr val="accent1">
+              <a:shade val="15000"/>
+            </a:schemeClr>
+          </a:lnRef>
+          <a:fillRef idx="1">
+            <a:schemeClr val="accent1"/>
+          </a:fillRef>
+          <a:effectRef idx="0">
+            <a:schemeClr val="accent1"/>
+          </a:effectRef>
+          <a:fontRef idx="minor">
+            <a:schemeClr val="lt1"/>
+          </a:fontRef>
+        </p:style>
+        <p:txBody>
+          <a:bodyPr rtlCol="0" anchor="ctr"/>
+          <a:lstStyle/>
+          <a:p>
+            <a:pPr algn="ctr"/>
+            <a:endParaRPr kumimoji="1" lang="ja-JP" altLang="en-US"/>
+          </a:p>
+        </p:txBody>
+      </p:sp>
+      <p:sp>
+        <p:nvSpPr>
+          <p:cNvPr id="301" name="円/楕円 300">
+            <a:extLst>
+              <a:ext uri="{FF2B5EF4-FFF2-40B4-BE49-F238E27FC236}">
+                <a16:creationId xmlns:a16="http://schemas.microsoft.com/office/drawing/2014/main" id="{2777C29A-5F93-30BB-5D79-740AF2546DB1}"/>
+              </a:ext>
+            </a:extLst>
+          </p:cNvPr>
+          <p:cNvSpPr/>
+          <p:nvPr/>
+        </p:nvSpPr>
+        <p:spPr>
+          <a:xfrm rot="16200000">
+            <a:off x="7333195" y="4025790"/>
+            <a:ext cx="168339" cy="174795"/>
+          </a:xfrm>
+          <a:prstGeom prst="ellipse">
+            <a:avLst/>
+          </a:prstGeom>
+          <a:solidFill>
+            <a:schemeClr val="bg1"/>
+          </a:solidFill>
+          <a:ln>
+            <a:solidFill>
+              <a:schemeClr val="tx1"/>
+            </a:solidFill>
+          </a:ln>
+        </p:spPr>
+        <p:style>
+          <a:lnRef idx="2">
+            <a:schemeClr val="accent1">
+              <a:shade val="15000"/>
+            </a:schemeClr>
+          </a:lnRef>
+          <a:fillRef idx="1">
+            <a:schemeClr val="accent1"/>
+          </a:fillRef>
+          <a:effectRef idx="0">
+            <a:schemeClr val="accent1"/>
+          </a:effectRef>
+          <a:fontRef idx="minor">
+            <a:schemeClr val="lt1"/>
+          </a:fontRef>
+        </p:style>
+        <p:txBody>
+          <a:bodyPr rtlCol="0" anchor="ctr"/>
+          <a:lstStyle/>
+          <a:p>
+            <a:pPr algn="ctr"/>
+            <a:endParaRPr kumimoji="1" lang="ja-JP" altLang="en-US"/>
+          </a:p>
+        </p:txBody>
+      </p:sp>
+      <p:sp>
+        <p:nvSpPr>
+          <p:cNvPr id="302" name="円/楕円 301">
+            <a:extLst>
+              <a:ext uri="{FF2B5EF4-FFF2-40B4-BE49-F238E27FC236}">
+                <a16:creationId xmlns:a16="http://schemas.microsoft.com/office/drawing/2014/main" id="{311ECF48-DEFB-A15A-BC22-914F657EDEC1}"/>
+              </a:ext>
+            </a:extLst>
+          </p:cNvPr>
+          <p:cNvSpPr/>
+          <p:nvPr/>
+        </p:nvSpPr>
+        <p:spPr>
+          <a:xfrm rot="16200000">
+            <a:off x="4171124" y="2392710"/>
+            <a:ext cx="168339" cy="174795"/>
+          </a:xfrm>
+          <a:prstGeom prst="ellipse">
+            <a:avLst/>
+          </a:prstGeom>
+          <a:solidFill>
+            <a:schemeClr val="bg1"/>
+          </a:solidFill>
+          <a:ln>
+            <a:solidFill>
+              <a:schemeClr val="tx1"/>
+            </a:solidFill>
+          </a:ln>
+        </p:spPr>
+        <p:style>
+          <a:lnRef idx="2">
+            <a:schemeClr val="accent1">
+              <a:shade val="15000"/>
+            </a:schemeClr>
+          </a:lnRef>
+          <a:fillRef idx="1">
+            <a:schemeClr val="accent1"/>
+          </a:fillRef>
+          <a:effectRef idx="0">
+            <a:schemeClr val="accent1"/>
+          </a:effectRef>
+          <a:fontRef idx="minor">
+            <a:schemeClr val="lt1"/>
+          </a:fontRef>
+        </p:style>
+        <p:txBody>
+          <a:bodyPr rtlCol="0" anchor="ctr"/>
+          <a:lstStyle/>
+          <a:p>
+            <a:pPr algn="ctr"/>
+            <a:endParaRPr kumimoji="1" lang="ja-JP" altLang="en-US"/>
+          </a:p>
+        </p:txBody>
+      </p:sp>
+      <p:sp>
+        <p:nvSpPr>
+          <p:cNvPr id="13" name="円/楕円 12">
+            <a:extLst>
+              <a:ext uri="{FF2B5EF4-FFF2-40B4-BE49-F238E27FC236}">
+                <a16:creationId xmlns:a16="http://schemas.microsoft.com/office/drawing/2014/main" id="{35C8C0ED-5BA8-632C-7F94-A4366D999FC5}"/>
+              </a:ext>
+            </a:extLst>
+          </p:cNvPr>
+          <p:cNvSpPr/>
+          <p:nvPr/>
+        </p:nvSpPr>
+        <p:spPr>
+          <a:xfrm rot="16200000">
+            <a:off x="4493014" y="1446866"/>
+            <a:ext cx="168339" cy="174795"/>
+          </a:xfrm>
+          <a:prstGeom prst="ellipse">
+            <a:avLst/>
+          </a:prstGeom>
+          <a:solidFill>
+            <a:schemeClr val="bg1"/>
+          </a:solidFill>
+          <a:ln>
+            <a:solidFill>
+              <a:schemeClr val="tx1"/>
+            </a:solidFill>
+          </a:ln>
+        </p:spPr>
+        <p:style>
+          <a:lnRef idx="2">
+            <a:schemeClr val="accent1">
+              <a:shade val="15000"/>
+            </a:schemeClr>
+          </a:lnRef>
+          <a:fillRef idx="1">
+            <a:schemeClr val="accent1"/>
+          </a:fillRef>
+          <a:effectRef idx="0">
+            <a:schemeClr val="accent1"/>
+          </a:effectRef>
+          <a:fontRef idx="minor">
+            <a:schemeClr val="lt1"/>
+          </a:fontRef>
+        </p:style>
+        <p:txBody>
+          <a:bodyPr rtlCol="0" anchor="ctr"/>
+          <a:lstStyle/>
+          <a:p>
+            <a:pPr algn="ctr"/>
+            <a:endParaRPr kumimoji="1" lang="ja-JP" altLang="en-US"/>
+          </a:p>
+        </p:txBody>
+      </p:sp>
+      <p:sp>
+        <p:nvSpPr>
+          <p:cNvPr id="17" name="円/楕円 16">
+            <a:extLst>
+              <a:ext uri="{FF2B5EF4-FFF2-40B4-BE49-F238E27FC236}">
+                <a16:creationId xmlns:a16="http://schemas.microsoft.com/office/drawing/2014/main" id="{A937CF6F-055D-5FC2-3A8F-C0A799D0AE1B}"/>
+              </a:ext>
+            </a:extLst>
+          </p:cNvPr>
+          <p:cNvSpPr/>
+          <p:nvPr/>
+        </p:nvSpPr>
+        <p:spPr>
+          <a:xfrm rot="16200000">
+            <a:off x="7341111" y="1314259"/>
+            <a:ext cx="168339" cy="174795"/>
+          </a:xfrm>
+          <a:prstGeom prst="ellipse">
+            <a:avLst/>
+          </a:prstGeom>
+          <a:solidFill>
+            <a:schemeClr val="bg1"/>
+          </a:solidFill>
+          <a:ln>
+            <a:solidFill>
+              <a:schemeClr val="tx1"/>
+            </a:solidFill>
+          </a:ln>
+        </p:spPr>
+        <p:style>
+          <a:lnRef idx="2">
+            <a:schemeClr val="accent1">
+              <a:shade val="15000"/>
+            </a:schemeClr>
+          </a:lnRef>
+          <a:fillRef idx="1">
+            <a:schemeClr val="accent1"/>
+          </a:fillRef>
+          <a:effectRef idx="0">
+            <a:schemeClr val="accent1"/>
+          </a:effectRef>
+          <a:fontRef idx="minor">
+            <a:schemeClr val="lt1"/>
+          </a:fontRef>
+        </p:style>
+        <p:txBody>
+          <a:bodyPr rtlCol="0" anchor="ctr"/>
+          <a:lstStyle/>
+          <a:p>
+            <a:pPr algn="ctr"/>
+            <a:endParaRPr kumimoji="1" lang="ja-JP" altLang="en-US"/>
+          </a:p>
+        </p:txBody>
+      </p:sp>
+      <p:sp>
+        <p:nvSpPr>
+          <p:cNvPr id="20" name="円/楕円 19">
+            <a:extLst>
+              <a:ext uri="{FF2B5EF4-FFF2-40B4-BE49-F238E27FC236}">
+                <a16:creationId xmlns:a16="http://schemas.microsoft.com/office/drawing/2014/main" id="{FECF279E-4F39-BFDA-2317-01410E72E871}"/>
+              </a:ext>
+            </a:extLst>
+          </p:cNvPr>
+          <p:cNvSpPr/>
+          <p:nvPr/>
+        </p:nvSpPr>
+        <p:spPr>
+          <a:xfrm rot="16200000">
+            <a:off x="4811668" y="1456762"/>
+            <a:ext cx="168339" cy="174795"/>
+          </a:xfrm>
+          <a:prstGeom prst="ellipse">
+            <a:avLst/>
+          </a:prstGeom>
+          <a:solidFill>
+            <a:schemeClr val="bg1"/>
+          </a:solidFill>
+          <a:ln>
+            <a:solidFill>
+              <a:schemeClr val="tx1"/>
+            </a:solidFill>
+          </a:ln>
+        </p:spPr>
+        <p:style>
+          <a:lnRef idx="2">
+            <a:schemeClr val="accent1">
+              <a:shade val="15000"/>
+            </a:schemeClr>
+          </a:lnRef>
+          <a:fillRef idx="1">
+            <a:schemeClr val="accent1"/>
+          </a:fillRef>
+          <a:effectRef idx="0">
+            <a:schemeClr val="accent1"/>
+          </a:effectRef>
+          <a:fontRef idx="minor">
+            <a:schemeClr val="lt1"/>
+          </a:fontRef>
+        </p:style>
+        <p:txBody>
+          <a:bodyPr rtlCol="0" anchor="ctr"/>
+          <a:lstStyle/>
+          <a:p>
+            <a:pPr algn="ctr"/>
+            <a:endParaRPr kumimoji="1" lang="ja-JP" altLang="en-US"/>
+          </a:p>
+        </p:txBody>
+      </p:sp>
+      <p:sp>
+        <p:nvSpPr>
+          <p:cNvPr id="21" name="円/楕円 20">
+            <a:extLst>
+              <a:ext uri="{FF2B5EF4-FFF2-40B4-BE49-F238E27FC236}">
+                <a16:creationId xmlns:a16="http://schemas.microsoft.com/office/drawing/2014/main" id="{BFBD37D5-A61D-80C8-238A-83B4FEDE1D8E}"/>
+              </a:ext>
+            </a:extLst>
+          </p:cNvPr>
+          <p:cNvSpPr/>
+          <p:nvPr/>
+        </p:nvSpPr>
+        <p:spPr>
+          <a:xfrm rot="16200000">
+            <a:off x="5830965" y="1300402"/>
+            <a:ext cx="168339" cy="174795"/>
+          </a:xfrm>
+          <a:prstGeom prst="ellipse">
+            <a:avLst/>
+          </a:prstGeom>
+          <a:solidFill>
+            <a:schemeClr val="bg1"/>
+          </a:solidFill>
+          <a:ln>
+            <a:solidFill>
+              <a:schemeClr val="tx1"/>
+            </a:solidFill>
+          </a:ln>
+        </p:spPr>
+        <p:style>
+          <a:lnRef idx="2">
+            <a:schemeClr val="accent1">
+              <a:shade val="15000"/>
+            </a:schemeClr>
+          </a:lnRef>
+          <a:fillRef idx="1">
+            <a:schemeClr val="accent1"/>
+          </a:fillRef>
+          <a:effectRef idx="0">
+            <a:schemeClr val="accent1"/>
+          </a:effectRef>
+          <a:fontRef idx="minor">
+            <a:schemeClr val="lt1"/>
+          </a:fontRef>
+        </p:style>
+        <p:txBody>
+          <a:bodyPr rtlCol="0" anchor="ctr"/>
+          <a:lstStyle/>
+          <a:p>
+            <a:pPr algn="ctr"/>
+            <a:endParaRPr kumimoji="1" lang="ja-JP" altLang="en-US"/>
+          </a:p>
+        </p:txBody>
+      </p:sp>
+      <p:sp>
+        <p:nvSpPr>
+          <p:cNvPr id="28" name="円/楕円 27">
+            <a:extLst>
+              <a:ext uri="{FF2B5EF4-FFF2-40B4-BE49-F238E27FC236}">
+                <a16:creationId xmlns:a16="http://schemas.microsoft.com/office/drawing/2014/main" id="{E399BFE1-1D76-7D92-DCE6-C932C2B1AEE4}"/>
+              </a:ext>
+            </a:extLst>
+          </p:cNvPr>
+          <p:cNvSpPr/>
+          <p:nvPr/>
+        </p:nvSpPr>
+        <p:spPr>
+          <a:xfrm rot="16200000">
+            <a:off x="3871541" y="2392933"/>
+            <a:ext cx="168339" cy="174795"/>
+          </a:xfrm>
+          <a:prstGeom prst="ellipse">
+            <a:avLst/>
+          </a:prstGeom>
+          <a:solidFill>
+            <a:schemeClr val="bg1"/>
+          </a:solidFill>
+          <a:ln>
+            <a:solidFill>
+              <a:schemeClr val="tx1"/>
+            </a:solidFill>
+          </a:ln>
+        </p:spPr>
+        <p:style>
+          <a:lnRef idx="2">
+            <a:schemeClr val="accent1">
+              <a:shade val="15000"/>
+            </a:schemeClr>
+          </a:lnRef>
+          <a:fillRef idx="1">
+            <a:schemeClr val="accent1"/>
+          </a:fillRef>
+          <a:effectRef idx="0">
+            <a:schemeClr val="accent1"/>
+          </a:effectRef>
+          <a:fontRef idx="minor">
+            <a:schemeClr val="lt1"/>
+          </a:fontRef>
+        </p:style>
+        <p:txBody>
+          <a:bodyPr rtlCol="0" anchor="ctr"/>
+          <a:lstStyle/>
+          <a:p>
+            <a:pPr algn="ctr"/>
+            <a:endParaRPr kumimoji="1" lang="ja-JP" altLang="en-US"/>
+          </a:p>
+        </p:txBody>
+      </p:sp>
+      <p:sp>
+        <p:nvSpPr>
+          <p:cNvPr id="30" name="円/楕円 29">
+            <a:extLst>
+              <a:ext uri="{FF2B5EF4-FFF2-40B4-BE49-F238E27FC236}">
+                <a16:creationId xmlns:a16="http://schemas.microsoft.com/office/drawing/2014/main" id="{7058A07F-1C20-84F8-DB2F-0117B594E449}"/>
+              </a:ext>
+            </a:extLst>
+          </p:cNvPr>
+          <p:cNvSpPr/>
+          <p:nvPr/>
+        </p:nvSpPr>
+        <p:spPr>
+          <a:xfrm rot="16200000">
+            <a:off x="4819587" y="2390955"/>
+            <a:ext cx="168339" cy="174795"/>
+          </a:xfrm>
+          <a:prstGeom prst="ellipse">
+            <a:avLst/>
+          </a:prstGeom>
+          <a:solidFill>
+            <a:schemeClr val="bg1"/>
+          </a:solidFill>
+          <a:ln>
+            <a:solidFill>
+              <a:schemeClr val="tx1"/>
+            </a:solidFill>
+          </a:ln>
+        </p:spPr>
+        <p:style>
+          <a:lnRef idx="2">
+            <a:schemeClr val="accent1">
+              <a:shade val="15000"/>
+            </a:schemeClr>
+          </a:lnRef>
+          <a:fillRef idx="1">
+            <a:schemeClr val="accent1"/>
+          </a:fillRef>
+          <a:effectRef idx="0">
+            <a:schemeClr val="accent1"/>
+          </a:effectRef>
+          <a:fontRef idx="minor">
+            <a:schemeClr val="lt1"/>
+          </a:fontRef>
+        </p:style>
+        <p:txBody>
+          <a:bodyPr rtlCol="0" anchor="ctr"/>
+          <a:lstStyle/>
+          <a:p>
+            <a:pPr algn="ctr"/>
+            <a:endParaRPr kumimoji="1" lang="ja-JP" altLang="en-US"/>
+          </a:p>
+        </p:txBody>
+      </p:sp>
+      <p:sp>
+        <p:nvSpPr>
+          <p:cNvPr id="36" name="円/楕円 35">
+            <a:extLst>
+              <a:ext uri="{FF2B5EF4-FFF2-40B4-BE49-F238E27FC236}">
+                <a16:creationId xmlns:a16="http://schemas.microsoft.com/office/drawing/2014/main" id="{F6464723-6996-51AF-2561-6988667F324E}"/>
+              </a:ext>
+            </a:extLst>
+          </p:cNvPr>
+          <p:cNvSpPr/>
+          <p:nvPr/>
+        </p:nvSpPr>
+        <p:spPr>
+          <a:xfrm rot="16200000">
+            <a:off x="3861642" y="1444888"/>
+            <a:ext cx="168339" cy="174795"/>
+          </a:xfrm>
+          <a:prstGeom prst="ellipse">
+            <a:avLst/>
+          </a:prstGeom>
+          <a:solidFill>
+            <a:schemeClr val="bg1"/>
+          </a:solidFill>
+          <a:ln>
+            <a:solidFill>
+              <a:schemeClr val="tx1"/>
+            </a:solidFill>
+          </a:ln>
+        </p:spPr>
+        <p:style>
+          <a:lnRef idx="2">
+            <a:schemeClr val="accent1">
+              <a:shade val="15000"/>
+            </a:schemeClr>
+          </a:lnRef>
+          <a:fillRef idx="1">
+            <a:schemeClr val="accent1"/>
+          </a:fillRef>
+          <a:effectRef idx="0">
+            <a:schemeClr val="accent1"/>
+          </a:effectRef>
+          <a:fontRef idx="minor">
+            <a:schemeClr val="lt1"/>
+          </a:fontRef>
+        </p:style>
+        <p:txBody>
+          <a:bodyPr rtlCol="0" anchor="ctr"/>
+          <a:lstStyle/>
+          <a:p>
+            <a:pPr algn="ctr"/>
+            <a:endParaRPr kumimoji="1" lang="ja-JP" altLang="en-US"/>
+          </a:p>
+        </p:txBody>
+      </p:sp>
+      <p:sp>
+        <p:nvSpPr>
+          <p:cNvPr id="37" name="円/楕円 36">
+            <a:extLst>
+              <a:ext uri="{FF2B5EF4-FFF2-40B4-BE49-F238E27FC236}">
+                <a16:creationId xmlns:a16="http://schemas.microsoft.com/office/drawing/2014/main" id="{F9DD0371-FEE8-BD72-275C-2EDC67954C80}"/>
+              </a:ext>
+            </a:extLst>
+          </p:cNvPr>
+          <p:cNvSpPr/>
+          <p:nvPr/>
+        </p:nvSpPr>
+        <p:spPr>
+          <a:xfrm rot="16200000">
+            <a:off x="4489055" y="2404809"/>
+            <a:ext cx="168339" cy="174795"/>
+          </a:xfrm>
+          <a:prstGeom prst="ellipse">
+            <a:avLst/>
+          </a:prstGeom>
+          <a:solidFill>
+            <a:schemeClr val="bg1"/>
+          </a:solidFill>
+          <a:ln>
+            <a:solidFill>
+              <a:schemeClr val="tx1"/>
+            </a:solidFill>
+          </a:ln>
+        </p:spPr>
+        <p:style>
+          <a:lnRef idx="2">
+            <a:schemeClr val="accent1">
+              <a:shade val="15000"/>
+            </a:schemeClr>
+          </a:lnRef>
+          <a:fillRef idx="1">
+            <a:schemeClr val="accent1"/>
+          </a:fillRef>
+          <a:effectRef idx="0">
+            <a:schemeClr val="accent1"/>
+          </a:effectRef>
+          <a:fontRef idx="minor">
+            <a:schemeClr val="lt1"/>
+          </a:fontRef>
+        </p:style>
+        <p:txBody>
+          <a:bodyPr rtlCol="0" anchor="ctr"/>
+          <a:lstStyle/>
+          <a:p>
+            <a:pPr algn="ctr"/>
+            <a:endParaRPr kumimoji="1" lang="ja-JP" altLang="en-US"/>
+          </a:p>
+        </p:txBody>
+      </p:sp>
+      <p:sp>
+        <p:nvSpPr>
+          <p:cNvPr id="45" name="円/楕円 44">
+            <a:extLst>
+              <a:ext uri="{FF2B5EF4-FFF2-40B4-BE49-F238E27FC236}">
+                <a16:creationId xmlns:a16="http://schemas.microsoft.com/office/drawing/2014/main" id="{76ABE9CE-C68B-9D35-7490-56BD6C6967C8}"/>
+              </a:ext>
+            </a:extLst>
+          </p:cNvPr>
+          <p:cNvSpPr/>
+          <p:nvPr/>
+        </p:nvSpPr>
+        <p:spPr>
+          <a:xfrm rot="16200000">
+            <a:off x="4829481" y="2970866"/>
+            <a:ext cx="168339" cy="174795"/>
+          </a:xfrm>
+          <a:prstGeom prst="ellipse">
+            <a:avLst/>
+          </a:prstGeom>
+          <a:solidFill>
+            <a:schemeClr val="bg1"/>
+          </a:solidFill>
+          <a:ln>
+            <a:solidFill>
+              <a:schemeClr val="tx1"/>
+            </a:solidFill>
+          </a:ln>
+        </p:spPr>
+        <p:style>
+          <a:lnRef idx="2">
+            <a:schemeClr val="accent1">
+              <a:shade val="15000"/>
+            </a:schemeClr>
+          </a:lnRef>
+          <a:fillRef idx="1">
+            <a:schemeClr val="accent1"/>
+          </a:fillRef>
+          <a:effectRef idx="0">
+            <a:schemeClr val="accent1"/>
+          </a:effectRef>
+          <a:fontRef idx="minor">
+            <a:schemeClr val="lt1"/>
+          </a:fontRef>
+        </p:style>
+        <p:txBody>
+          <a:bodyPr rtlCol="0" anchor="ctr"/>
+          <a:lstStyle/>
+          <a:p>
+            <a:pPr algn="ctr"/>
+            <a:endParaRPr kumimoji="1" lang="ja-JP" altLang="en-US"/>
+          </a:p>
+        </p:txBody>
+      </p:sp>
+      <p:cxnSp>
+        <p:nvCxnSpPr>
+          <p:cNvPr id="47" name="カギ線コネクタ 46">
+            <a:extLst>
+              <a:ext uri="{FF2B5EF4-FFF2-40B4-BE49-F238E27FC236}">
+                <a16:creationId xmlns:a16="http://schemas.microsoft.com/office/drawing/2014/main" id="{E4FD6161-1AB4-728A-583B-2E42379B5E8F}"/>
+              </a:ext>
+            </a:extLst>
+          </p:cNvPr>
+          <p:cNvCxnSpPr>
+            <a:cxnSpLocks/>
+            <a:stCxn id="45" idx="6"/>
+            <a:endCxn id="30" idx="2"/>
+          </p:cNvCxnSpPr>
+          <p:nvPr/>
+        </p:nvCxnSpPr>
+        <p:spPr>
+          <a:xfrm rot="16200000" flipV="1">
+            <a:off x="4702918" y="2763361"/>
+            <a:ext cx="411572" cy="9894"/>
+          </a:xfrm>
+          <a:prstGeom prst="bentConnector3">
+            <a:avLst>
+              <a:gd name="adj1" fmla="val 50000"/>
+            </a:avLst>
+          </a:prstGeom>
+          <a:ln w="63500">
+            <a:solidFill>
+              <a:srgbClr val="FF0000"/>
+            </a:solidFill>
+            <a:prstDash val="sysDot"/>
+          </a:ln>
+        </p:spPr>
+        <p:style>
+          <a:lnRef idx="2">
+            <a:schemeClr val="accent1"/>
+          </a:lnRef>
+          <a:fillRef idx="0">
+            <a:schemeClr val="accent1"/>
+          </a:fillRef>
+          <a:effectRef idx="1">
+            <a:schemeClr val="accent1"/>
+          </a:effectRef>
+          <a:fontRef idx="minor">
+            <a:schemeClr val="tx1"/>
+          </a:fontRef>
+        </p:style>
+      </p:cxnSp>
+      <p:sp>
+        <p:nvSpPr>
+          <p:cNvPr id="53" name="円/楕円 52">
+            <a:extLst>
+              <a:ext uri="{FF2B5EF4-FFF2-40B4-BE49-F238E27FC236}">
+                <a16:creationId xmlns:a16="http://schemas.microsoft.com/office/drawing/2014/main" id="{E7D5BA70-CA2B-DE17-C8B8-75B0E68CD0B6}"/>
+              </a:ext>
+            </a:extLst>
+          </p:cNvPr>
+          <p:cNvSpPr/>
+          <p:nvPr/>
+        </p:nvSpPr>
+        <p:spPr>
+          <a:xfrm rot="16200000">
+            <a:off x="5828986" y="2200947"/>
+            <a:ext cx="168339" cy="174795"/>
+          </a:xfrm>
+          <a:prstGeom prst="ellipse">
+            <a:avLst/>
+          </a:prstGeom>
+          <a:solidFill>
+            <a:schemeClr val="bg1"/>
+          </a:solidFill>
+          <a:ln>
+            <a:solidFill>
+              <a:schemeClr val="tx1"/>
+            </a:solidFill>
+          </a:ln>
+        </p:spPr>
+        <p:style>
+          <a:lnRef idx="2">
+            <a:schemeClr val="accent1">
+              <a:shade val="15000"/>
+            </a:schemeClr>
+          </a:lnRef>
+          <a:fillRef idx="1">
+            <a:schemeClr val="accent1"/>
+          </a:fillRef>
+          <a:effectRef idx="0">
+            <a:schemeClr val="accent1"/>
+          </a:effectRef>
+          <a:fontRef idx="minor">
+            <a:schemeClr val="lt1"/>
+          </a:fontRef>
+        </p:style>
+        <p:txBody>
+          <a:bodyPr rtlCol="0" anchor="ctr"/>
+          <a:lstStyle/>
+          <a:p>
+            <a:pPr algn="ctr"/>
+            <a:endParaRPr kumimoji="1" lang="ja-JP" altLang="en-US"/>
+          </a:p>
+        </p:txBody>
+      </p:sp>
+      <p:sp>
+        <p:nvSpPr>
+          <p:cNvPr id="70" name="円/楕円 69">
+            <a:extLst>
+              <a:ext uri="{FF2B5EF4-FFF2-40B4-BE49-F238E27FC236}">
+                <a16:creationId xmlns:a16="http://schemas.microsoft.com/office/drawing/2014/main" id="{5C086AFC-EABA-8410-57E6-5017CCA13064}"/>
+              </a:ext>
+            </a:extLst>
+          </p:cNvPr>
+          <p:cNvSpPr/>
+          <p:nvPr/>
+        </p:nvSpPr>
+        <p:spPr>
+          <a:xfrm rot="16200000">
+            <a:off x="5836906" y="2517626"/>
+            <a:ext cx="168339" cy="174795"/>
+          </a:xfrm>
+          <a:prstGeom prst="ellipse">
+            <a:avLst/>
+          </a:prstGeom>
+          <a:solidFill>
+            <a:schemeClr val="bg1"/>
+          </a:solidFill>
+          <a:ln>
+            <a:solidFill>
+              <a:schemeClr val="tx1"/>
+            </a:solidFill>
+          </a:ln>
+        </p:spPr>
+        <p:style>
+          <a:lnRef idx="2">
+            <a:schemeClr val="accent1">
+              <a:shade val="15000"/>
+            </a:schemeClr>
+          </a:lnRef>
+          <a:fillRef idx="1">
+            <a:schemeClr val="accent1"/>
+          </a:fillRef>
+          <a:effectRef idx="0">
+            <a:schemeClr val="accent1"/>
+          </a:effectRef>
+          <a:fontRef idx="minor">
+            <a:schemeClr val="lt1"/>
+          </a:fontRef>
+        </p:style>
+        <p:txBody>
+          <a:bodyPr rtlCol="0" anchor="ctr"/>
+          <a:lstStyle/>
+          <a:p>
+            <a:pPr algn="ctr"/>
+            <a:endParaRPr kumimoji="1" lang="ja-JP" altLang="en-US"/>
+          </a:p>
+        </p:txBody>
+      </p:sp>
+      <p:sp>
+        <p:nvSpPr>
+          <p:cNvPr id="71" name="円/楕円 70">
+            <a:extLst>
+              <a:ext uri="{FF2B5EF4-FFF2-40B4-BE49-F238E27FC236}">
+                <a16:creationId xmlns:a16="http://schemas.microsoft.com/office/drawing/2014/main" id="{C957424E-670E-4150-B76D-8CBDC33BF8FB}"/>
+              </a:ext>
+            </a:extLst>
+          </p:cNvPr>
+          <p:cNvSpPr/>
+          <p:nvPr/>
+        </p:nvSpPr>
+        <p:spPr>
+          <a:xfrm rot="16200000">
+            <a:off x="4493016" y="1981257"/>
+            <a:ext cx="168339" cy="174795"/>
+          </a:xfrm>
+          <a:prstGeom prst="ellipse">
+            <a:avLst/>
+          </a:prstGeom>
+          <a:solidFill>
+            <a:schemeClr val="bg1"/>
+          </a:solidFill>
+          <a:ln>
+            <a:solidFill>
+              <a:schemeClr val="tx1"/>
+            </a:solidFill>
+          </a:ln>
+        </p:spPr>
+        <p:style>
+          <a:lnRef idx="2">
+            <a:schemeClr val="accent1">
+              <a:shade val="15000"/>
+            </a:schemeClr>
+          </a:lnRef>
+          <a:fillRef idx="1">
+            <a:schemeClr val="accent1"/>
+          </a:fillRef>
+          <a:effectRef idx="0">
+            <a:schemeClr val="accent1"/>
+          </a:effectRef>
+          <a:fontRef idx="minor">
+            <a:schemeClr val="lt1"/>
+          </a:fontRef>
+        </p:style>
+        <p:txBody>
+          <a:bodyPr rtlCol="0" anchor="ctr"/>
+          <a:lstStyle/>
+          <a:p>
+            <a:pPr algn="ctr"/>
+            <a:endParaRPr kumimoji="1" lang="ja-JP" altLang="en-US"/>
+          </a:p>
+        </p:txBody>
+      </p:sp>
+      <p:sp>
+        <p:nvSpPr>
+          <p:cNvPr id="75" name="円/楕円 74">
+            <a:extLst>
+              <a:ext uri="{FF2B5EF4-FFF2-40B4-BE49-F238E27FC236}">
+                <a16:creationId xmlns:a16="http://schemas.microsoft.com/office/drawing/2014/main" id="{1A0380CD-715B-087F-603C-65A047DDB87B}"/>
+              </a:ext>
+            </a:extLst>
+          </p:cNvPr>
+          <p:cNvSpPr/>
+          <p:nvPr/>
+        </p:nvSpPr>
+        <p:spPr>
+          <a:xfrm>
+            <a:off x="8848851" y="2831395"/>
+            <a:ext cx="168339" cy="174795"/>
+          </a:xfrm>
+          <a:prstGeom prst="ellipse">
+            <a:avLst/>
+          </a:prstGeom>
+          <a:solidFill>
+            <a:schemeClr val="bg1"/>
+          </a:solidFill>
+          <a:ln>
+            <a:solidFill>
+              <a:schemeClr val="tx1"/>
+            </a:solidFill>
+          </a:ln>
+        </p:spPr>
+        <p:style>
+          <a:lnRef idx="2">
+            <a:schemeClr val="accent1">
+              <a:shade val="15000"/>
+            </a:schemeClr>
+          </a:lnRef>
+          <a:fillRef idx="1">
+            <a:schemeClr val="accent1"/>
+          </a:fillRef>
+          <a:effectRef idx="0">
+            <a:schemeClr val="accent1"/>
+          </a:effectRef>
+          <a:fontRef idx="minor">
+            <a:schemeClr val="lt1"/>
+          </a:fontRef>
+        </p:style>
+        <p:txBody>
+          <a:bodyPr rtlCol="0" anchor="ctr"/>
+          <a:lstStyle/>
+          <a:p>
+            <a:pPr algn="ctr"/>
+            <a:endParaRPr kumimoji="1" lang="ja-JP" altLang="en-US"/>
+          </a:p>
+        </p:txBody>
+      </p:sp>
+      <p:sp>
+        <p:nvSpPr>
+          <p:cNvPr id="80" name="円/楕円 79">
+            <a:extLst>
+              <a:ext uri="{FF2B5EF4-FFF2-40B4-BE49-F238E27FC236}">
+                <a16:creationId xmlns:a16="http://schemas.microsoft.com/office/drawing/2014/main" id="{5EB04003-FB10-F2B5-4A50-846EE7C8B9DA}"/>
+              </a:ext>
+            </a:extLst>
+          </p:cNvPr>
+          <p:cNvSpPr/>
+          <p:nvPr/>
+        </p:nvSpPr>
+        <p:spPr>
+          <a:xfrm rot="16200000">
+            <a:off x="5834928" y="3121285"/>
+            <a:ext cx="168339" cy="174795"/>
+          </a:xfrm>
+          <a:prstGeom prst="ellipse">
+            <a:avLst/>
+          </a:prstGeom>
+          <a:solidFill>
+            <a:schemeClr val="bg1"/>
+          </a:solidFill>
+          <a:ln>
+            <a:solidFill>
+              <a:schemeClr val="tx1"/>
+            </a:solidFill>
+          </a:ln>
+        </p:spPr>
+        <p:style>
+          <a:lnRef idx="2">
+            <a:schemeClr val="accent1">
+              <a:shade val="15000"/>
+            </a:schemeClr>
+          </a:lnRef>
+          <a:fillRef idx="1">
+            <a:schemeClr val="accent1"/>
+          </a:fillRef>
+          <a:effectRef idx="0">
+            <a:schemeClr val="accent1"/>
+          </a:effectRef>
+          <a:fontRef idx="minor">
+            <a:schemeClr val="lt1"/>
+          </a:fontRef>
+        </p:style>
+        <p:txBody>
+          <a:bodyPr rtlCol="0" anchor="ctr"/>
+          <a:lstStyle/>
+          <a:p>
+            <a:pPr algn="ctr"/>
+            <a:endParaRPr kumimoji="1" lang="ja-JP" altLang="en-US"/>
+          </a:p>
+        </p:txBody>
+      </p:sp>
+      <p:sp>
+        <p:nvSpPr>
+          <p:cNvPr id="83" name="円/楕円 82">
+            <a:extLst>
+              <a:ext uri="{FF2B5EF4-FFF2-40B4-BE49-F238E27FC236}">
+                <a16:creationId xmlns:a16="http://schemas.microsoft.com/office/drawing/2014/main" id="{1F872CB6-5F3B-FE84-6289-55BEC039A2E8}"/>
+              </a:ext>
+            </a:extLst>
+          </p:cNvPr>
+          <p:cNvSpPr/>
+          <p:nvPr/>
+        </p:nvSpPr>
+        <p:spPr>
+          <a:xfrm rot="16200000">
+            <a:off x="6521717" y="3131182"/>
+            <a:ext cx="168339" cy="174795"/>
+          </a:xfrm>
+          <a:prstGeom prst="ellipse">
+            <a:avLst/>
+          </a:prstGeom>
+          <a:solidFill>
+            <a:schemeClr val="bg1"/>
+          </a:solidFill>
+          <a:ln>
+            <a:solidFill>
+              <a:schemeClr val="tx1"/>
+            </a:solidFill>
+          </a:ln>
+        </p:spPr>
+        <p:style>
+          <a:lnRef idx="2">
+            <a:schemeClr val="accent1">
+              <a:shade val="15000"/>
+            </a:schemeClr>
+          </a:lnRef>
+          <a:fillRef idx="1">
+            <a:schemeClr val="accent1"/>
+          </a:fillRef>
+          <a:effectRef idx="0">
+            <a:schemeClr val="accent1"/>
+          </a:effectRef>
+          <a:fontRef idx="minor">
+            <a:schemeClr val="lt1"/>
+          </a:fontRef>
+        </p:style>
+        <p:txBody>
+          <a:bodyPr rtlCol="0" anchor="ctr"/>
+          <a:lstStyle/>
+          <a:p>
+            <a:pPr algn="ctr"/>
+            <a:endParaRPr kumimoji="1" lang="ja-JP" altLang="en-US"/>
+          </a:p>
+        </p:txBody>
+      </p:sp>
+      <p:sp>
+        <p:nvSpPr>
+          <p:cNvPr id="91" name="円/楕円 90">
+            <a:extLst>
+              <a:ext uri="{FF2B5EF4-FFF2-40B4-BE49-F238E27FC236}">
+                <a16:creationId xmlns:a16="http://schemas.microsoft.com/office/drawing/2014/main" id="{777B20B3-6E88-238C-C27B-EC79C98BD8C9}"/>
+              </a:ext>
+            </a:extLst>
+          </p:cNvPr>
+          <p:cNvSpPr/>
+          <p:nvPr/>
+        </p:nvSpPr>
+        <p:spPr>
+          <a:xfrm rot="16200000">
+            <a:off x="6234731" y="4209855"/>
+            <a:ext cx="168339" cy="174795"/>
+          </a:xfrm>
+          <a:prstGeom prst="ellipse">
+            <a:avLst/>
+          </a:prstGeom>
+          <a:solidFill>
+            <a:schemeClr val="bg1"/>
+          </a:solidFill>
+          <a:ln>
+            <a:solidFill>
+              <a:schemeClr val="tx1"/>
+            </a:solidFill>
+          </a:ln>
+        </p:spPr>
+        <p:style>
+          <a:lnRef idx="2">
+            <a:schemeClr val="accent1">
+              <a:shade val="15000"/>
+            </a:schemeClr>
+          </a:lnRef>
+          <a:fillRef idx="1">
+            <a:schemeClr val="accent1"/>
+          </a:fillRef>
+          <a:effectRef idx="0">
+            <a:schemeClr val="accent1"/>
+          </a:effectRef>
+          <a:fontRef idx="minor">
+            <a:schemeClr val="lt1"/>
+          </a:fontRef>
+        </p:style>
+        <p:txBody>
+          <a:bodyPr rtlCol="0" anchor="ctr"/>
+          <a:lstStyle/>
+          <a:p>
+            <a:pPr algn="ctr"/>
+            <a:endParaRPr kumimoji="1" lang="ja-JP" altLang="en-US"/>
+          </a:p>
+        </p:txBody>
+      </p:sp>
+      <p:sp>
+        <p:nvSpPr>
+          <p:cNvPr id="95" name="円/楕円 94">
+            <a:extLst>
+              <a:ext uri="{FF2B5EF4-FFF2-40B4-BE49-F238E27FC236}">
+                <a16:creationId xmlns:a16="http://schemas.microsoft.com/office/drawing/2014/main" id="{BC31F4DC-C3BD-0BB5-0307-42281DD1EE79}"/>
+              </a:ext>
+            </a:extLst>
+          </p:cNvPr>
+          <p:cNvSpPr/>
+          <p:nvPr/>
+        </p:nvSpPr>
+        <p:spPr>
+          <a:xfrm rot="16200000">
+            <a:off x="5832949" y="3416188"/>
+            <a:ext cx="168339" cy="174795"/>
+          </a:xfrm>
+          <a:prstGeom prst="ellipse">
+            <a:avLst/>
+          </a:prstGeom>
+          <a:solidFill>
+            <a:schemeClr val="bg1"/>
+          </a:solidFill>
+          <a:ln>
+            <a:solidFill>
+              <a:schemeClr val="tx1"/>
+            </a:solidFill>
+          </a:ln>
+        </p:spPr>
+        <p:style>
+          <a:lnRef idx="2">
+            <a:schemeClr val="accent1">
+              <a:shade val="15000"/>
+            </a:schemeClr>
+          </a:lnRef>
+          <a:fillRef idx="1">
+            <a:schemeClr val="accent1"/>
+          </a:fillRef>
+          <a:effectRef idx="0">
+            <a:schemeClr val="accent1"/>
+          </a:effectRef>
+          <a:fontRef idx="minor">
+            <a:schemeClr val="lt1"/>
+          </a:fontRef>
+        </p:style>
+        <p:txBody>
+          <a:bodyPr rtlCol="0" anchor="ctr"/>
+          <a:lstStyle/>
+          <a:p>
+            <a:pPr algn="ctr"/>
+            <a:endParaRPr kumimoji="1" lang="ja-JP" altLang="en-US"/>
+          </a:p>
+        </p:txBody>
+      </p:sp>
+      <p:sp>
+        <p:nvSpPr>
+          <p:cNvPr id="101" name="円/楕円 100">
+            <a:extLst>
+              <a:ext uri="{FF2B5EF4-FFF2-40B4-BE49-F238E27FC236}">
+                <a16:creationId xmlns:a16="http://schemas.microsoft.com/office/drawing/2014/main" id="{1B2D9FFD-808F-0CB5-B8A4-2C436B58431E}"/>
+              </a:ext>
+            </a:extLst>
+          </p:cNvPr>
+          <p:cNvSpPr/>
+          <p:nvPr/>
+        </p:nvSpPr>
+        <p:spPr>
+          <a:xfrm rot="16200000">
+            <a:off x="7345608" y="3718899"/>
+            <a:ext cx="168339" cy="174795"/>
+          </a:xfrm>
+          <a:prstGeom prst="ellipse">
+            <a:avLst/>
+          </a:prstGeom>
+          <a:solidFill>
+            <a:schemeClr val="bg1"/>
+          </a:solidFill>
+          <a:ln>
+            <a:solidFill>
+              <a:schemeClr val="tx1"/>
+            </a:solidFill>
+          </a:ln>
+        </p:spPr>
+        <p:style>
+          <a:lnRef idx="2">
+            <a:schemeClr val="accent1">
+              <a:shade val="15000"/>
+            </a:schemeClr>
+          </a:lnRef>
+          <a:fillRef idx="1">
+            <a:schemeClr val="accent1"/>
+          </a:fillRef>
+          <a:effectRef idx="0">
+            <a:schemeClr val="accent1"/>
+          </a:effectRef>
+          <a:fontRef idx="minor">
+            <a:schemeClr val="lt1"/>
+          </a:fontRef>
+        </p:style>
+        <p:txBody>
+          <a:bodyPr rtlCol="0" anchor="ctr"/>
+          <a:lstStyle/>
+          <a:p>
+            <a:pPr algn="ctr"/>
+            <a:endParaRPr kumimoji="1" lang="ja-JP" altLang="en-US"/>
+          </a:p>
+        </p:txBody>
+      </p:sp>
+    </p:spTree>
+    <p:extLst>
+      <p:ext uri="{BB962C8B-B14F-4D97-AF65-F5344CB8AC3E}">
+        <p14:creationId xmlns:p14="http://schemas.microsoft.com/office/powerpoint/2010/main" val="2949716486"/>
+      </p:ext>
+    </p:extLst>
+  </p:cSld>
+  <p:clrMapOvr>
+    <a:masterClrMapping/>
+  </p:clrMapOvr>
+</p:sld>
+</file>
+
+<file path=ppt/slides/slide3.xml><?xml version="1.0" encoding="utf-8"?>
+<p:sld xmlns:a="http://schemas.openxmlformats.org/drawingml/2006/main" xmlns:r="http://schemas.openxmlformats.org/officeDocument/2006/relationships" xmlns:p="http://schemas.openxmlformats.org/presentationml/2006/main">
+  <p:cSld>
+    <p:spTree>
+      <p:nvGrpSpPr>
+        <p:cNvPr id="1" name="">
+          <a:extLst>
+            <a:ext uri="{FF2B5EF4-FFF2-40B4-BE49-F238E27FC236}">
+              <a16:creationId xmlns:a16="http://schemas.microsoft.com/office/drawing/2014/main" id="{788D002D-723C-4947-9F9D-8EAC53C782E8}"/>
+            </a:ext>
+          </a:extLst>
+        </p:cNvPr>
+        <p:cNvGrpSpPr/>
+        <p:nvPr/>
+      </p:nvGrpSpPr>
+      <p:grpSpPr>
+        <a:xfrm>
+          <a:off x="0" y="0"/>
+          <a:ext cx="0" cy="0"/>
+          <a:chOff x="0" y="0"/>
+          <a:chExt cx="0" cy="0"/>
+        </a:xfrm>
+      </p:grpSpPr>
+      <p:sp>
+        <p:nvSpPr>
+          <p:cNvPr id="55" name="正方形/長方形 54">
+            <a:extLst>
+              <a:ext uri="{FF2B5EF4-FFF2-40B4-BE49-F238E27FC236}">
+                <a16:creationId xmlns:a16="http://schemas.microsoft.com/office/drawing/2014/main" id="{466D66A3-D69B-1E75-64B3-225D9CE93629}"/>
+              </a:ext>
+            </a:extLst>
+          </p:cNvPr>
+          <p:cNvSpPr/>
+          <p:nvPr/>
+        </p:nvSpPr>
+        <p:spPr>
+          <a:xfrm>
+            <a:off x="8473604" y="1582151"/>
+            <a:ext cx="304622" cy="2399924"/>
+          </a:xfrm>
+          <a:prstGeom prst="rect">
+            <a:avLst/>
+          </a:prstGeom>
+        </p:spPr>
+        <p:style>
+          <a:lnRef idx="2">
+            <a:schemeClr val="accent1">
+              <a:shade val="15000"/>
+            </a:schemeClr>
+          </a:lnRef>
+          <a:fillRef idx="1">
+            <a:schemeClr val="accent1"/>
+          </a:fillRef>
+          <a:effectRef idx="0">
+            <a:schemeClr val="accent1"/>
+          </a:effectRef>
+          <a:fontRef idx="minor">
+            <a:schemeClr val="lt1"/>
+          </a:fontRef>
+        </p:style>
+        <p:txBody>
+          <a:bodyPr rtlCol="0" anchor="ctr"/>
+          <a:lstStyle/>
+          <a:p>
+            <a:pPr algn="ctr"/>
+            <a:endParaRPr kumimoji="1" lang="ja-JP" altLang="en-US"/>
+          </a:p>
+        </p:txBody>
+      </p:sp>
+      <p:grpSp>
+        <p:nvGrpSpPr>
+          <p:cNvPr id="66" name="グループ化 65">
+            <a:extLst>
+              <a:ext uri="{FF2B5EF4-FFF2-40B4-BE49-F238E27FC236}">
+                <a16:creationId xmlns:a16="http://schemas.microsoft.com/office/drawing/2014/main" id="{62C9CE65-D717-9803-11BD-3920B26D74A6}"/>
+              </a:ext>
+            </a:extLst>
+          </p:cNvPr>
+          <p:cNvGrpSpPr/>
+          <p:nvPr/>
+        </p:nvGrpSpPr>
+        <p:grpSpPr>
+          <a:xfrm>
+            <a:off x="8521957" y="1605506"/>
+            <a:ext cx="195648" cy="2000390"/>
+            <a:chOff x="7331138" y="1309815"/>
+            <a:chExt cx="195648" cy="2000390"/>
+          </a:xfrm>
+        </p:grpSpPr>
+        <p:grpSp>
+          <p:nvGrpSpPr>
+            <p:cNvPr id="60" name="グループ化 59">
+              <a:extLst>
+                <a:ext uri="{FF2B5EF4-FFF2-40B4-BE49-F238E27FC236}">
+                  <a16:creationId xmlns:a16="http://schemas.microsoft.com/office/drawing/2014/main" id="{D75C3A4F-3AAA-A3FD-1C00-D8EDDEF22558}"/>
+                </a:ext>
+              </a:extLst>
+            </p:cNvPr>
+            <p:cNvGrpSpPr/>
+            <p:nvPr/>
+          </p:nvGrpSpPr>
+          <p:grpSpPr>
+            <a:xfrm>
+              <a:off x="7341967" y="1309815"/>
+              <a:ext cx="184819" cy="1097435"/>
+              <a:chOff x="7341967" y="1309815"/>
+              <a:chExt cx="184819" cy="1097435"/>
+            </a:xfrm>
+          </p:grpSpPr>
+          <p:sp>
+            <p:nvSpPr>
+              <p:cNvPr id="56" name="円/楕円 55">
+                <a:extLst>
+                  <a:ext uri="{FF2B5EF4-FFF2-40B4-BE49-F238E27FC236}">
+                    <a16:creationId xmlns:a16="http://schemas.microsoft.com/office/drawing/2014/main" id="{F9515C39-64E2-0200-457C-FB177949EEFE}"/>
+                  </a:ext>
+                </a:extLst>
+              </p:cNvPr>
+              <p:cNvSpPr/>
+              <p:nvPr/>
+            </p:nvSpPr>
+            <p:spPr>
+              <a:xfrm>
+                <a:off x="7358447" y="1309815"/>
+                <a:ext cx="168339" cy="174795"/>
+              </a:xfrm>
+              <a:prstGeom prst="ellipse">
+                <a:avLst/>
+              </a:prstGeom>
+              <a:solidFill>
+                <a:schemeClr val="bg1"/>
+              </a:solidFill>
+              <a:ln>
+                <a:solidFill>
+                  <a:schemeClr val="tx1"/>
+                </a:solidFill>
+              </a:ln>
+            </p:spPr>
+            <p:style>
+              <a:lnRef idx="2">
+                <a:schemeClr val="accent1">
+                  <a:shade val="15000"/>
+                </a:schemeClr>
+              </a:lnRef>
+              <a:fillRef idx="1">
+                <a:schemeClr val="accent1"/>
+              </a:fillRef>
+              <a:effectRef idx="0">
+                <a:schemeClr val="accent1"/>
+              </a:effectRef>
+              <a:fontRef idx="minor">
+                <a:schemeClr val="lt1"/>
+              </a:fontRef>
+            </p:style>
+            <p:txBody>
+              <a:bodyPr rtlCol="0" anchor="ctr"/>
+              <a:lstStyle/>
+              <a:p>
+                <a:pPr algn="ctr"/>
+                <a:endParaRPr kumimoji="1" lang="ja-JP" altLang="en-US"/>
+              </a:p>
+            </p:txBody>
+          </p:sp>
+          <p:sp>
+            <p:nvSpPr>
+              <p:cNvPr id="57" name="円/楕円 56">
+                <a:extLst>
+                  <a:ext uri="{FF2B5EF4-FFF2-40B4-BE49-F238E27FC236}">
+                    <a16:creationId xmlns:a16="http://schemas.microsoft.com/office/drawing/2014/main" id="{CD88B664-52A2-49E2-02C5-8CFFBDF4939F}"/>
+                  </a:ext>
+                </a:extLst>
+              </p:cNvPr>
+              <p:cNvSpPr/>
+              <p:nvPr/>
+            </p:nvSpPr>
+            <p:spPr>
+              <a:xfrm>
+                <a:off x="7350207" y="1622853"/>
+                <a:ext cx="168339" cy="174795"/>
+              </a:xfrm>
+              <a:prstGeom prst="ellipse">
+                <a:avLst/>
+              </a:prstGeom>
+              <a:solidFill>
+                <a:schemeClr val="bg1"/>
+              </a:solidFill>
+              <a:ln>
+                <a:solidFill>
+                  <a:schemeClr val="tx1"/>
+                </a:solidFill>
+              </a:ln>
+            </p:spPr>
+            <p:style>
+              <a:lnRef idx="2">
+                <a:schemeClr val="accent1">
+                  <a:shade val="15000"/>
+                </a:schemeClr>
+              </a:lnRef>
+              <a:fillRef idx="1">
+                <a:schemeClr val="accent1"/>
+              </a:fillRef>
+              <a:effectRef idx="0">
+                <a:schemeClr val="accent1"/>
+              </a:effectRef>
+              <a:fontRef idx="minor">
+                <a:schemeClr val="lt1"/>
+              </a:fontRef>
+            </p:style>
+            <p:txBody>
+              <a:bodyPr rtlCol="0" anchor="ctr"/>
+              <a:lstStyle/>
+              <a:p>
+                <a:pPr algn="ctr"/>
+                <a:endParaRPr kumimoji="1" lang="ja-JP" altLang="en-US"/>
+              </a:p>
+            </p:txBody>
+          </p:sp>
+          <p:sp>
+            <p:nvSpPr>
+              <p:cNvPr id="58" name="円/楕円 57">
+                <a:extLst>
+                  <a:ext uri="{FF2B5EF4-FFF2-40B4-BE49-F238E27FC236}">
+                    <a16:creationId xmlns:a16="http://schemas.microsoft.com/office/drawing/2014/main" id="{909DA7BE-4DB2-1922-1C05-85DA48EE164F}"/>
+                  </a:ext>
+                </a:extLst>
+              </p:cNvPr>
+              <p:cNvSpPr/>
+              <p:nvPr/>
+            </p:nvSpPr>
+            <p:spPr>
+              <a:xfrm>
+                <a:off x="7350207" y="1919417"/>
+                <a:ext cx="168339" cy="174795"/>
+              </a:xfrm>
+              <a:prstGeom prst="ellipse">
+                <a:avLst/>
+              </a:prstGeom>
+              <a:solidFill>
+                <a:schemeClr val="bg1"/>
+              </a:solidFill>
+              <a:ln>
+                <a:solidFill>
+                  <a:schemeClr val="tx1"/>
+                </a:solidFill>
+              </a:ln>
+            </p:spPr>
+            <p:style>
+              <a:lnRef idx="2">
+                <a:schemeClr val="accent1">
+                  <a:shade val="15000"/>
+                </a:schemeClr>
+              </a:lnRef>
+              <a:fillRef idx="1">
+                <a:schemeClr val="accent1"/>
+              </a:fillRef>
+              <a:effectRef idx="0">
+                <a:schemeClr val="accent1"/>
+              </a:effectRef>
+              <a:fontRef idx="minor">
+                <a:schemeClr val="lt1"/>
+              </a:fontRef>
+            </p:style>
+            <p:txBody>
+              <a:bodyPr rtlCol="0" anchor="ctr"/>
+              <a:lstStyle/>
+              <a:p>
+                <a:pPr algn="ctr"/>
+                <a:endParaRPr kumimoji="1" lang="ja-JP" altLang="en-US"/>
+              </a:p>
+            </p:txBody>
+          </p:sp>
+          <p:sp>
+            <p:nvSpPr>
+              <p:cNvPr id="59" name="円/楕円 58">
+                <a:extLst>
+                  <a:ext uri="{FF2B5EF4-FFF2-40B4-BE49-F238E27FC236}">
+                    <a16:creationId xmlns:a16="http://schemas.microsoft.com/office/drawing/2014/main" id="{6A42C0ED-83AF-2B5F-75D1-0444BCC6FB43}"/>
+                  </a:ext>
+                </a:extLst>
+              </p:cNvPr>
+              <p:cNvSpPr/>
+              <p:nvPr/>
+            </p:nvSpPr>
+            <p:spPr>
+              <a:xfrm>
+                <a:off x="7341967" y="2232455"/>
+                <a:ext cx="168339" cy="174795"/>
+              </a:xfrm>
+              <a:prstGeom prst="ellipse">
+                <a:avLst/>
+              </a:prstGeom>
+              <a:solidFill>
+                <a:schemeClr val="bg1"/>
+              </a:solidFill>
+              <a:ln>
+                <a:solidFill>
+                  <a:schemeClr val="tx1"/>
+                </a:solidFill>
+              </a:ln>
+            </p:spPr>
+            <p:style>
+              <a:lnRef idx="2">
+                <a:schemeClr val="accent1">
+                  <a:shade val="15000"/>
+                </a:schemeClr>
+              </a:lnRef>
+              <a:fillRef idx="1">
+                <a:schemeClr val="accent1"/>
+              </a:fillRef>
+              <a:effectRef idx="0">
+                <a:schemeClr val="accent1"/>
+              </a:effectRef>
+              <a:fontRef idx="minor">
+                <a:schemeClr val="lt1"/>
+              </a:fontRef>
+            </p:style>
+            <p:txBody>
+              <a:bodyPr rtlCol="0" anchor="ctr"/>
+              <a:lstStyle/>
+              <a:p>
+                <a:pPr algn="ctr"/>
+                <a:endParaRPr kumimoji="1" lang="ja-JP" altLang="en-US"/>
+              </a:p>
+            </p:txBody>
+          </p:sp>
+        </p:grpSp>
+        <p:grpSp>
+          <p:nvGrpSpPr>
+            <p:cNvPr id="61" name="グループ化 60">
+              <a:extLst>
+                <a:ext uri="{FF2B5EF4-FFF2-40B4-BE49-F238E27FC236}">
+                  <a16:creationId xmlns:a16="http://schemas.microsoft.com/office/drawing/2014/main" id="{5F31942F-DA83-1F4C-6D3B-22448163C563}"/>
+                </a:ext>
+              </a:extLst>
+            </p:cNvPr>
+            <p:cNvGrpSpPr/>
+            <p:nvPr/>
+          </p:nvGrpSpPr>
+          <p:grpSpPr>
+            <a:xfrm>
+              <a:off x="7331138" y="2525808"/>
+              <a:ext cx="176579" cy="784397"/>
+              <a:chOff x="7350207" y="1309815"/>
+              <a:chExt cx="176579" cy="784397"/>
+            </a:xfrm>
+          </p:grpSpPr>
+          <p:sp>
+            <p:nvSpPr>
+              <p:cNvPr id="62" name="円/楕円 61">
+                <a:extLst>
+                  <a:ext uri="{FF2B5EF4-FFF2-40B4-BE49-F238E27FC236}">
+                    <a16:creationId xmlns:a16="http://schemas.microsoft.com/office/drawing/2014/main" id="{0E2B5B3F-DC74-5A6F-CD4E-2E01A25E0AA5}"/>
+                  </a:ext>
+                </a:extLst>
+              </p:cNvPr>
+              <p:cNvSpPr/>
+              <p:nvPr/>
+            </p:nvSpPr>
+            <p:spPr>
+              <a:xfrm>
+                <a:off x="7358447" y="1309815"/>
+                <a:ext cx="168339" cy="174795"/>
+              </a:xfrm>
+              <a:prstGeom prst="ellipse">
+                <a:avLst/>
+              </a:prstGeom>
+              <a:solidFill>
+                <a:schemeClr val="bg1"/>
+              </a:solidFill>
+              <a:ln>
+                <a:solidFill>
+                  <a:schemeClr val="tx1"/>
+                </a:solidFill>
+              </a:ln>
+            </p:spPr>
+            <p:style>
+              <a:lnRef idx="2">
+                <a:schemeClr val="accent1">
+                  <a:shade val="15000"/>
+                </a:schemeClr>
+              </a:lnRef>
+              <a:fillRef idx="1">
+                <a:schemeClr val="accent1"/>
+              </a:fillRef>
+              <a:effectRef idx="0">
+                <a:schemeClr val="accent1"/>
+              </a:effectRef>
+              <a:fontRef idx="minor">
+                <a:schemeClr val="lt1"/>
+              </a:fontRef>
+            </p:style>
+            <p:txBody>
+              <a:bodyPr rtlCol="0" anchor="ctr"/>
+              <a:lstStyle/>
+              <a:p>
+                <a:pPr algn="ctr"/>
+                <a:endParaRPr kumimoji="1" lang="ja-JP" altLang="en-US"/>
+              </a:p>
+            </p:txBody>
+          </p:sp>
+          <p:sp>
+            <p:nvSpPr>
+              <p:cNvPr id="63" name="円/楕円 62">
+                <a:extLst>
+                  <a:ext uri="{FF2B5EF4-FFF2-40B4-BE49-F238E27FC236}">
+                    <a16:creationId xmlns:a16="http://schemas.microsoft.com/office/drawing/2014/main" id="{22DEEBEA-7937-875A-2F6E-F4B3C0B5C6F8}"/>
+                  </a:ext>
+                </a:extLst>
+              </p:cNvPr>
+              <p:cNvSpPr/>
+              <p:nvPr/>
+            </p:nvSpPr>
+            <p:spPr>
+              <a:xfrm>
+                <a:off x="7350207" y="1622853"/>
+                <a:ext cx="168339" cy="174795"/>
+              </a:xfrm>
+              <a:prstGeom prst="ellipse">
+                <a:avLst/>
+              </a:prstGeom>
+              <a:solidFill>
+                <a:schemeClr val="bg1"/>
+              </a:solidFill>
+              <a:ln>
+                <a:solidFill>
+                  <a:schemeClr val="tx1"/>
+                </a:solidFill>
+              </a:ln>
+            </p:spPr>
+            <p:style>
+              <a:lnRef idx="2">
+                <a:schemeClr val="accent1">
+                  <a:shade val="15000"/>
+                </a:schemeClr>
+              </a:lnRef>
+              <a:fillRef idx="1">
+                <a:schemeClr val="accent1"/>
+              </a:fillRef>
+              <a:effectRef idx="0">
+                <a:schemeClr val="accent1"/>
+              </a:effectRef>
+              <a:fontRef idx="minor">
+                <a:schemeClr val="lt1"/>
+              </a:fontRef>
+            </p:style>
+            <p:txBody>
+              <a:bodyPr rtlCol="0" anchor="ctr"/>
+              <a:lstStyle/>
+              <a:p>
+                <a:pPr algn="ctr"/>
+                <a:endParaRPr kumimoji="1" lang="ja-JP" altLang="en-US"/>
+              </a:p>
+            </p:txBody>
+          </p:sp>
+          <p:sp>
+            <p:nvSpPr>
+              <p:cNvPr id="64" name="円/楕円 63">
+                <a:extLst>
+                  <a:ext uri="{FF2B5EF4-FFF2-40B4-BE49-F238E27FC236}">
+                    <a16:creationId xmlns:a16="http://schemas.microsoft.com/office/drawing/2014/main" id="{4E55A7C0-4D9D-DD94-6819-323916150C63}"/>
+                  </a:ext>
+                </a:extLst>
+              </p:cNvPr>
+              <p:cNvSpPr/>
+              <p:nvPr/>
+            </p:nvSpPr>
+            <p:spPr>
+              <a:xfrm>
+                <a:off x="7350207" y="1919417"/>
+                <a:ext cx="168339" cy="174795"/>
+              </a:xfrm>
+              <a:prstGeom prst="ellipse">
+                <a:avLst/>
+              </a:prstGeom>
+              <a:solidFill>
+                <a:schemeClr val="bg1"/>
+              </a:solidFill>
+              <a:ln>
+                <a:solidFill>
+                  <a:schemeClr val="tx1"/>
+                </a:solidFill>
+              </a:ln>
+            </p:spPr>
+            <p:style>
+              <a:lnRef idx="2">
+                <a:schemeClr val="accent1">
+                  <a:shade val="15000"/>
+                </a:schemeClr>
+              </a:lnRef>
+              <a:fillRef idx="1">
+                <a:schemeClr val="accent1"/>
+              </a:fillRef>
+              <a:effectRef idx="0">
+                <a:schemeClr val="accent1"/>
+              </a:effectRef>
+              <a:fontRef idx="minor">
+                <a:schemeClr val="lt1"/>
+              </a:fontRef>
+            </p:style>
+            <p:txBody>
+              <a:bodyPr rtlCol="0" anchor="ctr"/>
+              <a:lstStyle/>
+              <a:p>
+                <a:pPr algn="ctr"/>
+                <a:endParaRPr kumimoji="1" lang="ja-JP" altLang="en-US"/>
+              </a:p>
+            </p:txBody>
+          </p:sp>
+        </p:grpSp>
+      </p:grpSp>
+      <p:sp>
+        <p:nvSpPr>
+          <p:cNvPr id="67" name="テキスト ボックス 66">
+            <a:extLst>
+              <a:ext uri="{FF2B5EF4-FFF2-40B4-BE49-F238E27FC236}">
+                <a16:creationId xmlns:a16="http://schemas.microsoft.com/office/drawing/2014/main" id="{FCECC0E7-877B-26C3-CD51-6ECD6ABFBA27}"/>
+              </a:ext>
+            </a:extLst>
+          </p:cNvPr>
+          <p:cNvSpPr txBox="1"/>
+          <p:nvPr/>
+        </p:nvSpPr>
+        <p:spPr>
+          <a:xfrm>
+            <a:off x="8834819" y="1627951"/>
+            <a:ext cx="697627" cy="2031325"/>
+          </a:xfrm>
+          <a:prstGeom prst="rect">
+            <a:avLst/>
+          </a:prstGeom>
+          <a:noFill/>
+        </p:spPr>
+        <p:txBody>
+          <a:bodyPr wrap="none" rtlCol="0">
+            <a:spAutoFit/>
+          </a:bodyPr>
+          <a:lstStyle/>
+          <a:p>
+            <a:r>
+              <a:rPr kumimoji="1" lang="en-US" altLang="ja-JP" dirty="0"/>
+              <a:t>GND</a:t>
+            </a:r>
+          </a:p>
+          <a:p>
+            <a:r>
+              <a:rPr lang="en-US" altLang="ja-JP" dirty="0"/>
+              <a:t>VCC</a:t>
+            </a:r>
+          </a:p>
+          <a:p>
+            <a:r>
+              <a:rPr kumimoji="1" lang="en-US" altLang="ja-JP" dirty="0"/>
+              <a:t>SCL</a:t>
+            </a:r>
+          </a:p>
+          <a:p>
+            <a:r>
+              <a:rPr lang="en-US" altLang="ja-JP" dirty="0"/>
+              <a:t>SDA</a:t>
+            </a:r>
+          </a:p>
+          <a:p>
+            <a:r>
+              <a:rPr kumimoji="1" lang="en-US" altLang="ja-JP" dirty="0"/>
+              <a:t>RES</a:t>
+            </a:r>
+          </a:p>
+          <a:p>
+            <a:r>
+              <a:rPr kumimoji="1" lang="en-US" altLang="ja-JP" dirty="0"/>
+              <a:t>DC</a:t>
+            </a:r>
+          </a:p>
+          <a:p>
+            <a:r>
+              <a:rPr lang="en-US" altLang="ja-JP" dirty="0"/>
+              <a:t>CS</a:t>
+            </a:r>
+          </a:p>
+        </p:txBody>
+      </p:sp>
+      <p:cxnSp>
+        <p:nvCxnSpPr>
+          <p:cNvPr id="69" name="カギ線コネクタ 68">
+            <a:extLst>
+              <a:ext uri="{FF2B5EF4-FFF2-40B4-BE49-F238E27FC236}">
+                <a16:creationId xmlns:a16="http://schemas.microsoft.com/office/drawing/2014/main" id="{0DF8705A-F551-DAC2-A0F3-3CDAA5B1B8C2}"/>
+              </a:ext>
+            </a:extLst>
+          </p:cNvPr>
+          <p:cNvCxnSpPr>
+            <a:cxnSpLocks/>
+            <a:stCxn id="28" idx="2"/>
+            <a:endCxn id="75" idx="4"/>
+          </p:cNvCxnSpPr>
+          <p:nvPr/>
+        </p:nvCxnSpPr>
+        <p:spPr>
+          <a:xfrm flipV="1">
+            <a:off x="6191046" y="3006190"/>
+            <a:ext cx="2741975" cy="1235621"/>
+          </a:xfrm>
+          <a:prstGeom prst="bentConnector2">
+            <a:avLst/>
+          </a:prstGeom>
+          <a:ln w="63500">
+            <a:solidFill>
+              <a:srgbClr val="FF0000"/>
+            </a:solidFill>
+            <a:prstDash val="sysDot"/>
+          </a:ln>
+        </p:spPr>
+        <p:style>
+          <a:lnRef idx="2">
+            <a:schemeClr val="accent1"/>
+          </a:lnRef>
+          <a:fillRef idx="0">
+            <a:schemeClr val="accent1"/>
+          </a:fillRef>
+          <a:effectRef idx="1">
+            <a:schemeClr val="accent1"/>
+          </a:effectRef>
+          <a:fontRef idx="minor">
+            <a:schemeClr val="tx1"/>
+          </a:fontRef>
+        </p:style>
+      </p:cxnSp>
+      <p:cxnSp>
+        <p:nvCxnSpPr>
+          <p:cNvPr id="73" name="カギ線コネクタ 72">
+            <a:extLst>
+              <a:ext uri="{FF2B5EF4-FFF2-40B4-BE49-F238E27FC236}">
+                <a16:creationId xmlns:a16="http://schemas.microsoft.com/office/drawing/2014/main" id="{07F7C4B8-0616-AA26-1AC0-8015E9084F64}"/>
+              </a:ext>
+            </a:extLst>
+          </p:cNvPr>
+          <p:cNvCxnSpPr>
+            <a:cxnSpLocks/>
+            <a:stCxn id="75" idx="0"/>
+            <a:endCxn id="57" idx="6"/>
+          </p:cNvCxnSpPr>
+          <p:nvPr/>
+        </p:nvCxnSpPr>
+        <p:spPr>
+          <a:xfrm rot="16200000" flipV="1">
+            <a:off x="8408467" y="2306841"/>
+            <a:ext cx="825453" cy="223656"/>
+          </a:xfrm>
+          <a:prstGeom prst="bentConnector2">
+            <a:avLst/>
+          </a:prstGeom>
+          <a:ln w="63500">
+            <a:solidFill>
+              <a:srgbClr val="FF0000"/>
+            </a:solidFill>
+            <a:prstDash val="sysDot"/>
+          </a:ln>
+        </p:spPr>
+        <p:style>
+          <a:lnRef idx="2">
+            <a:schemeClr val="accent1"/>
+          </a:lnRef>
+          <a:fillRef idx="0">
+            <a:schemeClr val="accent1"/>
+          </a:fillRef>
+          <a:effectRef idx="1">
+            <a:schemeClr val="accent1"/>
+          </a:effectRef>
+          <a:fontRef idx="minor">
+            <a:schemeClr val="tx1"/>
+          </a:fontRef>
+        </p:style>
+      </p:cxnSp>
+      <p:cxnSp>
+        <p:nvCxnSpPr>
+          <p:cNvPr id="90" name="カギ線コネクタ 89">
+            <a:extLst>
+              <a:ext uri="{FF2B5EF4-FFF2-40B4-BE49-F238E27FC236}">
+                <a16:creationId xmlns:a16="http://schemas.microsoft.com/office/drawing/2014/main" id="{CB176186-66CD-865C-5E8A-030D40FB7931}"/>
+              </a:ext>
+            </a:extLst>
+          </p:cNvPr>
+          <p:cNvCxnSpPr>
+            <a:cxnSpLocks/>
+            <a:stCxn id="80" idx="0"/>
+            <a:endCxn id="64" idx="2"/>
+          </p:cNvCxnSpPr>
+          <p:nvPr/>
+        </p:nvCxnSpPr>
+        <p:spPr>
+          <a:xfrm rot="16200000" flipH="1">
+            <a:off x="7102254" y="2098795"/>
+            <a:ext cx="1152677" cy="1686729"/>
+          </a:xfrm>
+          <a:prstGeom prst="bentConnector2">
+            <a:avLst/>
+          </a:prstGeom>
+          <a:ln w="63500">
+            <a:solidFill>
+              <a:schemeClr val="accent2"/>
+            </a:solidFill>
+            <a:prstDash val="sysDot"/>
+          </a:ln>
+        </p:spPr>
+        <p:style>
+          <a:lnRef idx="2">
+            <a:schemeClr val="accent1"/>
+          </a:lnRef>
+          <a:fillRef idx="0">
+            <a:schemeClr val="accent1"/>
+          </a:fillRef>
+          <a:effectRef idx="1">
+            <a:schemeClr val="accent1"/>
+          </a:effectRef>
+          <a:fontRef idx="minor">
+            <a:schemeClr val="tx1"/>
+          </a:fontRef>
+        </p:style>
+      </p:cxnSp>
+      <p:grpSp>
+        <p:nvGrpSpPr>
+          <p:cNvPr id="127" name="グループ化 126">
+            <a:extLst>
+              <a:ext uri="{FF2B5EF4-FFF2-40B4-BE49-F238E27FC236}">
+                <a16:creationId xmlns:a16="http://schemas.microsoft.com/office/drawing/2014/main" id="{7E819F76-AA4B-2D0A-24B3-1145A5E0B257}"/>
+              </a:ext>
+            </a:extLst>
+          </p:cNvPr>
+          <p:cNvGrpSpPr/>
+          <p:nvPr/>
+        </p:nvGrpSpPr>
+        <p:grpSpPr>
+          <a:xfrm rot="16200000">
+            <a:off x="1306958" y="467463"/>
+            <a:ext cx="422151" cy="746987"/>
+            <a:chOff x="4618386" y="586941"/>
+            <a:chExt cx="422151" cy="746987"/>
+          </a:xfrm>
+        </p:grpSpPr>
+        <p:sp>
+          <p:nvSpPr>
+            <p:cNvPr id="128" name="正方形/長方形 127">
+              <a:extLst>
+                <a:ext uri="{FF2B5EF4-FFF2-40B4-BE49-F238E27FC236}">
+                  <a16:creationId xmlns:a16="http://schemas.microsoft.com/office/drawing/2014/main" id="{5B49F4DE-CB00-0E68-B0F2-7F66778946AD}"/>
+                </a:ext>
+              </a:extLst>
+            </p:cNvPr>
+            <p:cNvSpPr/>
+            <p:nvPr/>
+          </p:nvSpPr>
+          <p:spPr>
+            <a:xfrm>
+              <a:off x="4618386" y="586941"/>
+              <a:ext cx="422151" cy="746987"/>
+            </a:xfrm>
+            <a:prstGeom prst="rect">
+              <a:avLst/>
+            </a:prstGeom>
+          </p:spPr>
+          <p:style>
+            <a:lnRef idx="2">
+              <a:schemeClr val="accent1">
+                <a:shade val="15000"/>
+              </a:schemeClr>
+            </a:lnRef>
+            <a:fillRef idx="1">
+              <a:schemeClr val="accent1"/>
+            </a:fillRef>
+            <a:effectRef idx="0">
+              <a:schemeClr val="accent1"/>
+            </a:effectRef>
+            <a:fontRef idx="minor">
+              <a:schemeClr val="lt1"/>
+            </a:fontRef>
+          </p:style>
+          <p:txBody>
+            <a:bodyPr rtlCol="0" anchor="ctr"/>
+            <a:lstStyle/>
+            <a:p>
+              <a:pPr algn="ctr"/>
+              <a:endParaRPr kumimoji="1" lang="ja-JP" altLang="en-US"/>
+            </a:p>
+          </p:txBody>
+        </p:sp>
+        <p:grpSp>
+          <p:nvGrpSpPr>
+            <p:cNvPr id="129" name="グループ化 128">
+              <a:extLst>
+                <a:ext uri="{FF2B5EF4-FFF2-40B4-BE49-F238E27FC236}">
+                  <a16:creationId xmlns:a16="http://schemas.microsoft.com/office/drawing/2014/main" id="{838BE9B3-488A-BD77-EF50-FF49C750A93B}"/>
+                </a:ext>
+              </a:extLst>
+            </p:cNvPr>
+            <p:cNvGrpSpPr/>
+            <p:nvPr/>
+          </p:nvGrpSpPr>
+          <p:grpSpPr>
+            <a:xfrm>
+              <a:off x="4735154" y="680547"/>
+              <a:ext cx="176579" cy="487833"/>
+              <a:chOff x="8159036" y="1423788"/>
+              <a:chExt cx="176579" cy="487833"/>
+            </a:xfrm>
+          </p:grpSpPr>
+          <p:sp>
+            <p:nvSpPr>
+              <p:cNvPr id="130" name="円/楕円 129">
+                <a:extLst>
+                  <a:ext uri="{FF2B5EF4-FFF2-40B4-BE49-F238E27FC236}">
+                    <a16:creationId xmlns:a16="http://schemas.microsoft.com/office/drawing/2014/main" id="{CD206E39-822A-132B-DAA2-4746EC38E54E}"/>
+                  </a:ext>
+                </a:extLst>
+              </p:cNvPr>
+              <p:cNvSpPr/>
+              <p:nvPr/>
+            </p:nvSpPr>
+            <p:spPr>
+              <a:xfrm>
+                <a:off x="8167276" y="1423788"/>
+                <a:ext cx="168339" cy="174795"/>
+              </a:xfrm>
+              <a:prstGeom prst="ellipse">
+                <a:avLst/>
+              </a:prstGeom>
+              <a:solidFill>
+                <a:schemeClr val="bg1"/>
+              </a:solidFill>
+              <a:ln>
+                <a:solidFill>
+                  <a:schemeClr val="tx1"/>
+                </a:solidFill>
+              </a:ln>
+            </p:spPr>
+            <p:style>
+              <a:lnRef idx="2">
+                <a:schemeClr val="accent1">
+                  <a:shade val="15000"/>
+                </a:schemeClr>
+              </a:lnRef>
+              <a:fillRef idx="1">
+                <a:schemeClr val="accent1"/>
+              </a:fillRef>
+              <a:effectRef idx="0">
+                <a:schemeClr val="accent1"/>
+              </a:effectRef>
+              <a:fontRef idx="minor">
+                <a:schemeClr val="lt1"/>
+              </a:fontRef>
+            </p:style>
+            <p:txBody>
+              <a:bodyPr rtlCol="0" anchor="ctr"/>
+              <a:lstStyle/>
+              <a:p>
+                <a:pPr algn="ctr"/>
+                <a:endParaRPr kumimoji="1" lang="ja-JP" altLang="en-US"/>
+              </a:p>
+            </p:txBody>
+          </p:sp>
+          <p:sp>
+            <p:nvSpPr>
+              <p:cNvPr id="131" name="円/楕円 130">
+                <a:extLst>
+                  <a:ext uri="{FF2B5EF4-FFF2-40B4-BE49-F238E27FC236}">
+                    <a16:creationId xmlns:a16="http://schemas.microsoft.com/office/drawing/2014/main" id="{C3FFCDDA-63A1-E964-8B03-5AE1493AF745}"/>
+                  </a:ext>
+                </a:extLst>
+              </p:cNvPr>
+              <p:cNvSpPr/>
+              <p:nvPr/>
+            </p:nvSpPr>
+            <p:spPr>
+              <a:xfrm>
+                <a:off x="8159036" y="1736826"/>
+                <a:ext cx="168339" cy="174795"/>
+              </a:xfrm>
+              <a:prstGeom prst="ellipse">
+                <a:avLst/>
+              </a:prstGeom>
+              <a:solidFill>
+                <a:schemeClr val="bg1"/>
+              </a:solidFill>
+              <a:ln>
+                <a:solidFill>
+                  <a:schemeClr val="tx1"/>
+                </a:solidFill>
+              </a:ln>
+            </p:spPr>
+            <p:style>
+              <a:lnRef idx="2">
+                <a:schemeClr val="accent1">
+                  <a:shade val="15000"/>
+                </a:schemeClr>
+              </a:lnRef>
+              <a:fillRef idx="1">
+                <a:schemeClr val="accent1"/>
+              </a:fillRef>
+              <a:effectRef idx="0">
+                <a:schemeClr val="accent1"/>
+              </a:effectRef>
+              <a:fontRef idx="minor">
+                <a:schemeClr val="lt1"/>
+              </a:fontRef>
+            </p:style>
+            <p:txBody>
+              <a:bodyPr rtlCol="0" anchor="ctr"/>
+              <a:lstStyle/>
+              <a:p>
+                <a:pPr algn="ctr"/>
+                <a:endParaRPr kumimoji="1" lang="ja-JP" altLang="en-US"/>
+              </a:p>
+            </p:txBody>
+          </p:sp>
+        </p:grpSp>
+      </p:grpSp>
+      <p:sp>
+        <p:nvSpPr>
+          <p:cNvPr id="133" name="テキスト ボックス 132">
+            <a:extLst>
+              <a:ext uri="{FF2B5EF4-FFF2-40B4-BE49-F238E27FC236}">
+                <a16:creationId xmlns:a16="http://schemas.microsoft.com/office/drawing/2014/main" id="{68413911-1518-30D8-FA3B-8F02269642A3}"/>
+              </a:ext>
+            </a:extLst>
+          </p:cNvPr>
+          <p:cNvSpPr txBox="1"/>
+          <p:nvPr/>
+        </p:nvSpPr>
+        <p:spPr>
+          <a:xfrm rot="5400000">
+            <a:off x="1142335" y="1235937"/>
+            <a:ext cx="697627" cy="646331"/>
+          </a:xfrm>
+          <a:prstGeom prst="rect">
+            <a:avLst/>
+          </a:prstGeom>
+          <a:noFill/>
+        </p:spPr>
+        <p:txBody>
+          <a:bodyPr wrap="none" rtlCol="0">
+            <a:spAutoFit/>
+          </a:bodyPr>
+          <a:lstStyle/>
+          <a:p>
+            <a:r>
+              <a:rPr kumimoji="1" lang="en-US" altLang="ja-JP" dirty="0"/>
+              <a:t>VIN</a:t>
+            </a:r>
+          </a:p>
+          <a:p>
+            <a:r>
+              <a:rPr kumimoji="1" lang="en-US" altLang="ja-JP" dirty="0"/>
+              <a:t>GND</a:t>
+            </a:r>
+            <a:endParaRPr kumimoji="1" lang="ja-JP" altLang="en-US"/>
+          </a:p>
+        </p:txBody>
+      </p:sp>
+      <p:sp>
+        <p:nvSpPr>
+          <p:cNvPr id="227" name="左中かっこ 226">
+            <a:extLst>
+              <a:ext uri="{FF2B5EF4-FFF2-40B4-BE49-F238E27FC236}">
+                <a16:creationId xmlns:a16="http://schemas.microsoft.com/office/drawing/2014/main" id="{FEE4DEE0-CB6F-ED3A-40DB-E73FB9FB872C}"/>
+              </a:ext>
+            </a:extLst>
+          </p:cNvPr>
+          <p:cNvSpPr/>
+          <p:nvPr/>
+        </p:nvSpPr>
+        <p:spPr>
+          <a:xfrm rot="16200000">
+            <a:off x="5248424" y="4793376"/>
+            <a:ext cx="282897" cy="905626"/>
+          </a:xfrm>
+          <a:prstGeom prst="leftBrace">
+            <a:avLst/>
+          </a:prstGeom>
+        </p:spPr>
+        <p:style>
+          <a:lnRef idx="2">
+            <a:schemeClr val="accent1"/>
+          </a:lnRef>
+          <a:fillRef idx="0">
+            <a:schemeClr val="accent1"/>
+          </a:fillRef>
+          <a:effectRef idx="1">
+            <a:schemeClr val="accent1"/>
+          </a:effectRef>
+          <a:fontRef idx="minor">
+            <a:schemeClr val="tx1"/>
+          </a:fontRef>
+        </p:style>
+        <p:txBody>
+          <a:bodyPr rtlCol="0" anchor="ctr"/>
+          <a:lstStyle/>
+          <a:p>
+            <a:pPr algn="ctr"/>
+            <a:endParaRPr kumimoji="1" lang="ja-JP" altLang="en-US"/>
+          </a:p>
+        </p:txBody>
+      </p:sp>
+      <p:sp>
+        <p:nvSpPr>
+          <p:cNvPr id="228" name="テキスト ボックス 227">
+            <a:extLst>
+              <a:ext uri="{FF2B5EF4-FFF2-40B4-BE49-F238E27FC236}">
+                <a16:creationId xmlns:a16="http://schemas.microsoft.com/office/drawing/2014/main" id="{6D22A30C-D420-C001-AC40-11211B2AC541}"/>
+              </a:ext>
+            </a:extLst>
+          </p:cNvPr>
+          <p:cNvSpPr txBox="1"/>
+          <p:nvPr/>
+        </p:nvSpPr>
+        <p:spPr>
+          <a:xfrm>
+            <a:off x="5009800" y="5476830"/>
+            <a:ext cx="760144" cy="369332"/>
+          </a:xfrm>
+          <a:prstGeom prst="rect">
+            <a:avLst/>
+          </a:prstGeom>
+          <a:noFill/>
+        </p:spPr>
+        <p:txBody>
+          <a:bodyPr wrap="none" rtlCol="0">
+            <a:spAutoFit/>
+          </a:bodyPr>
+          <a:lstStyle/>
+          <a:p>
+            <a:r>
+              <a:rPr kumimoji="1" lang="en-US" altLang="ja-JP" dirty="0"/>
+              <a:t>6pins</a:t>
+            </a:r>
+            <a:endParaRPr kumimoji="1" lang="ja-JP" altLang="en-US"/>
+          </a:p>
+        </p:txBody>
+      </p:sp>
+      <p:sp>
+        <p:nvSpPr>
+          <p:cNvPr id="229" name="左中かっこ 228">
+            <a:extLst>
+              <a:ext uri="{FF2B5EF4-FFF2-40B4-BE49-F238E27FC236}">
+                <a16:creationId xmlns:a16="http://schemas.microsoft.com/office/drawing/2014/main" id="{F8FF0A86-A336-B016-9899-CDEF605E2463}"/>
+              </a:ext>
+            </a:extLst>
+          </p:cNvPr>
+          <p:cNvSpPr/>
+          <p:nvPr/>
+        </p:nvSpPr>
+        <p:spPr>
+          <a:xfrm rot="10800000">
+            <a:off x="9047289" y="4133136"/>
+            <a:ext cx="224116" cy="659816"/>
+          </a:xfrm>
+          <a:prstGeom prst="leftBrace">
+            <a:avLst/>
+          </a:prstGeom>
+        </p:spPr>
+        <p:style>
+          <a:lnRef idx="2">
+            <a:schemeClr val="accent1"/>
+          </a:lnRef>
+          <a:fillRef idx="0">
+            <a:schemeClr val="accent1"/>
+          </a:fillRef>
+          <a:effectRef idx="1">
+            <a:schemeClr val="accent1"/>
+          </a:effectRef>
+          <a:fontRef idx="minor">
+            <a:schemeClr val="tx1"/>
+          </a:fontRef>
+        </p:style>
+        <p:txBody>
+          <a:bodyPr rtlCol="0" anchor="ctr"/>
+          <a:lstStyle/>
+          <a:p>
+            <a:pPr algn="ctr"/>
+            <a:endParaRPr kumimoji="1" lang="ja-JP" altLang="en-US"/>
+          </a:p>
+        </p:txBody>
+      </p:sp>
+      <p:sp>
+        <p:nvSpPr>
+          <p:cNvPr id="230" name="テキスト ボックス 229">
+            <a:extLst>
+              <a:ext uri="{FF2B5EF4-FFF2-40B4-BE49-F238E27FC236}">
+                <a16:creationId xmlns:a16="http://schemas.microsoft.com/office/drawing/2014/main" id="{C39015BB-2BD4-EA77-5F33-EB3911FA29C4}"/>
+              </a:ext>
+            </a:extLst>
+          </p:cNvPr>
+          <p:cNvSpPr txBox="1"/>
+          <p:nvPr/>
+        </p:nvSpPr>
+        <p:spPr>
+          <a:xfrm>
+            <a:off x="9310389" y="4284550"/>
+            <a:ext cx="760144" cy="369332"/>
+          </a:xfrm>
+          <a:prstGeom prst="rect">
+            <a:avLst/>
+          </a:prstGeom>
+          <a:noFill/>
+        </p:spPr>
+        <p:txBody>
+          <a:bodyPr wrap="none" rtlCol="0">
+            <a:spAutoFit/>
+          </a:bodyPr>
+          <a:lstStyle/>
+          <a:p>
+            <a:r>
+              <a:rPr lang="en-US" altLang="ja-JP" dirty="0"/>
+              <a:t>2</a:t>
+            </a:r>
+            <a:r>
+              <a:rPr kumimoji="1" lang="en-US" altLang="ja-JP" dirty="0"/>
+              <a:t>pins</a:t>
+            </a:r>
+            <a:endParaRPr kumimoji="1" lang="ja-JP" altLang="en-US"/>
+          </a:p>
+        </p:txBody>
+      </p:sp>
+      <p:sp>
+        <p:nvSpPr>
+          <p:cNvPr id="250" name="左中かっこ 249">
+            <a:extLst>
+              <a:ext uri="{FF2B5EF4-FFF2-40B4-BE49-F238E27FC236}">
+                <a16:creationId xmlns:a16="http://schemas.microsoft.com/office/drawing/2014/main" id="{52C50D7B-3DFB-52E1-827A-C19F90C81A52}"/>
+              </a:ext>
+            </a:extLst>
+          </p:cNvPr>
+          <p:cNvSpPr/>
+          <p:nvPr/>
+        </p:nvSpPr>
+        <p:spPr>
+          <a:xfrm rot="10800000">
+            <a:off x="8954067" y="689543"/>
+            <a:ext cx="224116" cy="659816"/>
+          </a:xfrm>
+          <a:prstGeom prst="leftBrace">
+            <a:avLst/>
+          </a:prstGeom>
+        </p:spPr>
+        <p:style>
+          <a:lnRef idx="2">
+            <a:schemeClr val="accent1"/>
+          </a:lnRef>
+          <a:fillRef idx="0">
+            <a:schemeClr val="accent1"/>
+          </a:fillRef>
+          <a:effectRef idx="1">
+            <a:schemeClr val="accent1"/>
+          </a:effectRef>
+          <a:fontRef idx="minor">
+            <a:schemeClr val="tx1"/>
+          </a:fontRef>
+        </p:style>
+        <p:txBody>
+          <a:bodyPr rtlCol="0" anchor="ctr"/>
+          <a:lstStyle/>
+          <a:p>
+            <a:pPr algn="ctr"/>
+            <a:endParaRPr kumimoji="1" lang="ja-JP" altLang="en-US"/>
+          </a:p>
+        </p:txBody>
+      </p:sp>
+      <p:sp>
+        <p:nvSpPr>
+          <p:cNvPr id="251" name="テキスト ボックス 250">
+            <a:extLst>
+              <a:ext uri="{FF2B5EF4-FFF2-40B4-BE49-F238E27FC236}">
+                <a16:creationId xmlns:a16="http://schemas.microsoft.com/office/drawing/2014/main" id="{91B2DE0F-69A9-F319-5DB8-8739030DC825}"/>
+              </a:ext>
+            </a:extLst>
+          </p:cNvPr>
+          <p:cNvSpPr txBox="1"/>
+          <p:nvPr/>
+        </p:nvSpPr>
+        <p:spPr>
+          <a:xfrm>
+            <a:off x="9217167" y="840957"/>
+            <a:ext cx="760144" cy="369332"/>
+          </a:xfrm>
+          <a:prstGeom prst="rect">
+            <a:avLst/>
+          </a:prstGeom>
+          <a:noFill/>
+        </p:spPr>
+        <p:txBody>
+          <a:bodyPr wrap="none" rtlCol="0">
+            <a:spAutoFit/>
+          </a:bodyPr>
+          <a:lstStyle/>
+          <a:p>
+            <a:r>
+              <a:rPr lang="en-US" altLang="ja-JP" dirty="0"/>
+              <a:t>2</a:t>
+            </a:r>
+            <a:r>
+              <a:rPr kumimoji="1" lang="en-US" altLang="ja-JP" dirty="0"/>
+              <a:t>pins</a:t>
+            </a:r>
+            <a:endParaRPr kumimoji="1" lang="ja-JP" altLang="en-US"/>
+          </a:p>
+        </p:txBody>
+      </p:sp>
+      <p:sp>
+        <p:nvSpPr>
+          <p:cNvPr id="252" name="左中かっこ 251">
+            <a:extLst>
+              <a:ext uri="{FF2B5EF4-FFF2-40B4-BE49-F238E27FC236}">
+                <a16:creationId xmlns:a16="http://schemas.microsoft.com/office/drawing/2014/main" id="{3D7C1B1E-38EC-283C-AF20-2360CCCC2C54}"/>
+              </a:ext>
+            </a:extLst>
+          </p:cNvPr>
+          <p:cNvSpPr/>
+          <p:nvPr/>
+        </p:nvSpPr>
+        <p:spPr>
+          <a:xfrm rot="16200000">
+            <a:off x="7627345" y="5014708"/>
+            <a:ext cx="246861" cy="376877"/>
+          </a:xfrm>
+          <a:prstGeom prst="leftBrace">
+            <a:avLst/>
+          </a:prstGeom>
+        </p:spPr>
+        <p:style>
+          <a:lnRef idx="2">
+            <a:schemeClr val="accent1"/>
+          </a:lnRef>
+          <a:fillRef idx="0">
+            <a:schemeClr val="accent1"/>
+          </a:fillRef>
+          <a:effectRef idx="1">
+            <a:schemeClr val="accent1"/>
+          </a:effectRef>
+          <a:fontRef idx="minor">
+            <a:schemeClr val="tx1"/>
+          </a:fontRef>
+        </p:style>
+        <p:txBody>
+          <a:bodyPr rtlCol="0" anchor="ctr"/>
+          <a:lstStyle/>
+          <a:p>
+            <a:pPr algn="ctr"/>
+            <a:endParaRPr kumimoji="1" lang="ja-JP" altLang="en-US"/>
+          </a:p>
+        </p:txBody>
+      </p:sp>
+      <p:sp>
+        <p:nvSpPr>
+          <p:cNvPr id="253" name="テキスト ボックス 252">
+            <a:extLst>
+              <a:ext uri="{FF2B5EF4-FFF2-40B4-BE49-F238E27FC236}">
+                <a16:creationId xmlns:a16="http://schemas.microsoft.com/office/drawing/2014/main" id="{C91DEDCD-DFB5-894B-7C2D-9558CD3FDA07}"/>
+              </a:ext>
+            </a:extLst>
+          </p:cNvPr>
+          <p:cNvSpPr txBox="1"/>
+          <p:nvPr/>
+        </p:nvSpPr>
+        <p:spPr>
+          <a:xfrm>
+            <a:off x="7434545" y="5329055"/>
+            <a:ext cx="760144" cy="369332"/>
+          </a:xfrm>
+          <a:prstGeom prst="rect">
+            <a:avLst/>
+          </a:prstGeom>
+          <a:noFill/>
+        </p:spPr>
+        <p:txBody>
+          <a:bodyPr wrap="none" rtlCol="0">
+            <a:spAutoFit/>
+          </a:bodyPr>
+          <a:lstStyle/>
+          <a:p>
+            <a:r>
+              <a:rPr lang="en-US" altLang="ja-JP" dirty="0"/>
+              <a:t>3</a:t>
+            </a:r>
+            <a:r>
+              <a:rPr kumimoji="1" lang="en-US" altLang="ja-JP" dirty="0"/>
+              <a:t>pins</a:t>
+            </a:r>
+            <a:endParaRPr kumimoji="1" lang="ja-JP" altLang="en-US"/>
+          </a:p>
+        </p:txBody>
+      </p:sp>
+      <p:sp>
+        <p:nvSpPr>
+          <p:cNvPr id="75" name="円/楕円 74">
+            <a:extLst>
+              <a:ext uri="{FF2B5EF4-FFF2-40B4-BE49-F238E27FC236}">
+                <a16:creationId xmlns:a16="http://schemas.microsoft.com/office/drawing/2014/main" id="{F2B06AE0-DFFC-5A78-2CFF-37B3C20DB063}"/>
+              </a:ext>
+            </a:extLst>
+          </p:cNvPr>
+          <p:cNvSpPr/>
+          <p:nvPr/>
+        </p:nvSpPr>
+        <p:spPr>
+          <a:xfrm>
+            <a:off x="8848851" y="2831395"/>
+            <a:ext cx="168339" cy="174795"/>
+          </a:xfrm>
+          <a:prstGeom prst="ellipse">
+            <a:avLst/>
+          </a:prstGeom>
+          <a:solidFill>
+            <a:schemeClr val="bg1"/>
+          </a:solidFill>
+          <a:ln>
+            <a:solidFill>
+              <a:schemeClr val="tx1"/>
+            </a:solidFill>
+          </a:ln>
+        </p:spPr>
+        <p:style>
+          <a:lnRef idx="2">
+            <a:schemeClr val="accent1">
+              <a:shade val="15000"/>
+            </a:schemeClr>
+          </a:lnRef>
+          <a:fillRef idx="1">
+            <a:schemeClr val="accent1"/>
+          </a:fillRef>
+          <a:effectRef idx="0">
+            <a:schemeClr val="accent1"/>
+          </a:effectRef>
+          <a:fontRef idx="minor">
+            <a:schemeClr val="lt1"/>
+          </a:fontRef>
+        </p:style>
+        <p:txBody>
+          <a:bodyPr rtlCol="0" anchor="ctr"/>
+          <a:lstStyle/>
+          <a:p>
+            <a:pPr algn="ctr"/>
+            <a:endParaRPr kumimoji="1" lang="ja-JP" altLang="en-US"/>
+          </a:p>
+        </p:txBody>
+      </p:sp>
+      <p:pic>
+        <p:nvPicPr>
+          <p:cNvPr id="9" name="グラフィックス 8">
+            <a:extLst>
+              <a:ext uri="{FF2B5EF4-FFF2-40B4-BE49-F238E27FC236}">
+                <a16:creationId xmlns:a16="http://schemas.microsoft.com/office/drawing/2014/main" id="{A46CC2BC-80F9-37B6-AE93-D2D72CC24E22}"/>
+              </a:ext>
+            </a:extLst>
+          </p:cNvPr>
+          <p:cNvPicPr>
+            <a:picLocks noChangeAspect="1"/>
+          </p:cNvPicPr>
+          <p:nvPr/>
+        </p:nvPicPr>
+        <p:blipFill>
+          <a:blip r:embed="rId2">
+            <a:extLst>
+              <a:ext uri="{96DAC541-7B7A-43D3-8B79-37D633B846F1}">
+                <asvg:svgBlip xmlns:asvg="http://schemas.microsoft.com/office/drawing/2016/SVG/main" r:embed="rId3"/>
+              </a:ext>
+            </a:extLst>
+          </a:blip>
+          <a:srcRect l="23290" t="6158" r="61766"/>
+          <a:stretch/>
+        </p:blipFill>
+        <p:spPr>
+          <a:xfrm rot="16200000">
+            <a:off x="5263560" y="11427"/>
+            <a:ext cx="2117122" cy="3068080"/>
+          </a:xfrm>
+          <a:prstGeom prst="rect">
+            <a:avLst/>
+          </a:prstGeom>
+        </p:spPr>
+      </p:pic>
+      <p:pic>
+        <p:nvPicPr>
+          <p:cNvPr id="7" name="図 6" descr="ダイアグラム, 概略図&#10;&#10;AI によって生成されたコンテンツは間違っている可能性があります。">
+            <a:extLst>
+              <a:ext uri="{FF2B5EF4-FFF2-40B4-BE49-F238E27FC236}">
+                <a16:creationId xmlns:a16="http://schemas.microsoft.com/office/drawing/2014/main" id="{3434673C-5146-8993-677A-9068CA391495}"/>
+              </a:ext>
+            </a:extLst>
+          </p:cNvPr>
+          <p:cNvPicPr>
+            <a:picLocks noChangeAspect="1"/>
+          </p:cNvPicPr>
+          <p:nvPr/>
+        </p:nvPicPr>
+        <p:blipFill>
+          <a:blip r:embed="rId4"/>
+          <a:stretch>
+            <a:fillRect/>
+          </a:stretch>
+        </p:blipFill>
+        <p:spPr>
+          <a:xfrm rot="10800000">
+            <a:off x="4742379" y="2860296"/>
+            <a:ext cx="2117123" cy="2387558"/>
+          </a:xfrm>
+          <a:prstGeom prst="rect">
+            <a:avLst/>
+          </a:prstGeom>
+        </p:spPr>
+      </p:pic>
+      <p:cxnSp>
+        <p:nvCxnSpPr>
+          <p:cNvPr id="18" name="カギ線コネクタ 17">
+            <a:extLst>
+              <a:ext uri="{FF2B5EF4-FFF2-40B4-BE49-F238E27FC236}">
+                <a16:creationId xmlns:a16="http://schemas.microsoft.com/office/drawing/2014/main" id="{9CFDE919-74AA-A4C9-5C8E-4057DBE4A134}"/>
+              </a:ext>
+            </a:extLst>
+          </p:cNvPr>
+          <p:cNvCxnSpPr>
+            <a:cxnSpLocks/>
+            <a:stCxn id="28" idx="2"/>
+            <a:endCxn id="45" idx="0"/>
+          </p:cNvCxnSpPr>
+          <p:nvPr/>
+        </p:nvCxnSpPr>
+        <p:spPr>
+          <a:xfrm rot="10800000" flipH="1">
+            <a:off x="6191045" y="3371268"/>
+            <a:ext cx="493763" cy="870542"/>
+          </a:xfrm>
+          <a:prstGeom prst="bentConnector2">
+            <a:avLst/>
+          </a:prstGeom>
+          <a:ln w="63500">
+            <a:solidFill>
+              <a:srgbClr val="FF0000"/>
+            </a:solidFill>
+            <a:prstDash val="sysDot"/>
+          </a:ln>
+        </p:spPr>
+        <p:style>
+          <a:lnRef idx="2">
+            <a:schemeClr val="accent1"/>
+          </a:lnRef>
+          <a:fillRef idx="0">
+            <a:schemeClr val="accent1"/>
+          </a:fillRef>
+          <a:effectRef idx="1">
+            <a:schemeClr val="accent1"/>
+          </a:effectRef>
+          <a:fontRef idx="minor">
+            <a:schemeClr val="tx1"/>
+          </a:fontRef>
+        </p:style>
+      </p:cxnSp>
+      <p:cxnSp>
+        <p:nvCxnSpPr>
+          <p:cNvPr id="26" name="カギ線コネクタ 25">
+            <a:extLst>
+              <a:ext uri="{FF2B5EF4-FFF2-40B4-BE49-F238E27FC236}">
+                <a16:creationId xmlns:a16="http://schemas.microsoft.com/office/drawing/2014/main" id="{AAADBF75-A81B-FFA5-4148-958827029786}"/>
+              </a:ext>
+            </a:extLst>
+          </p:cNvPr>
+          <p:cNvCxnSpPr>
+            <a:cxnSpLocks/>
+            <a:endCxn id="36" idx="2"/>
+          </p:cNvCxnSpPr>
+          <p:nvPr/>
+        </p:nvCxnSpPr>
+        <p:spPr>
+          <a:xfrm rot="10800000" flipV="1">
+            <a:off x="5243000" y="3617666"/>
+            <a:ext cx="858630" cy="634043"/>
+          </a:xfrm>
+          <a:prstGeom prst="bentConnector3">
+            <a:avLst>
+              <a:gd name="adj1" fmla="val 50000"/>
+            </a:avLst>
+          </a:prstGeom>
+          <a:ln w="63500">
+            <a:solidFill>
+              <a:schemeClr val="tx1">
+                <a:lumMod val="50000"/>
+                <a:lumOff val="50000"/>
+              </a:schemeClr>
+            </a:solidFill>
+            <a:prstDash val="sysDot"/>
+          </a:ln>
+        </p:spPr>
+        <p:style>
+          <a:lnRef idx="2">
+            <a:schemeClr val="accent1"/>
+          </a:lnRef>
+          <a:fillRef idx="0">
+            <a:schemeClr val="accent1"/>
+          </a:fillRef>
+          <a:effectRef idx="1">
+            <a:schemeClr val="accent1"/>
+          </a:effectRef>
+          <a:fontRef idx="minor">
+            <a:schemeClr val="tx1"/>
+          </a:fontRef>
+        </p:style>
+      </p:cxnSp>
+      <p:cxnSp>
+        <p:nvCxnSpPr>
+          <p:cNvPr id="33" name="カギ線コネクタ 32">
+            <a:extLst>
+              <a:ext uri="{FF2B5EF4-FFF2-40B4-BE49-F238E27FC236}">
+                <a16:creationId xmlns:a16="http://schemas.microsoft.com/office/drawing/2014/main" id="{2C3C05BF-F1E7-7789-73F4-4A07A6E1CCBD}"/>
+              </a:ext>
+            </a:extLst>
+          </p:cNvPr>
+          <p:cNvCxnSpPr>
+            <a:cxnSpLocks/>
+            <a:stCxn id="20" idx="4"/>
+            <a:endCxn id="21" idx="0"/>
+          </p:cNvCxnSpPr>
+          <p:nvPr/>
+        </p:nvCxnSpPr>
+        <p:spPr>
+          <a:xfrm rot="16200000" flipV="1">
+            <a:off x="4670274" y="2713856"/>
+            <a:ext cx="844502" cy="156360"/>
+          </a:xfrm>
+          <a:prstGeom prst="bentConnector3">
+            <a:avLst>
+              <a:gd name="adj1" fmla="val 50000"/>
+            </a:avLst>
+          </a:prstGeom>
+          <a:ln w="63500">
+            <a:solidFill>
+              <a:srgbClr val="00B0F0"/>
+            </a:solidFill>
+            <a:prstDash val="sysDot"/>
+          </a:ln>
+        </p:spPr>
+        <p:style>
+          <a:lnRef idx="2">
+            <a:schemeClr val="accent1"/>
+          </a:lnRef>
+          <a:fillRef idx="0">
+            <a:schemeClr val="accent1"/>
+          </a:fillRef>
+          <a:effectRef idx="1">
+            <a:schemeClr val="accent1"/>
+          </a:effectRef>
+          <a:fontRef idx="minor">
+            <a:schemeClr val="tx1"/>
+          </a:fontRef>
+        </p:style>
+      </p:cxnSp>
+      <p:cxnSp>
+        <p:nvCxnSpPr>
+          <p:cNvPr id="50" name="カギ線コネクタ 49">
+            <a:extLst>
+              <a:ext uri="{FF2B5EF4-FFF2-40B4-BE49-F238E27FC236}">
+                <a16:creationId xmlns:a16="http://schemas.microsoft.com/office/drawing/2014/main" id="{02D9B019-3EFB-1F01-9857-E1B980CE00CB}"/>
+              </a:ext>
+            </a:extLst>
+          </p:cNvPr>
+          <p:cNvCxnSpPr>
+            <a:cxnSpLocks/>
+            <a:stCxn id="13" idx="6"/>
+            <a:endCxn id="17" idx="6"/>
+          </p:cNvCxnSpPr>
+          <p:nvPr/>
+        </p:nvCxnSpPr>
+        <p:spPr>
+          <a:xfrm flipH="1" flipV="1">
+            <a:off x="4944034" y="772241"/>
+            <a:ext cx="132607" cy="2848097"/>
+          </a:xfrm>
+          <a:prstGeom prst="bentConnector3">
+            <a:avLst>
+              <a:gd name="adj1" fmla="val 274823"/>
+            </a:avLst>
+          </a:prstGeom>
+          <a:ln w="63500">
+            <a:solidFill>
+              <a:srgbClr val="00B050"/>
+            </a:solidFill>
+            <a:prstDash val="sysDot"/>
+          </a:ln>
+        </p:spPr>
+        <p:style>
+          <a:lnRef idx="2">
+            <a:schemeClr val="accent1"/>
+          </a:lnRef>
+          <a:fillRef idx="0">
+            <a:schemeClr val="accent1"/>
+          </a:fillRef>
+          <a:effectRef idx="1">
+            <a:schemeClr val="accent1"/>
+          </a:effectRef>
+          <a:fontRef idx="minor">
+            <a:schemeClr val="tx1"/>
+          </a:fontRef>
+        </p:style>
+      </p:cxnSp>
+      <p:cxnSp>
+        <p:nvCxnSpPr>
+          <p:cNvPr id="93" name="カギ線コネクタ 92">
+            <a:extLst>
+              <a:ext uri="{FF2B5EF4-FFF2-40B4-BE49-F238E27FC236}">
+                <a16:creationId xmlns:a16="http://schemas.microsoft.com/office/drawing/2014/main" id="{C5733C6B-CDCB-11FD-A785-D42D86A92E0F}"/>
+              </a:ext>
+            </a:extLst>
+          </p:cNvPr>
+          <p:cNvCxnSpPr>
+            <a:cxnSpLocks/>
+            <a:stCxn id="301" idx="2"/>
+            <a:endCxn id="302" idx="2"/>
+          </p:cNvCxnSpPr>
+          <p:nvPr/>
+        </p:nvCxnSpPr>
+        <p:spPr>
+          <a:xfrm flipH="1">
+            <a:off x="6190823" y="780156"/>
+            <a:ext cx="1633080" cy="3162071"/>
+          </a:xfrm>
+          <a:prstGeom prst="bentConnector3">
+            <a:avLst>
+              <a:gd name="adj1" fmla="val -20741"/>
+            </a:avLst>
+          </a:prstGeom>
+          <a:ln w="63500">
+            <a:solidFill>
+              <a:schemeClr val="accent5"/>
+            </a:solidFill>
+          </a:ln>
+        </p:spPr>
+        <p:style>
+          <a:lnRef idx="2">
+            <a:schemeClr val="accent1"/>
+          </a:lnRef>
+          <a:fillRef idx="0">
+            <a:schemeClr val="accent1"/>
+          </a:fillRef>
+          <a:effectRef idx="1">
+            <a:schemeClr val="accent1"/>
+          </a:effectRef>
+          <a:fontRef idx="minor">
+            <a:schemeClr val="tx1"/>
+          </a:fontRef>
+        </p:style>
+      </p:cxnSp>
+      <p:cxnSp>
+        <p:nvCxnSpPr>
+          <p:cNvPr id="137" name="カギ線コネクタ 136">
+            <a:extLst>
+              <a:ext uri="{FF2B5EF4-FFF2-40B4-BE49-F238E27FC236}">
+                <a16:creationId xmlns:a16="http://schemas.microsoft.com/office/drawing/2014/main" id="{45A4CA8C-DCBC-6C99-1340-E99E3E769038}"/>
+              </a:ext>
+            </a:extLst>
+          </p:cNvPr>
+          <p:cNvCxnSpPr>
+            <a:cxnSpLocks/>
+            <a:stCxn id="53" idx="0"/>
+            <a:endCxn id="45" idx="4"/>
+          </p:cNvCxnSpPr>
+          <p:nvPr/>
+        </p:nvCxnSpPr>
+        <p:spPr>
+          <a:xfrm rot="5400000" flipV="1">
+            <a:off x="5887493" y="2399159"/>
+            <a:ext cx="824710" cy="769919"/>
+          </a:xfrm>
+          <a:prstGeom prst="bentConnector3">
+            <a:avLst>
+              <a:gd name="adj1" fmla="val 50000"/>
+            </a:avLst>
+          </a:prstGeom>
+          <a:ln w="63500">
+            <a:solidFill>
+              <a:srgbClr val="FF0000"/>
+            </a:solidFill>
+          </a:ln>
+        </p:spPr>
+        <p:style>
+          <a:lnRef idx="2">
+            <a:schemeClr val="accent1"/>
+          </a:lnRef>
+          <a:fillRef idx="0">
+            <a:schemeClr val="accent1"/>
+          </a:fillRef>
+          <a:effectRef idx="1">
+            <a:schemeClr val="accent1"/>
+          </a:effectRef>
+          <a:fontRef idx="minor">
+            <a:schemeClr val="tx1"/>
+          </a:fontRef>
+        </p:style>
+      </p:cxnSp>
+      <p:cxnSp>
+        <p:nvCxnSpPr>
+          <p:cNvPr id="171" name="カギ線コネクタ 170">
+            <a:extLst>
+              <a:ext uri="{FF2B5EF4-FFF2-40B4-BE49-F238E27FC236}">
+                <a16:creationId xmlns:a16="http://schemas.microsoft.com/office/drawing/2014/main" id="{1D5A5B48-9712-95B3-A5C1-D334452B33B3}"/>
+              </a:ext>
+            </a:extLst>
+          </p:cNvPr>
+          <p:cNvCxnSpPr>
+            <a:cxnSpLocks/>
+            <a:stCxn id="95" idx="0"/>
+            <a:endCxn id="63" idx="2"/>
+          </p:cNvCxnSpPr>
+          <p:nvPr/>
+        </p:nvCxnSpPr>
+        <p:spPr>
+          <a:xfrm rot="16200000" flipH="1">
+            <a:off x="7398977" y="2098954"/>
+            <a:ext cx="854135" cy="1391827"/>
+          </a:xfrm>
+          <a:prstGeom prst="bentConnector2">
+            <a:avLst/>
+          </a:prstGeom>
+          <a:ln w="63500">
+            <a:solidFill>
+              <a:srgbClr val="00B0F0"/>
+            </a:solidFill>
+            <a:prstDash val="sysDot"/>
+          </a:ln>
+        </p:spPr>
+        <p:style>
+          <a:lnRef idx="2">
+            <a:schemeClr val="accent1"/>
+          </a:lnRef>
+          <a:fillRef idx="0">
+            <a:schemeClr val="accent1"/>
+          </a:fillRef>
+          <a:effectRef idx="1">
+            <a:schemeClr val="accent1"/>
+          </a:effectRef>
+          <a:fontRef idx="minor">
+            <a:schemeClr val="tx1"/>
+          </a:fontRef>
+        </p:style>
+      </p:cxnSp>
+      <p:cxnSp>
+        <p:nvCxnSpPr>
+          <p:cNvPr id="217" name="カギ線コネクタ 216">
+            <a:extLst>
+              <a:ext uri="{FF2B5EF4-FFF2-40B4-BE49-F238E27FC236}">
+                <a16:creationId xmlns:a16="http://schemas.microsoft.com/office/drawing/2014/main" id="{F1F90643-A87D-3D2E-B766-69C1FA1B2B88}"/>
+              </a:ext>
+            </a:extLst>
+          </p:cNvPr>
+          <p:cNvCxnSpPr>
+            <a:cxnSpLocks/>
+            <a:stCxn id="71" idx="4"/>
+          </p:cNvCxnSpPr>
+          <p:nvPr/>
+        </p:nvCxnSpPr>
+        <p:spPr>
+          <a:xfrm rot="16200000">
+            <a:off x="5359374" y="2673089"/>
+            <a:ext cx="1195675" cy="524024"/>
+          </a:xfrm>
+          <a:prstGeom prst="bentConnector3">
+            <a:avLst>
+              <a:gd name="adj1" fmla="val 50000"/>
+            </a:avLst>
+          </a:prstGeom>
+          <a:ln w="63500">
+            <a:solidFill>
+              <a:schemeClr val="tx1">
+                <a:lumMod val="50000"/>
+                <a:lumOff val="50000"/>
+              </a:schemeClr>
+            </a:solidFill>
+            <a:prstDash val="sysDot"/>
+          </a:ln>
+        </p:spPr>
+        <p:style>
+          <a:lnRef idx="2">
+            <a:schemeClr val="accent1"/>
+          </a:lnRef>
+          <a:fillRef idx="0">
+            <a:schemeClr val="accent1"/>
+          </a:fillRef>
+          <a:effectRef idx="1">
+            <a:schemeClr val="accent1"/>
+          </a:effectRef>
+          <a:fontRef idx="minor">
+            <a:schemeClr val="tx1"/>
+          </a:fontRef>
+        </p:style>
+      </p:cxnSp>
+      <p:sp>
+        <p:nvSpPr>
+          <p:cNvPr id="292" name="円/楕円 291">
+            <a:extLst>
+              <a:ext uri="{FF2B5EF4-FFF2-40B4-BE49-F238E27FC236}">
+                <a16:creationId xmlns:a16="http://schemas.microsoft.com/office/drawing/2014/main" id="{7F95FE96-20D9-15C0-82FF-B855406F80B2}"/>
+              </a:ext>
+            </a:extLst>
+          </p:cNvPr>
+          <p:cNvSpPr/>
+          <p:nvPr/>
+        </p:nvSpPr>
+        <p:spPr>
+          <a:xfrm rot="10800000">
+            <a:off x="6745011" y="690242"/>
+            <a:ext cx="168339" cy="174795"/>
+          </a:xfrm>
+          <a:prstGeom prst="ellipse">
+            <a:avLst/>
+          </a:prstGeom>
+          <a:solidFill>
+            <a:schemeClr val="bg1"/>
+          </a:solidFill>
+          <a:ln>
+            <a:solidFill>
+              <a:schemeClr val="tx1"/>
+            </a:solidFill>
+          </a:ln>
+        </p:spPr>
+        <p:style>
+          <a:lnRef idx="2">
+            <a:schemeClr val="accent1">
+              <a:shade val="15000"/>
+            </a:schemeClr>
+          </a:lnRef>
+          <a:fillRef idx="1">
+            <a:schemeClr val="accent1"/>
+          </a:fillRef>
+          <a:effectRef idx="0">
+            <a:schemeClr val="accent1"/>
+          </a:effectRef>
+          <a:fontRef idx="minor">
+            <a:schemeClr val="lt1"/>
+          </a:fontRef>
+        </p:style>
+        <p:txBody>
+          <a:bodyPr rtlCol="0" anchor="ctr"/>
+          <a:lstStyle/>
+          <a:p>
+            <a:pPr algn="ctr"/>
+            <a:endParaRPr kumimoji="1" lang="ja-JP" altLang="en-US"/>
+          </a:p>
+        </p:txBody>
+      </p:sp>
+      <p:sp>
+        <p:nvSpPr>
+          <p:cNvPr id="301" name="円/楕円 300">
+            <a:extLst>
+              <a:ext uri="{FF2B5EF4-FFF2-40B4-BE49-F238E27FC236}">
+                <a16:creationId xmlns:a16="http://schemas.microsoft.com/office/drawing/2014/main" id="{831C3DB3-5BA3-7255-1B9A-CAD12A6E1BE3}"/>
+              </a:ext>
+            </a:extLst>
+          </p:cNvPr>
+          <p:cNvSpPr/>
+          <p:nvPr/>
+        </p:nvSpPr>
+        <p:spPr>
+          <a:xfrm rot="10800000">
+            <a:off x="7655564" y="692760"/>
+            <a:ext cx="168339" cy="174795"/>
+          </a:xfrm>
+          <a:prstGeom prst="ellipse">
+            <a:avLst/>
+          </a:prstGeom>
+          <a:solidFill>
+            <a:schemeClr val="bg1"/>
+          </a:solidFill>
+          <a:ln>
+            <a:solidFill>
+              <a:schemeClr val="tx1"/>
+            </a:solidFill>
+          </a:ln>
+        </p:spPr>
+        <p:style>
+          <a:lnRef idx="2">
+            <a:schemeClr val="accent1">
+              <a:shade val="15000"/>
+            </a:schemeClr>
+          </a:lnRef>
+          <a:fillRef idx="1">
+            <a:schemeClr val="accent1"/>
+          </a:fillRef>
+          <a:effectRef idx="0">
+            <a:schemeClr val="accent1"/>
+          </a:effectRef>
+          <a:fontRef idx="minor">
+            <a:schemeClr val="lt1"/>
+          </a:fontRef>
+        </p:style>
+        <p:txBody>
+          <a:bodyPr rtlCol="0" anchor="ctr"/>
+          <a:lstStyle/>
+          <a:p>
+            <a:pPr algn="ctr"/>
+            <a:endParaRPr kumimoji="1" lang="ja-JP" altLang="en-US"/>
+          </a:p>
+        </p:txBody>
+      </p:sp>
+      <p:sp>
+        <p:nvSpPr>
+          <p:cNvPr id="302" name="円/楕円 301">
+            <a:extLst>
+              <a:ext uri="{FF2B5EF4-FFF2-40B4-BE49-F238E27FC236}">
+                <a16:creationId xmlns:a16="http://schemas.microsoft.com/office/drawing/2014/main" id="{D7C77C64-4247-F7B4-A4AE-D93D763E8AB9}"/>
+              </a:ext>
+            </a:extLst>
+          </p:cNvPr>
+          <p:cNvSpPr/>
+          <p:nvPr/>
+        </p:nvSpPr>
+        <p:spPr>
+          <a:xfrm rot="10800000">
+            <a:off x="6022484" y="3854831"/>
+            <a:ext cx="168339" cy="174795"/>
+          </a:xfrm>
+          <a:prstGeom prst="ellipse">
+            <a:avLst/>
+          </a:prstGeom>
+          <a:solidFill>
+            <a:schemeClr val="bg1"/>
+          </a:solidFill>
+          <a:ln>
+            <a:solidFill>
+              <a:schemeClr val="tx1"/>
+            </a:solidFill>
+          </a:ln>
+        </p:spPr>
+        <p:style>
+          <a:lnRef idx="2">
+            <a:schemeClr val="accent1">
+              <a:shade val="15000"/>
+            </a:schemeClr>
+          </a:lnRef>
+          <a:fillRef idx="1">
+            <a:schemeClr val="accent1"/>
+          </a:fillRef>
+          <a:effectRef idx="0">
+            <a:schemeClr val="accent1"/>
+          </a:effectRef>
+          <a:fontRef idx="minor">
+            <a:schemeClr val="lt1"/>
+          </a:fontRef>
+        </p:style>
+        <p:txBody>
+          <a:bodyPr rtlCol="0" anchor="ctr"/>
+          <a:lstStyle/>
+          <a:p>
+            <a:pPr algn="ctr"/>
+            <a:endParaRPr kumimoji="1" lang="ja-JP" altLang="en-US"/>
+          </a:p>
+        </p:txBody>
+      </p:sp>
+      <p:sp>
+        <p:nvSpPr>
+          <p:cNvPr id="13" name="円/楕円 12">
+            <a:extLst>
+              <a:ext uri="{FF2B5EF4-FFF2-40B4-BE49-F238E27FC236}">
+                <a16:creationId xmlns:a16="http://schemas.microsoft.com/office/drawing/2014/main" id="{2ABA33E9-82CC-B45A-9F3F-3B2D7F5CC17D}"/>
+              </a:ext>
+            </a:extLst>
+          </p:cNvPr>
+          <p:cNvSpPr/>
+          <p:nvPr/>
+        </p:nvSpPr>
+        <p:spPr>
+          <a:xfrm rot="10800000">
+            <a:off x="5076640" y="3532941"/>
+            <a:ext cx="168339" cy="174795"/>
+          </a:xfrm>
+          <a:prstGeom prst="ellipse">
+            <a:avLst/>
+          </a:prstGeom>
+          <a:solidFill>
+            <a:schemeClr val="bg1"/>
+          </a:solidFill>
+          <a:ln>
+            <a:solidFill>
+              <a:schemeClr val="tx1"/>
+            </a:solidFill>
+          </a:ln>
+        </p:spPr>
+        <p:style>
+          <a:lnRef idx="2">
+            <a:schemeClr val="accent1">
+              <a:shade val="15000"/>
+            </a:schemeClr>
+          </a:lnRef>
+          <a:fillRef idx="1">
+            <a:schemeClr val="accent1"/>
+          </a:fillRef>
+          <a:effectRef idx="0">
+            <a:schemeClr val="accent1"/>
+          </a:effectRef>
+          <a:fontRef idx="minor">
+            <a:schemeClr val="lt1"/>
+          </a:fontRef>
+        </p:style>
+        <p:txBody>
+          <a:bodyPr rtlCol="0" anchor="ctr"/>
+          <a:lstStyle/>
+          <a:p>
+            <a:pPr algn="ctr"/>
+            <a:endParaRPr kumimoji="1" lang="ja-JP" altLang="en-US"/>
+          </a:p>
+        </p:txBody>
+      </p:sp>
+      <p:sp>
+        <p:nvSpPr>
+          <p:cNvPr id="17" name="円/楕円 16">
+            <a:extLst>
+              <a:ext uri="{FF2B5EF4-FFF2-40B4-BE49-F238E27FC236}">
+                <a16:creationId xmlns:a16="http://schemas.microsoft.com/office/drawing/2014/main" id="{32A20D2F-6B75-CCB8-C4C0-785C6F66E792}"/>
+              </a:ext>
+            </a:extLst>
+          </p:cNvPr>
+          <p:cNvSpPr/>
+          <p:nvPr/>
+        </p:nvSpPr>
+        <p:spPr>
+          <a:xfrm rot="10800000">
+            <a:off x="4944033" y="684844"/>
+            <a:ext cx="168339" cy="174795"/>
+          </a:xfrm>
+          <a:prstGeom prst="ellipse">
+            <a:avLst/>
+          </a:prstGeom>
+          <a:solidFill>
+            <a:schemeClr val="bg1"/>
+          </a:solidFill>
+          <a:ln>
+            <a:solidFill>
+              <a:schemeClr val="tx1"/>
+            </a:solidFill>
+          </a:ln>
+        </p:spPr>
+        <p:style>
+          <a:lnRef idx="2">
+            <a:schemeClr val="accent1">
+              <a:shade val="15000"/>
+            </a:schemeClr>
+          </a:lnRef>
+          <a:fillRef idx="1">
+            <a:schemeClr val="accent1"/>
+          </a:fillRef>
+          <a:effectRef idx="0">
+            <a:schemeClr val="accent1"/>
+          </a:effectRef>
+          <a:fontRef idx="minor">
+            <a:schemeClr val="lt1"/>
+          </a:fontRef>
+        </p:style>
+        <p:txBody>
+          <a:bodyPr rtlCol="0" anchor="ctr"/>
+          <a:lstStyle/>
+          <a:p>
+            <a:pPr algn="ctr"/>
+            <a:endParaRPr kumimoji="1" lang="ja-JP" altLang="en-US"/>
+          </a:p>
+        </p:txBody>
+      </p:sp>
+      <p:sp>
+        <p:nvSpPr>
+          <p:cNvPr id="20" name="円/楕円 19">
+            <a:extLst>
+              <a:ext uri="{FF2B5EF4-FFF2-40B4-BE49-F238E27FC236}">
+                <a16:creationId xmlns:a16="http://schemas.microsoft.com/office/drawing/2014/main" id="{C40D64C6-E992-5C72-10BF-C73F9EC904CB}"/>
+              </a:ext>
+            </a:extLst>
+          </p:cNvPr>
+          <p:cNvSpPr/>
+          <p:nvPr/>
+        </p:nvSpPr>
+        <p:spPr>
+          <a:xfrm rot="10800000">
+            <a:off x="5086536" y="3214287"/>
+            <a:ext cx="168339" cy="174795"/>
+          </a:xfrm>
+          <a:prstGeom prst="ellipse">
+            <a:avLst/>
+          </a:prstGeom>
+          <a:solidFill>
+            <a:schemeClr val="bg1"/>
+          </a:solidFill>
+          <a:ln>
+            <a:solidFill>
+              <a:schemeClr val="tx1"/>
+            </a:solidFill>
+          </a:ln>
+        </p:spPr>
+        <p:style>
+          <a:lnRef idx="2">
+            <a:schemeClr val="accent1">
+              <a:shade val="15000"/>
+            </a:schemeClr>
+          </a:lnRef>
+          <a:fillRef idx="1">
+            <a:schemeClr val="accent1"/>
+          </a:fillRef>
+          <a:effectRef idx="0">
+            <a:schemeClr val="accent1"/>
+          </a:effectRef>
+          <a:fontRef idx="minor">
+            <a:schemeClr val="lt1"/>
+          </a:fontRef>
+        </p:style>
+        <p:txBody>
+          <a:bodyPr rtlCol="0" anchor="ctr"/>
+          <a:lstStyle/>
+          <a:p>
+            <a:pPr algn="ctr"/>
+            <a:endParaRPr kumimoji="1" lang="ja-JP" altLang="en-US"/>
+          </a:p>
+        </p:txBody>
+      </p:sp>
+      <p:sp>
+        <p:nvSpPr>
+          <p:cNvPr id="21" name="円/楕円 20">
+            <a:extLst>
+              <a:ext uri="{FF2B5EF4-FFF2-40B4-BE49-F238E27FC236}">
+                <a16:creationId xmlns:a16="http://schemas.microsoft.com/office/drawing/2014/main" id="{093293BB-D680-111D-2836-0AECD127D048}"/>
+              </a:ext>
+            </a:extLst>
+          </p:cNvPr>
+          <p:cNvSpPr/>
+          <p:nvPr/>
+        </p:nvSpPr>
+        <p:spPr>
+          <a:xfrm rot="10800000">
+            <a:off x="4930176" y="2194990"/>
+            <a:ext cx="168339" cy="174795"/>
+          </a:xfrm>
+          <a:prstGeom prst="ellipse">
+            <a:avLst/>
+          </a:prstGeom>
+          <a:solidFill>
+            <a:schemeClr val="bg1"/>
+          </a:solidFill>
+          <a:ln>
+            <a:solidFill>
+              <a:schemeClr val="tx1"/>
+            </a:solidFill>
+          </a:ln>
+        </p:spPr>
+        <p:style>
+          <a:lnRef idx="2">
+            <a:schemeClr val="accent1">
+              <a:shade val="15000"/>
+            </a:schemeClr>
+          </a:lnRef>
+          <a:fillRef idx="1">
+            <a:schemeClr val="accent1"/>
+          </a:fillRef>
+          <a:effectRef idx="0">
+            <a:schemeClr val="accent1"/>
+          </a:effectRef>
+          <a:fontRef idx="minor">
+            <a:schemeClr val="lt1"/>
+          </a:fontRef>
+        </p:style>
+        <p:txBody>
+          <a:bodyPr rtlCol="0" anchor="ctr"/>
+          <a:lstStyle/>
+          <a:p>
+            <a:pPr algn="ctr"/>
+            <a:endParaRPr kumimoji="1" lang="ja-JP" altLang="en-US"/>
+          </a:p>
+        </p:txBody>
+      </p:sp>
+      <p:sp>
+        <p:nvSpPr>
+          <p:cNvPr id="28" name="円/楕円 27">
+            <a:extLst>
+              <a:ext uri="{FF2B5EF4-FFF2-40B4-BE49-F238E27FC236}">
+                <a16:creationId xmlns:a16="http://schemas.microsoft.com/office/drawing/2014/main" id="{A56E928A-C6E1-3220-6E76-216ADF3E376F}"/>
+              </a:ext>
+            </a:extLst>
+          </p:cNvPr>
+          <p:cNvSpPr/>
+          <p:nvPr/>
+        </p:nvSpPr>
+        <p:spPr>
+          <a:xfrm rot="10800000">
+            <a:off x="6022707" y="4154414"/>
+            <a:ext cx="168339" cy="174795"/>
+          </a:xfrm>
+          <a:prstGeom prst="ellipse">
+            <a:avLst/>
+          </a:prstGeom>
+          <a:solidFill>
+            <a:schemeClr val="bg1"/>
+          </a:solidFill>
+          <a:ln>
+            <a:solidFill>
+              <a:schemeClr val="tx1"/>
+            </a:solidFill>
+          </a:ln>
+        </p:spPr>
+        <p:style>
+          <a:lnRef idx="2">
+            <a:schemeClr val="accent1">
+              <a:shade val="15000"/>
+            </a:schemeClr>
+          </a:lnRef>
+          <a:fillRef idx="1">
+            <a:schemeClr val="accent1"/>
+          </a:fillRef>
+          <a:effectRef idx="0">
+            <a:schemeClr val="accent1"/>
+          </a:effectRef>
+          <a:fontRef idx="minor">
+            <a:schemeClr val="lt1"/>
+          </a:fontRef>
+        </p:style>
+        <p:txBody>
+          <a:bodyPr rtlCol="0" anchor="ctr"/>
+          <a:lstStyle/>
+          <a:p>
+            <a:pPr algn="ctr"/>
+            <a:endParaRPr kumimoji="1" lang="ja-JP" altLang="en-US"/>
+          </a:p>
+        </p:txBody>
+      </p:sp>
+      <p:sp>
+        <p:nvSpPr>
+          <p:cNvPr id="30" name="円/楕円 29">
+            <a:extLst>
+              <a:ext uri="{FF2B5EF4-FFF2-40B4-BE49-F238E27FC236}">
+                <a16:creationId xmlns:a16="http://schemas.microsoft.com/office/drawing/2014/main" id="{BF9651F4-6549-3F66-C9D5-D73F5A9D23D6}"/>
+              </a:ext>
+            </a:extLst>
+          </p:cNvPr>
+          <p:cNvSpPr/>
+          <p:nvPr/>
+        </p:nvSpPr>
+        <p:spPr>
+          <a:xfrm rot="10800000">
+            <a:off x="6020729" y="3206368"/>
+            <a:ext cx="168339" cy="174795"/>
+          </a:xfrm>
+          <a:prstGeom prst="ellipse">
+            <a:avLst/>
+          </a:prstGeom>
+          <a:solidFill>
+            <a:schemeClr val="bg1"/>
+          </a:solidFill>
+          <a:ln>
+            <a:solidFill>
+              <a:schemeClr val="tx1"/>
+            </a:solidFill>
+          </a:ln>
+        </p:spPr>
+        <p:style>
+          <a:lnRef idx="2">
+            <a:schemeClr val="accent1">
+              <a:shade val="15000"/>
+            </a:schemeClr>
+          </a:lnRef>
+          <a:fillRef idx="1">
+            <a:schemeClr val="accent1"/>
+          </a:fillRef>
+          <a:effectRef idx="0">
+            <a:schemeClr val="accent1"/>
+          </a:effectRef>
+          <a:fontRef idx="minor">
+            <a:schemeClr val="lt1"/>
+          </a:fontRef>
+        </p:style>
+        <p:txBody>
+          <a:bodyPr rtlCol="0" anchor="ctr"/>
+          <a:lstStyle/>
+          <a:p>
+            <a:pPr algn="ctr"/>
+            <a:endParaRPr kumimoji="1" lang="ja-JP" altLang="en-US"/>
+          </a:p>
+        </p:txBody>
+      </p:sp>
+      <p:sp>
+        <p:nvSpPr>
+          <p:cNvPr id="36" name="円/楕円 35">
+            <a:extLst>
+              <a:ext uri="{FF2B5EF4-FFF2-40B4-BE49-F238E27FC236}">
+                <a16:creationId xmlns:a16="http://schemas.microsoft.com/office/drawing/2014/main" id="{5EEC08B1-5AC9-086A-EB0F-CA00EF0A1B25}"/>
+              </a:ext>
+            </a:extLst>
+          </p:cNvPr>
+          <p:cNvSpPr/>
+          <p:nvPr/>
+        </p:nvSpPr>
+        <p:spPr>
+          <a:xfrm rot="10800000">
+            <a:off x="5074662" y="4164313"/>
+            <a:ext cx="168339" cy="174795"/>
+          </a:xfrm>
+          <a:prstGeom prst="ellipse">
+            <a:avLst/>
+          </a:prstGeom>
+          <a:solidFill>
+            <a:schemeClr val="bg1"/>
+          </a:solidFill>
+          <a:ln>
+            <a:solidFill>
+              <a:schemeClr val="tx1"/>
+            </a:solidFill>
+          </a:ln>
+        </p:spPr>
+        <p:style>
+          <a:lnRef idx="2">
+            <a:schemeClr val="accent1">
+              <a:shade val="15000"/>
+            </a:schemeClr>
+          </a:lnRef>
+          <a:fillRef idx="1">
+            <a:schemeClr val="accent1"/>
+          </a:fillRef>
+          <a:effectRef idx="0">
+            <a:schemeClr val="accent1"/>
+          </a:effectRef>
+          <a:fontRef idx="minor">
+            <a:schemeClr val="lt1"/>
+          </a:fontRef>
+        </p:style>
+        <p:txBody>
+          <a:bodyPr rtlCol="0" anchor="ctr"/>
+          <a:lstStyle/>
+          <a:p>
+            <a:pPr algn="ctr"/>
+            <a:endParaRPr kumimoji="1" lang="ja-JP" altLang="en-US"/>
+          </a:p>
+        </p:txBody>
+      </p:sp>
+      <p:sp>
+        <p:nvSpPr>
+          <p:cNvPr id="37" name="円/楕円 36">
+            <a:extLst>
+              <a:ext uri="{FF2B5EF4-FFF2-40B4-BE49-F238E27FC236}">
+                <a16:creationId xmlns:a16="http://schemas.microsoft.com/office/drawing/2014/main" id="{6E415592-2D62-14C6-A5BD-6424404E8892}"/>
+              </a:ext>
+            </a:extLst>
+          </p:cNvPr>
+          <p:cNvSpPr/>
+          <p:nvPr/>
+        </p:nvSpPr>
+        <p:spPr>
+          <a:xfrm rot="10800000">
+            <a:off x="6034583" y="3536900"/>
+            <a:ext cx="168339" cy="174795"/>
+          </a:xfrm>
+          <a:prstGeom prst="ellipse">
+            <a:avLst/>
+          </a:prstGeom>
+          <a:solidFill>
+            <a:schemeClr val="bg1"/>
+          </a:solidFill>
+          <a:ln>
+            <a:solidFill>
+              <a:schemeClr val="tx1"/>
+            </a:solidFill>
+          </a:ln>
+        </p:spPr>
+        <p:style>
+          <a:lnRef idx="2">
+            <a:schemeClr val="accent1">
+              <a:shade val="15000"/>
+            </a:schemeClr>
+          </a:lnRef>
+          <a:fillRef idx="1">
+            <a:schemeClr val="accent1"/>
+          </a:fillRef>
+          <a:effectRef idx="0">
+            <a:schemeClr val="accent1"/>
+          </a:effectRef>
+          <a:fontRef idx="minor">
+            <a:schemeClr val="lt1"/>
+          </a:fontRef>
+        </p:style>
+        <p:txBody>
+          <a:bodyPr rtlCol="0" anchor="ctr"/>
+          <a:lstStyle/>
+          <a:p>
+            <a:pPr algn="ctr"/>
+            <a:endParaRPr kumimoji="1" lang="ja-JP" altLang="en-US"/>
+          </a:p>
+        </p:txBody>
+      </p:sp>
+      <p:sp>
+        <p:nvSpPr>
+          <p:cNvPr id="45" name="円/楕円 44">
+            <a:extLst>
+              <a:ext uri="{FF2B5EF4-FFF2-40B4-BE49-F238E27FC236}">
+                <a16:creationId xmlns:a16="http://schemas.microsoft.com/office/drawing/2014/main" id="{8B0407CB-AD40-2738-8B2F-58B9D7721141}"/>
+              </a:ext>
+            </a:extLst>
+          </p:cNvPr>
+          <p:cNvSpPr/>
+          <p:nvPr/>
+        </p:nvSpPr>
+        <p:spPr>
+          <a:xfrm rot="10800000">
+            <a:off x="6600640" y="3196474"/>
+            <a:ext cx="168339" cy="174795"/>
+          </a:xfrm>
+          <a:prstGeom prst="ellipse">
+            <a:avLst/>
+          </a:prstGeom>
+          <a:solidFill>
+            <a:schemeClr val="bg1"/>
+          </a:solidFill>
+          <a:ln>
+            <a:solidFill>
+              <a:schemeClr val="tx1"/>
+            </a:solidFill>
+          </a:ln>
+        </p:spPr>
+        <p:style>
+          <a:lnRef idx="2">
+            <a:schemeClr val="accent1">
+              <a:shade val="15000"/>
+            </a:schemeClr>
+          </a:lnRef>
+          <a:fillRef idx="1">
+            <a:schemeClr val="accent1"/>
+          </a:fillRef>
+          <a:effectRef idx="0">
+            <a:schemeClr val="accent1"/>
+          </a:effectRef>
+          <a:fontRef idx="minor">
+            <a:schemeClr val="lt1"/>
+          </a:fontRef>
+        </p:style>
+        <p:txBody>
+          <a:bodyPr rtlCol="0" anchor="ctr"/>
+          <a:lstStyle/>
+          <a:p>
+            <a:pPr algn="ctr"/>
+            <a:endParaRPr kumimoji="1" lang="ja-JP" altLang="en-US"/>
+          </a:p>
+        </p:txBody>
+      </p:sp>
+      <p:cxnSp>
+        <p:nvCxnSpPr>
+          <p:cNvPr id="47" name="カギ線コネクタ 46">
+            <a:extLst>
+              <a:ext uri="{FF2B5EF4-FFF2-40B4-BE49-F238E27FC236}">
+                <a16:creationId xmlns:a16="http://schemas.microsoft.com/office/drawing/2014/main" id="{7E174B1E-9D5E-3348-3213-BDA36D5F8F57}"/>
+              </a:ext>
+            </a:extLst>
+          </p:cNvPr>
+          <p:cNvCxnSpPr>
+            <a:cxnSpLocks/>
+            <a:stCxn id="45" idx="6"/>
+            <a:endCxn id="30" idx="2"/>
+          </p:cNvCxnSpPr>
+          <p:nvPr/>
+        </p:nvCxnSpPr>
+        <p:spPr>
+          <a:xfrm rot="10800000" flipV="1">
+            <a:off x="6189068" y="3283871"/>
+            <a:ext cx="411572" cy="9894"/>
+          </a:xfrm>
+          <a:prstGeom prst="bentConnector3">
+            <a:avLst>
+              <a:gd name="adj1" fmla="val 50000"/>
+            </a:avLst>
+          </a:prstGeom>
+          <a:ln w="63500">
+            <a:solidFill>
+              <a:srgbClr val="FF0000"/>
+            </a:solidFill>
+            <a:prstDash val="sysDot"/>
+          </a:ln>
+        </p:spPr>
+        <p:style>
+          <a:lnRef idx="2">
+            <a:schemeClr val="accent1"/>
+          </a:lnRef>
+          <a:fillRef idx="0">
+            <a:schemeClr val="accent1"/>
+          </a:fillRef>
+          <a:effectRef idx="1">
+            <a:schemeClr val="accent1"/>
+          </a:effectRef>
+          <a:fontRef idx="minor">
+            <a:schemeClr val="tx1"/>
+          </a:fontRef>
+        </p:style>
+      </p:cxnSp>
+      <p:sp>
+        <p:nvSpPr>
+          <p:cNvPr id="53" name="円/楕円 52">
+            <a:extLst>
+              <a:ext uri="{FF2B5EF4-FFF2-40B4-BE49-F238E27FC236}">
+                <a16:creationId xmlns:a16="http://schemas.microsoft.com/office/drawing/2014/main" id="{E642C119-CB17-D886-CA06-E5E21CD13633}"/>
+              </a:ext>
+            </a:extLst>
+          </p:cNvPr>
+          <p:cNvSpPr/>
+          <p:nvPr/>
+        </p:nvSpPr>
+        <p:spPr>
+          <a:xfrm rot="10800000">
+            <a:off x="5830721" y="2196969"/>
+            <a:ext cx="168339" cy="174795"/>
+          </a:xfrm>
+          <a:prstGeom prst="ellipse">
+            <a:avLst/>
+          </a:prstGeom>
+          <a:solidFill>
+            <a:schemeClr val="bg1"/>
+          </a:solidFill>
+          <a:ln>
+            <a:solidFill>
+              <a:schemeClr val="tx1"/>
+            </a:solidFill>
+          </a:ln>
+        </p:spPr>
+        <p:style>
+          <a:lnRef idx="2">
+            <a:schemeClr val="accent1">
+              <a:shade val="15000"/>
+            </a:schemeClr>
+          </a:lnRef>
+          <a:fillRef idx="1">
+            <a:schemeClr val="accent1"/>
+          </a:fillRef>
+          <a:effectRef idx="0">
+            <a:schemeClr val="accent1"/>
+          </a:effectRef>
+          <a:fontRef idx="minor">
+            <a:schemeClr val="lt1"/>
+          </a:fontRef>
+        </p:style>
+        <p:txBody>
+          <a:bodyPr rtlCol="0" anchor="ctr"/>
+          <a:lstStyle/>
+          <a:p>
+            <a:pPr algn="ctr"/>
+            <a:endParaRPr kumimoji="1" lang="ja-JP" altLang="en-US"/>
+          </a:p>
+        </p:txBody>
+      </p:sp>
+      <p:sp>
+        <p:nvSpPr>
+          <p:cNvPr id="70" name="円/楕円 69">
+            <a:extLst>
+              <a:ext uri="{FF2B5EF4-FFF2-40B4-BE49-F238E27FC236}">
+                <a16:creationId xmlns:a16="http://schemas.microsoft.com/office/drawing/2014/main" id="{D8E4C09F-BD36-C925-ED77-E5143C32C2FC}"/>
+              </a:ext>
+            </a:extLst>
+          </p:cNvPr>
+          <p:cNvSpPr/>
+          <p:nvPr/>
+        </p:nvSpPr>
+        <p:spPr>
+          <a:xfrm rot="10800000">
+            <a:off x="6147400" y="2189049"/>
+            <a:ext cx="168339" cy="174795"/>
+          </a:xfrm>
+          <a:prstGeom prst="ellipse">
+            <a:avLst/>
+          </a:prstGeom>
+          <a:solidFill>
+            <a:schemeClr val="bg1"/>
+          </a:solidFill>
+          <a:ln>
+            <a:solidFill>
+              <a:schemeClr val="tx1"/>
+            </a:solidFill>
+          </a:ln>
+        </p:spPr>
+        <p:style>
+          <a:lnRef idx="2">
+            <a:schemeClr val="accent1">
+              <a:shade val="15000"/>
+            </a:schemeClr>
+          </a:lnRef>
+          <a:fillRef idx="1">
+            <a:schemeClr val="accent1"/>
+          </a:fillRef>
+          <a:effectRef idx="0">
+            <a:schemeClr val="accent1"/>
+          </a:effectRef>
+          <a:fontRef idx="minor">
+            <a:schemeClr val="lt1"/>
+          </a:fontRef>
+        </p:style>
+        <p:txBody>
+          <a:bodyPr rtlCol="0" anchor="ctr"/>
+          <a:lstStyle/>
+          <a:p>
+            <a:pPr algn="ctr"/>
+            <a:endParaRPr kumimoji="1" lang="ja-JP" altLang="en-US"/>
+          </a:p>
+        </p:txBody>
+      </p:sp>
+      <p:sp>
+        <p:nvSpPr>
+          <p:cNvPr id="71" name="円/楕円 70">
+            <a:extLst>
+              <a:ext uri="{FF2B5EF4-FFF2-40B4-BE49-F238E27FC236}">
+                <a16:creationId xmlns:a16="http://schemas.microsoft.com/office/drawing/2014/main" id="{206DF9BE-8D75-C72F-D8EC-F81F24628FC6}"/>
+              </a:ext>
+            </a:extLst>
+          </p:cNvPr>
+          <p:cNvSpPr/>
+          <p:nvPr/>
+        </p:nvSpPr>
+        <p:spPr>
+          <a:xfrm rot="10800000">
+            <a:off x="5611031" y="3532939"/>
+            <a:ext cx="168339" cy="174795"/>
+          </a:xfrm>
+          <a:prstGeom prst="ellipse">
+            <a:avLst/>
+          </a:prstGeom>
+          <a:solidFill>
+            <a:schemeClr val="bg1"/>
+          </a:solidFill>
+          <a:ln>
+            <a:solidFill>
+              <a:schemeClr val="tx1"/>
+            </a:solidFill>
+          </a:ln>
+        </p:spPr>
+        <p:style>
+          <a:lnRef idx="2">
+            <a:schemeClr val="accent1">
+              <a:shade val="15000"/>
+            </a:schemeClr>
+          </a:lnRef>
+          <a:fillRef idx="1">
+            <a:schemeClr val="accent1"/>
+          </a:fillRef>
+          <a:effectRef idx="0">
+            <a:schemeClr val="accent1"/>
+          </a:effectRef>
+          <a:fontRef idx="minor">
+            <a:schemeClr val="lt1"/>
+          </a:fontRef>
+        </p:style>
+        <p:txBody>
+          <a:bodyPr rtlCol="0" anchor="ctr"/>
+          <a:lstStyle/>
+          <a:p>
+            <a:pPr algn="ctr"/>
+            <a:endParaRPr kumimoji="1" lang="ja-JP" altLang="en-US"/>
+          </a:p>
+        </p:txBody>
+      </p:sp>
+      <p:sp>
+        <p:nvSpPr>
+          <p:cNvPr id="80" name="円/楕円 79">
+            <a:extLst>
+              <a:ext uri="{FF2B5EF4-FFF2-40B4-BE49-F238E27FC236}">
+                <a16:creationId xmlns:a16="http://schemas.microsoft.com/office/drawing/2014/main" id="{4B44FDBA-F8FF-2718-4615-23AA846FC81A}"/>
+              </a:ext>
+            </a:extLst>
+          </p:cNvPr>
+          <p:cNvSpPr/>
+          <p:nvPr/>
+        </p:nvSpPr>
+        <p:spPr>
+          <a:xfrm rot="10800000">
+            <a:off x="6751059" y="2191027"/>
+            <a:ext cx="168339" cy="174795"/>
+          </a:xfrm>
+          <a:prstGeom prst="ellipse">
+            <a:avLst/>
+          </a:prstGeom>
+          <a:solidFill>
+            <a:schemeClr val="bg1"/>
+          </a:solidFill>
+          <a:ln>
+            <a:solidFill>
+              <a:schemeClr val="tx1"/>
+            </a:solidFill>
+          </a:ln>
+        </p:spPr>
+        <p:style>
+          <a:lnRef idx="2">
+            <a:schemeClr val="accent1">
+              <a:shade val="15000"/>
+            </a:schemeClr>
+          </a:lnRef>
+          <a:fillRef idx="1">
+            <a:schemeClr val="accent1"/>
+          </a:fillRef>
+          <a:effectRef idx="0">
+            <a:schemeClr val="accent1"/>
+          </a:effectRef>
+          <a:fontRef idx="minor">
+            <a:schemeClr val="lt1"/>
+          </a:fontRef>
+        </p:style>
+        <p:txBody>
+          <a:bodyPr rtlCol="0" anchor="ctr"/>
+          <a:lstStyle/>
+          <a:p>
+            <a:pPr algn="ctr"/>
+            <a:endParaRPr kumimoji="1" lang="ja-JP" altLang="en-US"/>
+          </a:p>
+        </p:txBody>
+      </p:sp>
+      <p:sp>
+        <p:nvSpPr>
+          <p:cNvPr id="95" name="円/楕円 94">
+            <a:extLst>
+              <a:ext uri="{FF2B5EF4-FFF2-40B4-BE49-F238E27FC236}">
+                <a16:creationId xmlns:a16="http://schemas.microsoft.com/office/drawing/2014/main" id="{CFD13902-D917-379A-4095-03C61158E647}"/>
+              </a:ext>
+            </a:extLst>
+          </p:cNvPr>
+          <p:cNvSpPr/>
+          <p:nvPr/>
+        </p:nvSpPr>
+        <p:spPr>
+          <a:xfrm rot="10800000">
+            <a:off x="7045962" y="2193006"/>
+            <a:ext cx="168339" cy="174795"/>
+          </a:xfrm>
+          <a:prstGeom prst="ellipse">
+            <a:avLst/>
+          </a:prstGeom>
+          <a:solidFill>
+            <a:schemeClr val="bg1"/>
+          </a:solidFill>
+          <a:ln>
+            <a:solidFill>
+              <a:schemeClr val="tx1"/>
+            </a:solidFill>
+          </a:ln>
+        </p:spPr>
+        <p:style>
+          <a:lnRef idx="2">
+            <a:schemeClr val="accent1">
+              <a:shade val="15000"/>
+            </a:schemeClr>
+          </a:lnRef>
+          <a:fillRef idx="1">
+            <a:schemeClr val="accent1"/>
+          </a:fillRef>
+          <a:effectRef idx="0">
+            <a:schemeClr val="accent1"/>
+          </a:effectRef>
+          <a:fontRef idx="minor">
+            <a:schemeClr val="lt1"/>
+          </a:fontRef>
+        </p:style>
+        <p:txBody>
+          <a:bodyPr rtlCol="0" anchor="ctr"/>
+          <a:lstStyle/>
+          <a:p>
+            <a:pPr algn="ctr"/>
+            <a:endParaRPr kumimoji="1" lang="ja-JP" altLang="en-US"/>
+          </a:p>
+        </p:txBody>
+      </p:sp>
+      <p:sp>
+        <p:nvSpPr>
+          <p:cNvPr id="101" name="円/楕円 100">
+            <a:extLst>
+              <a:ext uri="{FF2B5EF4-FFF2-40B4-BE49-F238E27FC236}">
+                <a16:creationId xmlns:a16="http://schemas.microsoft.com/office/drawing/2014/main" id="{3936C7F5-7930-8631-8660-A15887447344}"/>
+              </a:ext>
+            </a:extLst>
+          </p:cNvPr>
+          <p:cNvSpPr/>
+          <p:nvPr/>
+        </p:nvSpPr>
+        <p:spPr>
+          <a:xfrm rot="10800000">
+            <a:off x="7348673" y="680347"/>
+            <a:ext cx="168339" cy="174795"/>
+          </a:xfrm>
+          <a:prstGeom prst="ellipse">
+            <a:avLst/>
+          </a:prstGeom>
+          <a:solidFill>
+            <a:schemeClr val="bg1"/>
+          </a:solidFill>
+          <a:ln>
+            <a:solidFill>
+              <a:schemeClr val="tx1"/>
+            </a:solidFill>
+          </a:ln>
+        </p:spPr>
+        <p:style>
+          <a:lnRef idx="2">
+            <a:schemeClr val="accent1">
+              <a:shade val="15000"/>
+            </a:schemeClr>
+          </a:lnRef>
+          <a:fillRef idx="1">
+            <a:schemeClr val="accent1"/>
+          </a:fillRef>
+          <a:effectRef idx="0">
+            <a:schemeClr val="accent1"/>
+          </a:effectRef>
+          <a:fontRef idx="minor">
+            <a:schemeClr val="lt1"/>
+          </a:fontRef>
+        </p:style>
+        <p:txBody>
+          <a:bodyPr rtlCol="0" anchor="ctr"/>
+          <a:lstStyle/>
+          <a:p>
+            <a:pPr algn="ctr"/>
+            <a:endParaRPr kumimoji="1" lang="ja-JP" altLang="en-US"/>
+          </a:p>
+        </p:txBody>
+      </p:sp>
+      <p:cxnSp>
+        <p:nvCxnSpPr>
+          <p:cNvPr id="109" name="カギ線コネクタ 108">
+            <a:extLst>
+              <a:ext uri="{FF2B5EF4-FFF2-40B4-BE49-F238E27FC236}">
+                <a16:creationId xmlns:a16="http://schemas.microsoft.com/office/drawing/2014/main" id="{AAF8E04F-8AE2-5D33-D41F-D361959899F2}"/>
+              </a:ext>
+            </a:extLst>
+          </p:cNvPr>
+          <p:cNvCxnSpPr>
+            <a:cxnSpLocks/>
+            <a:stCxn id="292" idx="0"/>
+            <a:endCxn id="34" idx="6"/>
+          </p:cNvCxnSpPr>
+          <p:nvPr/>
+        </p:nvCxnSpPr>
+        <p:spPr>
+          <a:xfrm rot="16200000" flipH="1">
+            <a:off x="6886989" y="807227"/>
+            <a:ext cx="683058" cy="798677"/>
+          </a:xfrm>
+          <a:prstGeom prst="bentConnector2">
+            <a:avLst/>
+          </a:prstGeom>
+          <a:ln w="63500">
+            <a:solidFill>
+              <a:schemeClr val="tx1">
+                <a:lumMod val="50000"/>
+                <a:lumOff val="50000"/>
+              </a:schemeClr>
+            </a:solidFill>
+            <a:prstDash val="sysDot"/>
+          </a:ln>
+        </p:spPr>
+        <p:style>
+          <a:lnRef idx="2">
+            <a:schemeClr val="accent1"/>
+          </a:lnRef>
+          <a:fillRef idx="0">
+            <a:schemeClr val="accent1"/>
+          </a:fillRef>
+          <a:effectRef idx="1">
+            <a:schemeClr val="accent1"/>
+          </a:effectRef>
+          <a:fontRef idx="minor">
+            <a:schemeClr val="tx1"/>
+          </a:fontRef>
+        </p:style>
+      </p:cxnSp>
+      <p:cxnSp>
+        <p:nvCxnSpPr>
+          <p:cNvPr id="102" name="カギ線コネクタ 101">
+            <a:extLst>
+              <a:ext uri="{FF2B5EF4-FFF2-40B4-BE49-F238E27FC236}">
+                <a16:creationId xmlns:a16="http://schemas.microsoft.com/office/drawing/2014/main" id="{D124ECD4-B3C3-0332-71ED-29F7DE214025}"/>
+              </a:ext>
+            </a:extLst>
+          </p:cNvPr>
+          <p:cNvCxnSpPr>
+            <a:cxnSpLocks/>
+            <a:stCxn id="101" idx="0"/>
+            <a:endCxn id="32" idx="4"/>
+          </p:cNvCxnSpPr>
+          <p:nvPr/>
+        </p:nvCxnSpPr>
+        <p:spPr>
+          <a:xfrm rot="16200000" flipH="1">
+            <a:off x="7673417" y="614567"/>
+            <a:ext cx="346277" cy="827426"/>
+          </a:xfrm>
+          <a:prstGeom prst="bentConnector3">
+            <a:avLst>
+              <a:gd name="adj1" fmla="val 50000"/>
+            </a:avLst>
+          </a:prstGeom>
+          <a:ln w="63500">
+            <a:solidFill>
+              <a:srgbClr val="FFC000"/>
+            </a:solidFill>
+            <a:prstDash val="sysDot"/>
+          </a:ln>
+        </p:spPr>
+        <p:style>
+          <a:lnRef idx="2">
+            <a:schemeClr val="accent1"/>
+          </a:lnRef>
+          <a:fillRef idx="0">
+            <a:schemeClr val="accent1"/>
+          </a:fillRef>
+          <a:effectRef idx="1">
+            <a:schemeClr val="accent1"/>
+          </a:effectRef>
+          <a:fontRef idx="minor">
+            <a:schemeClr val="tx1"/>
+          </a:fontRef>
+        </p:style>
+      </p:cxnSp>
+      <p:cxnSp>
+        <p:nvCxnSpPr>
+          <p:cNvPr id="84" name="カギ線コネクタ 83">
+            <a:extLst>
+              <a:ext uri="{FF2B5EF4-FFF2-40B4-BE49-F238E27FC236}">
+                <a16:creationId xmlns:a16="http://schemas.microsoft.com/office/drawing/2014/main" id="{78759E03-C7D8-357C-96E1-64765DFCC940}"/>
+              </a:ext>
+            </a:extLst>
+          </p:cNvPr>
+          <p:cNvCxnSpPr>
+            <a:cxnSpLocks/>
+            <a:stCxn id="56" idx="6"/>
+            <a:endCxn id="36" idx="0"/>
+          </p:cNvCxnSpPr>
+          <p:nvPr/>
+        </p:nvCxnSpPr>
+        <p:spPr>
+          <a:xfrm flipH="1">
+            <a:off x="5158831" y="1692904"/>
+            <a:ext cx="3558774" cy="2646204"/>
+          </a:xfrm>
+          <a:prstGeom prst="bentConnector4">
+            <a:avLst>
+              <a:gd name="adj1" fmla="val -11096"/>
+              <a:gd name="adj2" fmla="val 108639"/>
+            </a:avLst>
+          </a:prstGeom>
+          <a:ln w="63500">
+            <a:solidFill>
+              <a:schemeClr val="tx1">
+                <a:lumMod val="50000"/>
+                <a:lumOff val="50000"/>
+              </a:schemeClr>
+            </a:solidFill>
+            <a:prstDash val="sysDot"/>
+          </a:ln>
+        </p:spPr>
+        <p:style>
+          <a:lnRef idx="2">
+            <a:schemeClr val="accent1"/>
+          </a:lnRef>
+          <a:fillRef idx="0">
+            <a:schemeClr val="accent1"/>
+          </a:fillRef>
+          <a:effectRef idx="1">
+            <a:schemeClr val="accent1"/>
+          </a:effectRef>
+          <a:fontRef idx="minor">
+            <a:schemeClr val="tx1"/>
+          </a:fontRef>
+        </p:style>
+      </p:cxnSp>
+      <p:sp>
+        <p:nvSpPr>
+          <p:cNvPr id="32" name="円/楕円 31">
+            <a:extLst>
+              <a:ext uri="{FF2B5EF4-FFF2-40B4-BE49-F238E27FC236}">
+                <a16:creationId xmlns:a16="http://schemas.microsoft.com/office/drawing/2014/main" id="{76A0018B-44AF-7964-67D7-CE66EFAC49FA}"/>
+              </a:ext>
+            </a:extLst>
+          </p:cNvPr>
+          <p:cNvSpPr/>
+          <p:nvPr/>
+        </p:nvSpPr>
+        <p:spPr>
+          <a:xfrm rot="10800000">
+            <a:off x="8176099" y="1201419"/>
+            <a:ext cx="168339" cy="174795"/>
+          </a:xfrm>
+          <a:prstGeom prst="ellipse">
+            <a:avLst/>
+          </a:prstGeom>
+          <a:solidFill>
+            <a:schemeClr val="bg1"/>
+          </a:solidFill>
+          <a:ln>
+            <a:solidFill>
+              <a:schemeClr val="tx1"/>
+            </a:solidFill>
+          </a:ln>
+        </p:spPr>
+        <p:style>
+          <a:lnRef idx="2">
+            <a:schemeClr val="accent1">
+              <a:shade val="15000"/>
+            </a:schemeClr>
+          </a:lnRef>
+          <a:fillRef idx="1">
+            <a:schemeClr val="accent1"/>
+          </a:fillRef>
+          <a:effectRef idx="0">
+            <a:schemeClr val="accent1"/>
+          </a:effectRef>
+          <a:fontRef idx="minor">
+            <a:schemeClr val="lt1"/>
+          </a:fontRef>
+        </p:style>
+        <p:txBody>
+          <a:bodyPr rtlCol="0" anchor="ctr"/>
+          <a:lstStyle/>
+          <a:p>
+            <a:pPr algn="ctr"/>
+            <a:endParaRPr kumimoji="1" lang="ja-JP" altLang="en-US"/>
+          </a:p>
+        </p:txBody>
+      </p:sp>
+      <p:sp>
+        <p:nvSpPr>
+          <p:cNvPr id="34" name="円/楕円 33">
+            <a:extLst>
+              <a:ext uri="{FF2B5EF4-FFF2-40B4-BE49-F238E27FC236}">
+                <a16:creationId xmlns:a16="http://schemas.microsoft.com/office/drawing/2014/main" id="{779759A8-318D-FC1B-B9D0-E39454906AA5}"/>
+              </a:ext>
+            </a:extLst>
+          </p:cNvPr>
+          <p:cNvSpPr/>
+          <p:nvPr/>
+        </p:nvSpPr>
+        <p:spPr>
+          <a:xfrm rot="10800000">
+            <a:off x="7627857" y="1460698"/>
+            <a:ext cx="168339" cy="174795"/>
+          </a:xfrm>
+          <a:prstGeom prst="ellipse">
+            <a:avLst/>
+          </a:prstGeom>
+          <a:solidFill>
+            <a:schemeClr val="bg1"/>
+          </a:solidFill>
+          <a:ln>
+            <a:solidFill>
+              <a:schemeClr val="tx1"/>
+            </a:solidFill>
+          </a:ln>
+        </p:spPr>
+        <p:style>
+          <a:lnRef idx="2">
+            <a:schemeClr val="accent1">
+              <a:shade val="15000"/>
+            </a:schemeClr>
+          </a:lnRef>
+          <a:fillRef idx="1">
+            <a:schemeClr val="accent1"/>
+          </a:fillRef>
+          <a:effectRef idx="0">
+            <a:schemeClr val="accent1"/>
+          </a:effectRef>
+          <a:fontRef idx="minor">
+            <a:schemeClr val="lt1"/>
+          </a:fontRef>
+        </p:style>
+        <p:txBody>
+          <a:bodyPr rtlCol="0" anchor="ctr"/>
+          <a:lstStyle/>
+          <a:p>
+            <a:pPr algn="ctr"/>
+            <a:endParaRPr kumimoji="1" lang="ja-JP" altLang="en-US"/>
+          </a:p>
+        </p:txBody>
+      </p:sp>
+      <p:cxnSp>
+        <p:nvCxnSpPr>
+          <p:cNvPr id="35" name="カギ線コネクタ 34">
+            <a:extLst>
+              <a:ext uri="{FF2B5EF4-FFF2-40B4-BE49-F238E27FC236}">
+                <a16:creationId xmlns:a16="http://schemas.microsoft.com/office/drawing/2014/main" id="{00BEF4C0-089A-38E3-EE5E-7B6333A55F07}"/>
+              </a:ext>
+            </a:extLst>
+          </p:cNvPr>
+          <p:cNvCxnSpPr>
+            <a:cxnSpLocks/>
+            <a:stCxn id="32" idx="0"/>
+            <a:endCxn id="58" idx="2"/>
+          </p:cNvCxnSpPr>
+          <p:nvPr/>
+        </p:nvCxnSpPr>
+        <p:spPr>
+          <a:xfrm rot="16200000" flipH="1">
+            <a:off x="7937501" y="1698981"/>
+            <a:ext cx="926292" cy="280758"/>
+          </a:xfrm>
+          <a:prstGeom prst="bentConnector2">
+            <a:avLst/>
+          </a:prstGeom>
+          <a:ln w="63500">
+            <a:solidFill>
+              <a:srgbClr val="FFC000"/>
+            </a:solidFill>
+            <a:prstDash val="sysDot"/>
+          </a:ln>
+        </p:spPr>
+        <p:style>
+          <a:lnRef idx="2">
+            <a:schemeClr val="accent1"/>
+          </a:lnRef>
+          <a:fillRef idx="0">
+            <a:schemeClr val="accent1"/>
+          </a:fillRef>
+          <a:effectRef idx="1">
+            <a:schemeClr val="accent1"/>
+          </a:effectRef>
+          <a:fontRef idx="minor">
+            <a:schemeClr val="tx1"/>
+          </a:fontRef>
+        </p:style>
+      </p:cxnSp>
+      <p:cxnSp>
+        <p:nvCxnSpPr>
+          <p:cNvPr id="41" name="カギ線コネクタ 40">
+            <a:extLst>
+              <a:ext uri="{FF2B5EF4-FFF2-40B4-BE49-F238E27FC236}">
+                <a16:creationId xmlns:a16="http://schemas.microsoft.com/office/drawing/2014/main" id="{6C394D10-9281-72A9-9D2B-E7EDF3F404D3}"/>
+              </a:ext>
+            </a:extLst>
+          </p:cNvPr>
+          <p:cNvCxnSpPr>
+            <a:cxnSpLocks/>
+            <a:stCxn id="34" idx="2"/>
+            <a:endCxn id="59" idx="2"/>
+          </p:cNvCxnSpPr>
+          <p:nvPr/>
+        </p:nvCxnSpPr>
+        <p:spPr>
+          <a:xfrm>
+            <a:off x="7796196" y="1548095"/>
+            <a:ext cx="736590" cy="1067449"/>
+          </a:xfrm>
+          <a:prstGeom prst="bentConnector3">
+            <a:avLst>
+              <a:gd name="adj1" fmla="val 19368"/>
+            </a:avLst>
+          </a:prstGeom>
+          <a:ln w="63500">
+            <a:solidFill>
+              <a:schemeClr val="tx1">
+                <a:lumMod val="50000"/>
+                <a:lumOff val="50000"/>
+              </a:schemeClr>
+            </a:solidFill>
+            <a:prstDash val="sysDot"/>
+          </a:ln>
+        </p:spPr>
+        <p:style>
+          <a:lnRef idx="2">
+            <a:schemeClr val="accent1"/>
+          </a:lnRef>
+          <a:fillRef idx="0">
+            <a:schemeClr val="accent1"/>
+          </a:fillRef>
+          <a:effectRef idx="1">
+            <a:schemeClr val="accent1"/>
+          </a:effectRef>
+          <a:fontRef idx="minor">
+            <a:schemeClr val="tx1"/>
+          </a:fontRef>
+        </p:style>
+      </p:cxnSp>
+      <p:sp>
+        <p:nvSpPr>
+          <p:cNvPr id="52" name="円/楕円 51">
+            <a:extLst>
+              <a:ext uri="{FF2B5EF4-FFF2-40B4-BE49-F238E27FC236}">
+                <a16:creationId xmlns:a16="http://schemas.microsoft.com/office/drawing/2014/main" id="{7944D71A-7DBB-2B75-ADD4-4EE0AFC63AF3}"/>
+              </a:ext>
+            </a:extLst>
+          </p:cNvPr>
+          <p:cNvSpPr/>
+          <p:nvPr/>
+        </p:nvSpPr>
+        <p:spPr>
+          <a:xfrm rot="10800000">
+            <a:off x="5084559" y="3841701"/>
+            <a:ext cx="168339" cy="174795"/>
+          </a:xfrm>
+          <a:prstGeom prst="ellipse">
+            <a:avLst/>
+          </a:prstGeom>
+          <a:solidFill>
+            <a:schemeClr val="bg1"/>
+          </a:solidFill>
+          <a:ln>
+            <a:solidFill>
+              <a:schemeClr val="tx1"/>
+            </a:solidFill>
+          </a:ln>
+        </p:spPr>
+        <p:style>
+          <a:lnRef idx="2">
+            <a:schemeClr val="accent1">
+              <a:shade val="15000"/>
+            </a:schemeClr>
+          </a:lnRef>
+          <a:fillRef idx="1">
+            <a:schemeClr val="accent1"/>
+          </a:fillRef>
+          <a:effectRef idx="0">
+            <a:schemeClr val="accent1"/>
+          </a:effectRef>
+          <a:fontRef idx="minor">
+            <a:schemeClr val="lt1"/>
+          </a:fontRef>
+        </p:style>
+        <p:txBody>
+          <a:bodyPr rtlCol="0" anchor="ctr"/>
+          <a:lstStyle/>
+          <a:p>
+            <a:pPr algn="ctr"/>
+            <a:endParaRPr kumimoji="1" lang="ja-JP" altLang="en-US"/>
+          </a:p>
+        </p:txBody>
+      </p:sp>
+      <p:cxnSp>
+        <p:nvCxnSpPr>
+          <p:cNvPr id="65" name="カギ線コネクタ 64">
+            <a:extLst>
+              <a:ext uri="{FF2B5EF4-FFF2-40B4-BE49-F238E27FC236}">
+                <a16:creationId xmlns:a16="http://schemas.microsoft.com/office/drawing/2014/main" id="{25EE2C4E-8849-4702-04BA-788AFB7D43B5}"/>
+              </a:ext>
+            </a:extLst>
+          </p:cNvPr>
+          <p:cNvCxnSpPr>
+            <a:cxnSpLocks/>
+            <a:stCxn id="52" idx="0"/>
+            <a:endCxn id="36" idx="4"/>
+          </p:cNvCxnSpPr>
+          <p:nvPr/>
+        </p:nvCxnSpPr>
+        <p:spPr>
+          <a:xfrm rot="5400000">
+            <a:off x="5089872" y="4085456"/>
+            <a:ext cx="147817" cy="9897"/>
+          </a:xfrm>
+          <a:prstGeom prst="bentConnector3">
+            <a:avLst>
+              <a:gd name="adj1" fmla="val 50000"/>
+            </a:avLst>
+          </a:prstGeom>
+          <a:ln w="63500">
+            <a:solidFill>
+              <a:schemeClr val="tx1">
+                <a:lumMod val="50000"/>
+                <a:lumOff val="50000"/>
+              </a:schemeClr>
+            </a:solidFill>
+            <a:prstDash val="sysDot"/>
+          </a:ln>
+        </p:spPr>
+        <p:style>
+          <a:lnRef idx="2">
+            <a:schemeClr val="accent1"/>
+          </a:lnRef>
+          <a:fillRef idx="0">
+            <a:schemeClr val="accent1"/>
+          </a:fillRef>
+          <a:effectRef idx="1">
+            <a:schemeClr val="accent1"/>
+          </a:effectRef>
+          <a:fontRef idx="minor">
+            <a:schemeClr val="tx1"/>
+          </a:fontRef>
+        </p:style>
+      </p:cxnSp>
+      <p:sp>
+        <p:nvSpPr>
+          <p:cNvPr id="74" name="円/楕円 73">
+            <a:extLst>
+              <a:ext uri="{FF2B5EF4-FFF2-40B4-BE49-F238E27FC236}">
+                <a16:creationId xmlns:a16="http://schemas.microsoft.com/office/drawing/2014/main" id="{D61CC909-D636-3B38-EBC3-2F9E8D89DB1A}"/>
+              </a:ext>
+            </a:extLst>
+          </p:cNvPr>
+          <p:cNvSpPr/>
+          <p:nvPr/>
+        </p:nvSpPr>
+        <p:spPr>
+          <a:xfrm rot="10800000">
+            <a:off x="7340865" y="2167276"/>
+            <a:ext cx="168339" cy="174795"/>
+          </a:xfrm>
+          <a:prstGeom prst="ellipse">
+            <a:avLst/>
+          </a:prstGeom>
+          <a:solidFill>
+            <a:schemeClr val="bg1"/>
+          </a:solidFill>
+          <a:ln>
+            <a:solidFill>
+              <a:schemeClr val="tx1"/>
+            </a:solidFill>
+          </a:ln>
+        </p:spPr>
+        <p:style>
+          <a:lnRef idx="2">
+            <a:schemeClr val="accent1">
+              <a:shade val="15000"/>
+            </a:schemeClr>
+          </a:lnRef>
+          <a:fillRef idx="1">
+            <a:schemeClr val="accent1"/>
+          </a:fillRef>
+          <a:effectRef idx="0">
+            <a:schemeClr val="accent1"/>
+          </a:effectRef>
+          <a:fontRef idx="minor">
+            <a:schemeClr val="lt1"/>
+          </a:fontRef>
+        </p:style>
+        <p:txBody>
+          <a:bodyPr rtlCol="0" anchor="ctr"/>
+          <a:lstStyle/>
+          <a:p>
+            <a:pPr algn="ctr"/>
+            <a:endParaRPr kumimoji="1" lang="ja-JP" altLang="en-US"/>
+          </a:p>
+        </p:txBody>
+      </p:sp>
+      <p:cxnSp>
+        <p:nvCxnSpPr>
+          <p:cNvPr id="78" name="カギ線コネクタ 77">
+            <a:extLst>
+              <a:ext uri="{FF2B5EF4-FFF2-40B4-BE49-F238E27FC236}">
+                <a16:creationId xmlns:a16="http://schemas.microsoft.com/office/drawing/2014/main" id="{67351AAB-E6DB-1258-E04E-58E2887DD7D5}"/>
+              </a:ext>
+            </a:extLst>
+          </p:cNvPr>
+          <p:cNvCxnSpPr>
+            <a:cxnSpLocks/>
+            <a:stCxn id="74" idx="0"/>
+            <a:endCxn id="62" idx="2"/>
+          </p:cNvCxnSpPr>
+          <p:nvPr/>
+        </p:nvCxnSpPr>
+        <p:spPr>
+          <a:xfrm rot="16200000" flipH="1">
+            <a:off x="7694202" y="2072902"/>
+            <a:ext cx="566826" cy="1105163"/>
+          </a:xfrm>
+          <a:prstGeom prst="bentConnector2">
+            <a:avLst/>
+          </a:prstGeom>
+          <a:ln w="63500">
+            <a:solidFill>
+              <a:schemeClr val="accent6"/>
+            </a:solidFill>
+            <a:prstDash val="sysDot"/>
+          </a:ln>
+        </p:spPr>
+        <p:style>
+          <a:lnRef idx="2">
+            <a:schemeClr val="accent1"/>
+          </a:lnRef>
+          <a:fillRef idx="0">
+            <a:schemeClr val="accent1"/>
+          </a:fillRef>
+          <a:effectRef idx="1">
+            <a:schemeClr val="accent1"/>
+          </a:effectRef>
+          <a:fontRef idx="minor">
+            <a:schemeClr val="tx1"/>
+          </a:fontRef>
+        </p:style>
+      </p:cxnSp>
+    </p:spTree>
+    <p:extLst>
+      <p:ext uri="{BB962C8B-B14F-4D97-AF65-F5344CB8AC3E}">
+        <p14:creationId xmlns:p14="http://schemas.microsoft.com/office/powerpoint/2010/main" val="1190295442"/>
+      </p:ext>
+    </p:extLst>
+  </p:cSld>
+  <p:clrMapOvr>
+    <a:masterClrMapping/>
+  </p:clrMapOvr>
+</p:sld>
+</file>
+
 <file path=ppt/theme/theme1.xml><?xml version="1.0" encoding="utf-8"?>
 <a:theme xmlns:a="http://schemas.openxmlformats.org/drawingml/2006/main" name="Office テーマ">
   <a:themeElements>

--- a/design.pptx
+++ b/design.pptx
@@ -8,6 +8,7 @@
     <p:sldId id="256" r:id="rId2"/>
     <p:sldId id="257" r:id="rId3"/>
     <p:sldId id="258" r:id="rId4"/>
+    <p:sldId id="259" r:id="rId5"/>
   </p:sldIdLst>
   <p:sldSz cx="12192000" cy="6858000"/>
   <p:notesSz cx="6858000" cy="9144000"/>
@@ -261,7 +262,7 @@
           <a:p>
             <a:fld id="{9D438905-DEFC-F846-8BB0-00C4187231C1}" type="datetimeFigureOut">
               <a:rPr kumimoji="1" lang="ja-JP" altLang="en-US" smtClean="0"/>
-              <a:t>2026/2/7</a:t>
+              <a:t>2026/2/14</a:t>
             </a:fld>
             <a:endParaRPr kumimoji="1" lang="ja-JP" altLang="en-US"/>
           </a:p>
@@ -491,7 +492,7 @@
           <a:p>
             <a:fld id="{9D438905-DEFC-F846-8BB0-00C4187231C1}" type="datetimeFigureOut">
               <a:rPr kumimoji="1" lang="ja-JP" altLang="en-US" smtClean="0"/>
-              <a:t>2026/2/7</a:t>
+              <a:t>2026/2/14</a:t>
             </a:fld>
             <a:endParaRPr kumimoji="1" lang="ja-JP" altLang="en-US"/>
           </a:p>
@@ -731,7 +732,7 @@
           <a:p>
             <a:fld id="{9D438905-DEFC-F846-8BB0-00C4187231C1}" type="datetimeFigureOut">
               <a:rPr kumimoji="1" lang="ja-JP" altLang="en-US" smtClean="0"/>
-              <a:t>2026/2/7</a:t>
+              <a:t>2026/2/14</a:t>
             </a:fld>
             <a:endParaRPr kumimoji="1" lang="ja-JP" altLang="en-US"/>
           </a:p>
@@ -961,7 +962,7 @@
           <a:p>
             <a:fld id="{9D438905-DEFC-F846-8BB0-00C4187231C1}" type="datetimeFigureOut">
               <a:rPr kumimoji="1" lang="ja-JP" altLang="en-US" smtClean="0"/>
-              <a:t>2026/2/7</a:t>
+              <a:t>2026/2/14</a:t>
             </a:fld>
             <a:endParaRPr kumimoji="1" lang="ja-JP" altLang="en-US"/>
           </a:p>
@@ -1236,7 +1237,7 @@
           <a:p>
             <a:fld id="{9D438905-DEFC-F846-8BB0-00C4187231C1}" type="datetimeFigureOut">
               <a:rPr kumimoji="1" lang="ja-JP" altLang="en-US" smtClean="0"/>
-              <a:t>2026/2/7</a:t>
+              <a:t>2026/2/14</a:t>
             </a:fld>
             <a:endParaRPr kumimoji="1" lang="ja-JP" altLang="en-US"/>
           </a:p>
@@ -1565,7 +1566,7 @@
           <a:p>
             <a:fld id="{9D438905-DEFC-F846-8BB0-00C4187231C1}" type="datetimeFigureOut">
               <a:rPr kumimoji="1" lang="ja-JP" altLang="en-US" smtClean="0"/>
-              <a:t>2026/2/7</a:t>
+              <a:t>2026/2/14</a:t>
             </a:fld>
             <a:endParaRPr kumimoji="1" lang="ja-JP" altLang="en-US"/>
           </a:p>
@@ -2041,7 +2042,7 @@
           <a:p>
             <a:fld id="{9D438905-DEFC-F846-8BB0-00C4187231C1}" type="datetimeFigureOut">
               <a:rPr kumimoji="1" lang="ja-JP" altLang="en-US" smtClean="0"/>
-              <a:t>2026/2/7</a:t>
+              <a:t>2026/2/14</a:t>
             </a:fld>
             <a:endParaRPr kumimoji="1" lang="ja-JP" altLang="en-US"/>
           </a:p>
@@ -2182,7 +2183,7 @@
           <a:p>
             <a:fld id="{9D438905-DEFC-F846-8BB0-00C4187231C1}" type="datetimeFigureOut">
               <a:rPr kumimoji="1" lang="ja-JP" altLang="en-US" smtClean="0"/>
-              <a:t>2026/2/7</a:t>
+              <a:t>2026/2/14</a:t>
             </a:fld>
             <a:endParaRPr kumimoji="1" lang="ja-JP" altLang="en-US"/>
           </a:p>
@@ -2295,7 +2296,7 @@
           <a:p>
             <a:fld id="{9D438905-DEFC-F846-8BB0-00C4187231C1}" type="datetimeFigureOut">
               <a:rPr kumimoji="1" lang="ja-JP" altLang="en-US" smtClean="0"/>
-              <a:t>2026/2/7</a:t>
+              <a:t>2026/2/14</a:t>
             </a:fld>
             <a:endParaRPr kumimoji="1" lang="ja-JP" altLang="en-US"/>
           </a:p>
@@ -2638,7 +2639,7 @@
           <a:p>
             <a:fld id="{9D438905-DEFC-F846-8BB0-00C4187231C1}" type="datetimeFigureOut">
               <a:rPr kumimoji="1" lang="ja-JP" altLang="en-US" smtClean="0"/>
-              <a:t>2026/2/7</a:t>
+              <a:t>2026/2/14</a:t>
             </a:fld>
             <a:endParaRPr kumimoji="1" lang="ja-JP" altLang="en-US"/>
           </a:p>
@@ -2926,7 +2927,7 @@
           <a:p>
             <a:fld id="{9D438905-DEFC-F846-8BB0-00C4187231C1}" type="datetimeFigureOut">
               <a:rPr kumimoji="1" lang="ja-JP" altLang="en-US" smtClean="0"/>
-              <a:t>2026/2/7</a:t>
+              <a:t>2026/2/14</a:t>
             </a:fld>
             <a:endParaRPr kumimoji="1" lang="ja-JP" altLang="en-US"/>
           </a:p>
@@ -3199,7 +3200,7 @@
           <a:p>
             <a:fld id="{9D438905-DEFC-F846-8BB0-00C4187231C1}" type="datetimeFigureOut">
               <a:rPr kumimoji="1" lang="ja-JP" altLang="en-US" smtClean="0"/>
-              <a:t>2026/2/7</a:t>
+              <a:t>2026/2/14</a:t>
             </a:fld>
             <a:endParaRPr kumimoji="1" lang="ja-JP" altLang="en-US"/>
           </a:p>
@@ -13791,6 +13792,3404 @@
 </p:sld>
 </file>
 
+<file path=ppt/slides/slide4.xml><?xml version="1.0" encoding="utf-8"?>
+<p:sld xmlns:a="http://schemas.openxmlformats.org/drawingml/2006/main" xmlns:r="http://schemas.openxmlformats.org/officeDocument/2006/relationships" xmlns:p="http://schemas.openxmlformats.org/presentationml/2006/main">
+  <p:cSld>
+    <p:spTree>
+      <p:nvGrpSpPr>
+        <p:cNvPr id="1" name="">
+          <a:extLst>
+            <a:ext uri="{FF2B5EF4-FFF2-40B4-BE49-F238E27FC236}">
+              <a16:creationId xmlns:a16="http://schemas.microsoft.com/office/drawing/2014/main" id="{7A15E9A9-23A6-FBB0-4664-96512233184D}"/>
+            </a:ext>
+          </a:extLst>
+        </p:cNvPr>
+        <p:cNvGrpSpPr/>
+        <p:nvPr/>
+      </p:nvGrpSpPr>
+      <p:grpSpPr>
+        <a:xfrm>
+          <a:off x="0" y="0"/>
+          <a:ext cx="0" cy="0"/>
+          <a:chOff x="0" y="0"/>
+          <a:chExt cx="0" cy="0"/>
+        </a:xfrm>
+      </p:grpSpPr>
+      <p:grpSp>
+        <p:nvGrpSpPr>
+          <p:cNvPr id="8" name="グループ化 7">
+            <a:extLst>
+              <a:ext uri="{FF2B5EF4-FFF2-40B4-BE49-F238E27FC236}">
+                <a16:creationId xmlns:a16="http://schemas.microsoft.com/office/drawing/2014/main" id="{13A7ED4E-DA93-68DA-E562-432A708A2DC5}"/>
+              </a:ext>
+            </a:extLst>
+          </p:cNvPr>
+          <p:cNvGrpSpPr/>
+          <p:nvPr/>
+        </p:nvGrpSpPr>
+        <p:grpSpPr>
+          <a:xfrm rot="16200000">
+            <a:off x="5240185" y="1047314"/>
+            <a:ext cx="3068080" cy="2117122"/>
+            <a:chOff x="4788081" y="486906"/>
+            <a:chExt cx="3068080" cy="2117122"/>
+          </a:xfrm>
+        </p:grpSpPr>
+        <p:pic>
+          <p:nvPicPr>
+            <p:cNvPr id="9" name="グラフィックス 8">
+              <a:extLst>
+                <a:ext uri="{FF2B5EF4-FFF2-40B4-BE49-F238E27FC236}">
+                  <a16:creationId xmlns:a16="http://schemas.microsoft.com/office/drawing/2014/main" id="{A4A55B3A-DFC8-A93A-A0FC-9B3E9A442F31}"/>
+                </a:ext>
+              </a:extLst>
+            </p:cNvPr>
+            <p:cNvPicPr>
+              <a:picLocks noChangeAspect="1"/>
+            </p:cNvPicPr>
+            <p:nvPr/>
+          </p:nvPicPr>
+          <p:blipFill>
+            <a:blip r:embed="rId2">
+              <a:extLst>
+                <a:ext uri="{96DAC541-7B7A-43D3-8B79-37D633B846F1}">
+                  <asvg:svgBlip xmlns:asvg="http://schemas.microsoft.com/office/drawing/2016/SVG/main" r:embed="rId3"/>
+                </a:ext>
+              </a:extLst>
+            </a:blip>
+            <a:srcRect l="23290" t="6158" r="61766"/>
+            <a:stretch/>
+          </p:blipFill>
+          <p:spPr>
+            <a:xfrm rot="16200000">
+              <a:off x="5263560" y="11427"/>
+              <a:ext cx="2117122" cy="3068080"/>
+            </a:xfrm>
+            <a:prstGeom prst="rect">
+              <a:avLst/>
+            </a:prstGeom>
+          </p:spPr>
+        </p:pic>
+        <p:sp>
+          <p:nvSpPr>
+            <p:cNvPr id="292" name="円/楕円 291">
+              <a:extLst>
+                <a:ext uri="{FF2B5EF4-FFF2-40B4-BE49-F238E27FC236}">
+                  <a16:creationId xmlns:a16="http://schemas.microsoft.com/office/drawing/2014/main" id="{4DBFD3E1-DA9E-ED55-A4DA-3A1C383C4FDB}"/>
+                </a:ext>
+              </a:extLst>
+            </p:cNvPr>
+            <p:cNvSpPr/>
+            <p:nvPr/>
+          </p:nvSpPr>
+          <p:spPr>
+            <a:xfrm rot="10800000">
+              <a:off x="6745011" y="690242"/>
+              <a:ext cx="168339" cy="174795"/>
+            </a:xfrm>
+            <a:prstGeom prst="ellipse">
+              <a:avLst/>
+            </a:prstGeom>
+            <a:solidFill>
+              <a:schemeClr val="bg1"/>
+            </a:solidFill>
+            <a:ln>
+              <a:solidFill>
+                <a:schemeClr val="tx1"/>
+              </a:solidFill>
+            </a:ln>
+          </p:spPr>
+          <p:style>
+            <a:lnRef idx="2">
+              <a:schemeClr val="accent1">
+                <a:shade val="15000"/>
+              </a:schemeClr>
+            </a:lnRef>
+            <a:fillRef idx="1">
+              <a:schemeClr val="accent1"/>
+            </a:fillRef>
+            <a:effectRef idx="0">
+              <a:schemeClr val="accent1"/>
+            </a:effectRef>
+            <a:fontRef idx="minor">
+              <a:schemeClr val="lt1"/>
+            </a:fontRef>
+          </p:style>
+          <p:txBody>
+            <a:bodyPr rtlCol="0" anchor="ctr"/>
+            <a:lstStyle/>
+            <a:p>
+              <a:pPr algn="ctr"/>
+              <a:endParaRPr kumimoji="1" lang="ja-JP" altLang="en-US"/>
+            </a:p>
+          </p:txBody>
+        </p:sp>
+        <p:sp>
+          <p:nvSpPr>
+            <p:cNvPr id="301" name="円/楕円 300">
+              <a:extLst>
+                <a:ext uri="{FF2B5EF4-FFF2-40B4-BE49-F238E27FC236}">
+                  <a16:creationId xmlns:a16="http://schemas.microsoft.com/office/drawing/2014/main" id="{E43C8210-F274-546C-DF76-6CBF7B812C97}"/>
+                </a:ext>
+              </a:extLst>
+            </p:cNvPr>
+            <p:cNvSpPr/>
+            <p:nvPr/>
+          </p:nvSpPr>
+          <p:spPr>
+            <a:xfrm rot="10800000">
+              <a:off x="7655564" y="692760"/>
+              <a:ext cx="168339" cy="174795"/>
+            </a:xfrm>
+            <a:prstGeom prst="ellipse">
+              <a:avLst/>
+            </a:prstGeom>
+            <a:solidFill>
+              <a:schemeClr val="bg1"/>
+            </a:solidFill>
+            <a:ln>
+              <a:solidFill>
+                <a:schemeClr val="tx1"/>
+              </a:solidFill>
+            </a:ln>
+          </p:spPr>
+          <p:style>
+            <a:lnRef idx="2">
+              <a:schemeClr val="accent1">
+                <a:shade val="15000"/>
+              </a:schemeClr>
+            </a:lnRef>
+            <a:fillRef idx="1">
+              <a:schemeClr val="accent1"/>
+            </a:fillRef>
+            <a:effectRef idx="0">
+              <a:schemeClr val="accent1"/>
+            </a:effectRef>
+            <a:fontRef idx="minor">
+              <a:schemeClr val="lt1"/>
+            </a:fontRef>
+          </p:style>
+          <p:txBody>
+            <a:bodyPr rtlCol="0" anchor="ctr"/>
+            <a:lstStyle/>
+            <a:p>
+              <a:pPr algn="ctr"/>
+              <a:endParaRPr kumimoji="1" lang="ja-JP" altLang="en-US"/>
+            </a:p>
+          </p:txBody>
+        </p:sp>
+        <p:sp>
+          <p:nvSpPr>
+            <p:cNvPr id="17" name="円/楕円 16">
+              <a:extLst>
+                <a:ext uri="{FF2B5EF4-FFF2-40B4-BE49-F238E27FC236}">
+                  <a16:creationId xmlns:a16="http://schemas.microsoft.com/office/drawing/2014/main" id="{B7D46076-28FE-2E32-2B17-E4F40C773AB3}"/>
+                </a:ext>
+              </a:extLst>
+            </p:cNvPr>
+            <p:cNvSpPr/>
+            <p:nvPr/>
+          </p:nvSpPr>
+          <p:spPr>
+            <a:xfrm rot="10800000">
+              <a:off x="4944033" y="684844"/>
+              <a:ext cx="168339" cy="174795"/>
+            </a:xfrm>
+            <a:prstGeom prst="ellipse">
+              <a:avLst/>
+            </a:prstGeom>
+            <a:solidFill>
+              <a:schemeClr val="bg1"/>
+            </a:solidFill>
+            <a:ln>
+              <a:solidFill>
+                <a:schemeClr val="tx1"/>
+              </a:solidFill>
+            </a:ln>
+          </p:spPr>
+          <p:style>
+            <a:lnRef idx="2">
+              <a:schemeClr val="accent1">
+                <a:shade val="15000"/>
+              </a:schemeClr>
+            </a:lnRef>
+            <a:fillRef idx="1">
+              <a:schemeClr val="accent1"/>
+            </a:fillRef>
+            <a:effectRef idx="0">
+              <a:schemeClr val="accent1"/>
+            </a:effectRef>
+            <a:fontRef idx="minor">
+              <a:schemeClr val="lt1"/>
+            </a:fontRef>
+          </p:style>
+          <p:txBody>
+            <a:bodyPr rtlCol="0" anchor="ctr"/>
+            <a:lstStyle/>
+            <a:p>
+              <a:pPr algn="ctr"/>
+              <a:endParaRPr kumimoji="1" lang="ja-JP" altLang="en-US"/>
+            </a:p>
+          </p:txBody>
+        </p:sp>
+        <p:sp>
+          <p:nvSpPr>
+            <p:cNvPr id="21" name="円/楕円 20">
+              <a:extLst>
+                <a:ext uri="{FF2B5EF4-FFF2-40B4-BE49-F238E27FC236}">
+                  <a16:creationId xmlns:a16="http://schemas.microsoft.com/office/drawing/2014/main" id="{74E1ADB9-AF62-75C7-1AF9-BBB7C55E2A8C}"/>
+                </a:ext>
+              </a:extLst>
+            </p:cNvPr>
+            <p:cNvSpPr/>
+            <p:nvPr/>
+          </p:nvSpPr>
+          <p:spPr>
+            <a:xfrm rot="10800000">
+              <a:off x="4930176" y="2194990"/>
+              <a:ext cx="168339" cy="174795"/>
+            </a:xfrm>
+            <a:prstGeom prst="ellipse">
+              <a:avLst/>
+            </a:prstGeom>
+            <a:solidFill>
+              <a:schemeClr val="bg1"/>
+            </a:solidFill>
+            <a:ln>
+              <a:solidFill>
+                <a:schemeClr val="tx1"/>
+              </a:solidFill>
+            </a:ln>
+          </p:spPr>
+          <p:style>
+            <a:lnRef idx="2">
+              <a:schemeClr val="accent1">
+                <a:shade val="15000"/>
+              </a:schemeClr>
+            </a:lnRef>
+            <a:fillRef idx="1">
+              <a:schemeClr val="accent1"/>
+            </a:fillRef>
+            <a:effectRef idx="0">
+              <a:schemeClr val="accent1"/>
+            </a:effectRef>
+            <a:fontRef idx="minor">
+              <a:schemeClr val="lt1"/>
+            </a:fontRef>
+          </p:style>
+          <p:txBody>
+            <a:bodyPr rtlCol="0" anchor="ctr"/>
+            <a:lstStyle/>
+            <a:p>
+              <a:pPr algn="ctr"/>
+              <a:endParaRPr kumimoji="1" lang="ja-JP" altLang="en-US"/>
+            </a:p>
+          </p:txBody>
+        </p:sp>
+        <p:sp>
+          <p:nvSpPr>
+            <p:cNvPr id="53" name="円/楕円 52">
+              <a:extLst>
+                <a:ext uri="{FF2B5EF4-FFF2-40B4-BE49-F238E27FC236}">
+                  <a16:creationId xmlns:a16="http://schemas.microsoft.com/office/drawing/2014/main" id="{DF2EEB4C-9493-CEA9-7BE5-571CDF8E0055}"/>
+                </a:ext>
+              </a:extLst>
+            </p:cNvPr>
+            <p:cNvSpPr/>
+            <p:nvPr/>
+          </p:nvSpPr>
+          <p:spPr>
+            <a:xfrm rot="10800000">
+              <a:off x="5830721" y="2196969"/>
+              <a:ext cx="168339" cy="174795"/>
+            </a:xfrm>
+            <a:prstGeom prst="ellipse">
+              <a:avLst/>
+            </a:prstGeom>
+            <a:solidFill>
+              <a:schemeClr val="bg1"/>
+            </a:solidFill>
+            <a:ln>
+              <a:solidFill>
+                <a:schemeClr val="tx1"/>
+              </a:solidFill>
+            </a:ln>
+          </p:spPr>
+          <p:style>
+            <a:lnRef idx="2">
+              <a:schemeClr val="accent1">
+                <a:shade val="15000"/>
+              </a:schemeClr>
+            </a:lnRef>
+            <a:fillRef idx="1">
+              <a:schemeClr val="accent1"/>
+            </a:fillRef>
+            <a:effectRef idx="0">
+              <a:schemeClr val="accent1"/>
+            </a:effectRef>
+            <a:fontRef idx="minor">
+              <a:schemeClr val="lt1"/>
+            </a:fontRef>
+          </p:style>
+          <p:txBody>
+            <a:bodyPr rtlCol="0" anchor="ctr"/>
+            <a:lstStyle/>
+            <a:p>
+              <a:pPr algn="ctr"/>
+              <a:endParaRPr kumimoji="1" lang="ja-JP" altLang="en-US"/>
+            </a:p>
+          </p:txBody>
+        </p:sp>
+        <p:sp>
+          <p:nvSpPr>
+            <p:cNvPr id="70" name="円/楕円 69">
+              <a:extLst>
+                <a:ext uri="{FF2B5EF4-FFF2-40B4-BE49-F238E27FC236}">
+                  <a16:creationId xmlns:a16="http://schemas.microsoft.com/office/drawing/2014/main" id="{57DF0929-F8E0-7315-DAD9-B08042DBEEE5}"/>
+                </a:ext>
+              </a:extLst>
+            </p:cNvPr>
+            <p:cNvSpPr/>
+            <p:nvPr/>
+          </p:nvSpPr>
+          <p:spPr>
+            <a:xfrm rot="10800000">
+              <a:off x="6147400" y="2189049"/>
+              <a:ext cx="168339" cy="174795"/>
+            </a:xfrm>
+            <a:prstGeom prst="ellipse">
+              <a:avLst/>
+            </a:prstGeom>
+            <a:solidFill>
+              <a:schemeClr val="bg1"/>
+            </a:solidFill>
+            <a:ln>
+              <a:solidFill>
+                <a:schemeClr val="tx1"/>
+              </a:solidFill>
+            </a:ln>
+          </p:spPr>
+          <p:style>
+            <a:lnRef idx="2">
+              <a:schemeClr val="accent1">
+                <a:shade val="15000"/>
+              </a:schemeClr>
+            </a:lnRef>
+            <a:fillRef idx="1">
+              <a:schemeClr val="accent1"/>
+            </a:fillRef>
+            <a:effectRef idx="0">
+              <a:schemeClr val="accent1"/>
+            </a:effectRef>
+            <a:fontRef idx="minor">
+              <a:schemeClr val="lt1"/>
+            </a:fontRef>
+          </p:style>
+          <p:txBody>
+            <a:bodyPr rtlCol="0" anchor="ctr"/>
+            <a:lstStyle/>
+            <a:p>
+              <a:pPr algn="ctr"/>
+              <a:endParaRPr kumimoji="1" lang="ja-JP" altLang="en-US"/>
+            </a:p>
+          </p:txBody>
+        </p:sp>
+        <p:sp>
+          <p:nvSpPr>
+            <p:cNvPr id="80" name="円/楕円 79">
+              <a:extLst>
+                <a:ext uri="{FF2B5EF4-FFF2-40B4-BE49-F238E27FC236}">
+                  <a16:creationId xmlns:a16="http://schemas.microsoft.com/office/drawing/2014/main" id="{2A7AEA1A-C106-EC73-4BCA-AFA03023562F}"/>
+                </a:ext>
+              </a:extLst>
+            </p:cNvPr>
+            <p:cNvSpPr/>
+            <p:nvPr/>
+          </p:nvSpPr>
+          <p:spPr>
+            <a:xfrm rot="10800000">
+              <a:off x="6751059" y="2191027"/>
+              <a:ext cx="168339" cy="174795"/>
+            </a:xfrm>
+            <a:prstGeom prst="ellipse">
+              <a:avLst/>
+            </a:prstGeom>
+            <a:solidFill>
+              <a:schemeClr val="bg1"/>
+            </a:solidFill>
+            <a:ln>
+              <a:solidFill>
+                <a:schemeClr val="tx1"/>
+              </a:solidFill>
+            </a:ln>
+          </p:spPr>
+          <p:style>
+            <a:lnRef idx="2">
+              <a:schemeClr val="accent1">
+                <a:shade val="15000"/>
+              </a:schemeClr>
+            </a:lnRef>
+            <a:fillRef idx="1">
+              <a:schemeClr val="accent1"/>
+            </a:fillRef>
+            <a:effectRef idx="0">
+              <a:schemeClr val="accent1"/>
+            </a:effectRef>
+            <a:fontRef idx="minor">
+              <a:schemeClr val="lt1"/>
+            </a:fontRef>
+          </p:style>
+          <p:txBody>
+            <a:bodyPr rtlCol="0" anchor="ctr"/>
+            <a:lstStyle/>
+            <a:p>
+              <a:pPr algn="ctr"/>
+              <a:endParaRPr kumimoji="1" lang="ja-JP" altLang="en-US"/>
+            </a:p>
+          </p:txBody>
+        </p:sp>
+        <p:sp>
+          <p:nvSpPr>
+            <p:cNvPr id="95" name="円/楕円 94">
+              <a:extLst>
+                <a:ext uri="{FF2B5EF4-FFF2-40B4-BE49-F238E27FC236}">
+                  <a16:creationId xmlns:a16="http://schemas.microsoft.com/office/drawing/2014/main" id="{58BA2874-D6DE-AAFB-6FE4-CDE982F75C71}"/>
+                </a:ext>
+              </a:extLst>
+            </p:cNvPr>
+            <p:cNvSpPr/>
+            <p:nvPr/>
+          </p:nvSpPr>
+          <p:spPr>
+            <a:xfrm rot="10800000">
+              <a:off x="7045962" y="2193006"/>
+              <a:ext cx="168339" cy="174795"/>
+            </a:xfrm>
+            <a:prstGeom prst="ellipse">
+              <a:avLst/>
+            </a:prstGeom>
+            <a:solidFill>
+              <a:schemeClr val="bg1"/>
+            </a:solidFill>
+            <a:ln>
+              <a:solidFill>
+                <a:schemeClr val="tx1"/>
+              </a:solidFill>
+            </a:ln>
+          </p:spPr>
+          <p:style>
+            <a:lnRef idx="2">
+              <a:schemeClr val="accent1">
+                <a:shade val="15000"/>
+              </a:schemeClr>
+            </a:lnRef>
+            <a:fillRef idx="1">
+              <a:schemeClr val="accent1"/>
+            </a:fillRef>
+            <a:effectRef idx="0">
+              <a:schemeClr val="accent1"/>
+            </a:effectRef>
+            <a:fontRef idx="minor">
+              <a:schemeClr val="lt1"/>
+            </a:fontRef>
+          </p:style>
+          <p:txBody>
+            <a:bodyPr rtlCol="0" anchor="ctr"/>
+            <a:lstStyle/>
+            <a:p>
+              <a:pPr algn="ctr"/>
+              <a:endParaRPr kumimoji="1" lang="ja-JP" altLang="en-US"/>
+            </a:p>
+          </p:txBody>
+        </p:sp>
+        <p:sp>
+          <p:nvSpPr>
+            <p:cNvPr id="101" name="円/楕円 100">
+              <a:extLst>
+                <a:ext uri="{FF2B5EF4-FFF2-40B4-BE49-F238E27FC236}">
+                  <a16:creationId xmlns:a16="http://schemas.microsoft.com/office/drawing/2014/main" id="{566BDA0B-D74D-0079-7B19-7E18395C3992}"/>
+                </a:ext>
+              </a:extLst>
+            </p:cNvPr>
+            <p:cNvSpPr/>
+            <p:nvPr/>
+          </p:nvSpPr>
+          <p:spPr>
+            <a:xfrm rot="10800000">
+              <a:off x="7348673" y="680347"/>
+              <a:ext cx="168339" cy="174795"/>
+            </a:xfrm>
+            <a:prstGeom prst="ellipse">
+              <a:avLst/>
+            </a:prstGeom>
+            <a:solidFill>
+              <a:schemeClr val="bg1"/>
+            </a:solidFill>
+            <a:ln>
+              <a:solidFill>
+                <a:schemeClr val="tx1"/>
+              </a:solidFill>
+            </a:ln>
+          </p:spPr>
+          <p:style>
+            <a:lnRef idx="2">
+              <a:schemeClr val="accent1">
+                <a:shade val="15000"/>
+              </a:schemeClr>
+            </a:lnRef>
+            <a:fillRef idx="1">
+              <a:schemeClr val="accent1"/>
+            </a:fillRef>
+            <a:effectRef idx="0">
+              <a:schemeClr val="accent1"/>
+            </a:effectRef>
+            <a:fontRef idx="minor">
+              <a:schemeClr val="lt1"/>
+            </a:fontRef>
+          </p:style>
+          <p:txBody>
+            <a:bodyPr rtlCol="0" anchor="ctr"/>
+            <a:lstStyle/>
+            <a:p>
+              <a:pPr algn="ctr"/>
+              <a:endParaRPr kumimoji="1" lang="ja-JP" altLang="en-US"/>
+            </a:p>
+          </p:txBody>
+        </p:sp>
+        <p:sp>
+          <p:nvSpPr>
+            <p:cNvPr id="74" name="円/楕円 73">
+              <a:extLst>
+                <a:ext uri="{FF2B5EF4-FFF2-40B4-BE49-F238E27FC236}">
+                  <a16:creationId xmlns:a16="http://schemas.microsoft.com/office/drawing/2014/main" id="{9C87612A-5A00-C2CA-199A-DBFC287D9425}"/>
+                </a:ext>
+              </a:extLst>
+            </p:cNvPr>
+            <p:cNvSpPr/>
+            <p:nvPr/>
+          </p:nvSpPr>
+          <p:spPr>
+            <a:xfrm rot="10800000">
+              <a:off x="7340865" y="2167276"/>
+              <a:ext cx="168339" cy="174795"/>
+            </a:xfrm>
+            <a:prstGeom prst="ellipse">
+              <a:avLst/>
+            </a:prstGeom>
+            <a:solidFill>
+              <a:schemeClr val="bg1"/>
+            </a:solidFill>
+            <a:ln>
+              <a:solidFill>
+                <a:schemeClr val="tx1"/>
+              </a:solidFill>
+            </a:ln>
+          </p:spPr>
+          <p:style>
+            <a:lnRef idx="2">
+              <a:schemeClr val="accent1">
+                <a:shade val="15000"/>
+              </a:schemeClr>
+            </a:lnRef>
+            <a:fillRef idx="1">
+              <a:schemeClr val="accent1"/>
+            </a:fillRef>
+            <a:effectRef idx="0">
+              <a:schemeClr val="accent1"/>
+            </a:effectRef>
+            <a:fontRef idx="minor">
+              <a:schemeClr val="lt1"/>
+            </a:fontRef>
+          </p:style>
+          <p:txBody>
+            <a:bodyPr rtlCol="0" anchor="ctr"/>
+            <a:lstStyle/>
+            <a:p>
+              <a:pPr algn="ctr"/>
+              <a:endParaRPr kumimoji="1" lang="ja-JP" altLang="en-US"/>
+            </a:p>
+          </p:txBody>
+        </p:sp>
+      </p:grpSp>
+      <p:cxnSp>
+        <p:nvCxnSpPr>
+          <p:cNvPr id="109" name="カギ線コネクタ 108">
+            <a:extLst>
+              <a:ext uri="{FF2B5EF4-FFF2-40B4-BE49-F238E27FC236}">
+                <a16:creationId xmlns:a16="http://schemas.microsoft.com/office/drawing/2014/main" id="{6F20B225-D03F-966E-7ABC-52E8A997045F}"/>
+              </a:ext>
+            </a:extLst>
+          </p:cNvPr>
+          <p:cNvCxnSpPr>
+            <a:cxnSpLocks/>
+            <a:stCxn id="292" idx="0"/>
+            <a:endCxn id="22" idx="4"/>
+          </p:cNvCxnSpPr>
+          <p:nvPr/>
+        </p:nvCxnSpPr>
+        <p:spPr>
+          <a:xfrm flipV="1">
+            <a:off x="6093795" y="588813"/>
+            <a:ext cx="600006" cy="1010003"/>
+          </a:xfrm>
+          <a:prstGeom prst="bentConnector2">
+            <a:avLst/>
+          </a:prstGeom>
+          <a:ln w="63500">
+            <a:solidFill>
+              <a:schemeClr val="tx1">
+                <a:lumMod val="50000"/>
+                <a:lumOff val="50000"/>
+              </a:schemeClr>
+            </a:solidFill>
+            <a:prstDash val="sysDot"/>
+          </a:ln>
+        </p:spPr>
+        <p:style>
+          <a:lnRef idx="2">
+            <a:schemeClr val="accent1"/>
+          </a:lnRef>
+          <a:fillRef idx="0">
+            <a:schemeClr val="accent1"/>
+          </a:fillRef>
+          <a:effectRef idx="1">
+            <a:schemeClr val="accent1"/>
+          </a:effectRef>
+          <a:fontRef idx="minor">
+            <a:schemeClr val="tx1"/>
+          </a:fontRef>
+        </p:style>
+      </p:cxnSp>
+      <p:grpSp>
+        <p:nvGrpSpPr>
+          <p:cNvPr id="2" name="グループ化 1">
+            <a:extLst>
+              <a:ext uri="{FF2B5EF4-FFF2-40B4-BE49-F238E27FC236}">
+                <a16:creationId xmlns:a16="http://schemas.microsoft.com/office/drawing/2014/main" id="{F3811D32-3DAC-1202-7D2A-0862888F0B4B}"/>
+              </a:ext>
+            </a:extLst>
+          </p:cNvPr>
+          <p:cNvGrpSpPr/>
+          <p:nvPr/>
+        </p:nvGrpSpPr>
+        <p:grpSpPr>
+          <a:xfrm rot="10800000">
+            <a:off x="3320481" y="1642655"/>
+            <a:ext cx="2117123" cy="2527341"/>
+            <a:chOff x="4742379" y="2860296"/>
+            <a:chExt cx="2117123" cy="2527341"/>
+          </a:xfrm>
+        </p:grpSpPr>
+        <p:sp>
+          <p:nvSpPr>
+            <p:cNvPr id="227" name="左中かっこ 226">
+              <a:extLst>
+                <a:ext uri="{FF2B5EF4-FFF2-40B4-BE49-F238E27FC236}">
+                  <a16:creationId xmlns:a16="http://schemas.microsoft.com/office/drawing/2014/main" id="{9F359065-A89F-88BD-4EB9-BBD923C96C37}"/>
+                </a:ext>
+              </a:extLst>
+            </p:cNvPr>
+            <p:cNvSpPr/>
+            <p:nvPr/>
+          </p:nvSpPr>
+          <p:spPr>
+            <a:xfrm rot="16200000">
+              <a:off x="5248424" y="4793376"/>
+              <a:ext cx="282897" cy="905626"/>
+            </a:xfrm>
+            <a:prstGeom prst="leftBrace">
+              <a:avLst/>
+            </a:prstGeom>
+          </p:spPr>
+          <p:style>
+            <a:lnRef idx="2">
+              <a:schemeClr val="accent1"/>
+            </a:lnRef>
+            <a:fillRef idx="0">
+              <a:schemeClr val="accent1"/>
+            </a:fillRef>
+            <a:effectRef idx="1">
+              <a:schemeClr val="accent1"/>
+            </a:effectRef>
+            <a:fontRef idx="minor">
+              <a:schemeClr val="tx1"/>
+            </a:fontRef>
+          </p:style>
+          <p:txBody>
+            <a:bodyPr rtlCol="0" anchor="ctr"/>
+            <a:lstStyle/>
+            <a:p>
+              <a:pPr algn="ctr"/>
+              <a:endParaRPr kumimoji="1" lang="ja-JP" altLang="en-US"/>
+            </a:p>
+          </p:txBody>
+        </p:sp>
+        <p:pic>
+          <p:nvPicPr>
+            <p:cNvPr id="7" name="図 6" descr="ダイアグラム, 概略図&#10;&#10;AI によって生成されたコンテンツは間違っている可能性があります。">
+              <a:extLst>
+                <a:ext uri="{FF2B5EF4-FFF2-40B4-BE49-F238E27FC236}">
+                  <a16:creationId xmlns:a16="http://schemas.microsoft.com/office/drawing/2014/main" id="{FA6AFCEA-88F1-9C9D-6D37-F90EA4B34AE7}"/>
+                </a:ext>
+              </a:extLst>
+            </p:cNvPr>
+            <p:cNvPicPr>
+              <a:picLocks noChangeAspect="1"/>
+            </p:cNvPicPr>
+            <p:nvPr/>
+          </p:nvPicPr>
+          <p:blipFill>
+            <a:blip r:embed="rId4"/>
+            <a:stretch>
+              <a:fillRect/>
+            </a:stretch>
+          </p:blipFill>
+          <p:spPr>
+            <a:xfrm rot="10800000">
+              <a:off x="4742379" y="2860296"/>
+              <a:ext cx="2117123" cy="2387558"/>
+            </a:xfrm>
+            <a:prstGeom prst="rect">
+              <a:avLst/>
+            </a:prstGeom>
+          </p:spPr>
+        </p:pic>
+        <p:cxnSp>
+          <p:nvCxnSpPr>
+            <p:cNvPr id="26" name="カギ線コネクタ 25">
+              <a:extLst>
+                <a:ext uri="{FF2B5EF4-FFF2-40B4-BE49-F238E27FC236}">
+                  <a16:creationId xmlns:a16="http://schemas.microsoft.com/office/drawing/2014/main" id="{52F70EC6-638A-C2A1-6A83-F579868433C6}"/>
+                </a:ext>
+              </a:extLst>
+            </p:cNvPr>
+            <p:cNvCxnSpPr>
+              <a:cxnSpLocks/>
+              <a:endCxn id="36" idx="2"/>
+            </p:cNvCxnSpPr>
+            <p:nvPr/>
+          </p:nvCxnSpPr>
+          <p:spPr>
+            <a:xfrm rot="10800000" flipV="1">
+              <a:off x="5243000" y="3617666"/>
+              <a:ext cx="858630" cy="634043"/>
+            </a:xfrm>
+            <a:prstGeom prst="bentConnector3">
+              <a:avLst>
+                <a:gd name="adj1" fmla="val 50000"/>
+              </a:avLst>
+            </a:prstGeom>
+            <a:ln w="63500">
+              <a:solidFill>
+                <a:schemeClr val="tx1">
+                  <a:lumMod val="50000"/>
+                  <a:lumOff val="50000"/>
+                </a:schemeClr>
+              </a:solidFill>
+              <a:prstDash val="sysDot"/>
+            </a:ln>
+          </p:spPr>
+          <p:style>
+            <a:lnRef idx="2">
+              <a:schemeClr val="accent1"/>
+            </a:lnRef>
+            <a:fillRef idx="0">
+              <a:schemeClr val="accent1"/>
+            </a:fillRef>
+            <a:effectRef idx="1">
+              <a:schemeClr val="accent1"/>
+            </a:effectRef>
+            <a:fontRef idx="minor">
+              <a:schemeClr val="tx1"/>
+            </a:fontRef>
+          </p:style>
+        </p:cxnSp>
+        <p:sp>
+          <p:nvSpPr>
+            <p:cNvPr id="302" name="円/楕円 301">
+              <a:extLst>
+                <a:ext uri="{FF2B5EF4-FFF2-40B4-BE49-F238E27FC236}">
+                  <a16:creationId xmlns:a16="http://schemas.microsoft.com/office/drawing/2014/main" id="{112F4234-71D8-478E-E315-609033F0A880}"/>
+                </a:ext>
+              </a:extLst>
+            </p:cNvPr>
+            <p:cNvSpPr/>
+            <p:nvPr/>
+          </p:nvSpPr>
+          <p:spPr>
+            <a:xfrm rot="10800000">
+              <a:off x="6022484" y="3854831"/>
+              <a:ext cx="168339" cy="174795"/>
+            </a:xfrm>
+            <a:prstGeom prst="ellipse">
+              <a:avLst/>
+            </a:prstGeom>
+            <a:solidFill>
+              <a:schemeClr val="bg1"/>
+            </a:solidFill>
+            <a:ln>
+              <a:solidFill>
+                <a:schemeClr val="tx1"/>
+              </a:solidFill>
+            </a:ln>
+          </p:spPr>
+          <p:style>
+            <a:lnRef idx="2">
+              <a:schemeClr val="accent1">
+                <a:shade val="15000"/>
+              </a:schemeClr>
+            </a:lnRef>
+            <a:fillRef idx="1">
+              <a:schemeClr val="accent1"/>
+            </a:fillRef>
+            <a:effectRef idx="0">
+              <a:schemeClr val="accent1"/>
+            </a:effectRef>
+            <a:fontRef idx="minor">
+              <a:schemeClr val="lt1"/>
+            </a:fontRef>
+          </p:style>
+          <p:txBody>
+            <a:bodyPr rtlCol="0" anchor="ctr"/>
+            <a:lstStyle/>
+            <a:p>
+              <a:pPr algn="ctr"/>
+              <a:endParaRPr kumimoji="1" lang="ja-JP" altLang="en-US"/>
+            </a:p>
+          </p:txBody>
+        </p:sp>
+        <p:sp>
+          <p:nvSpPr>
+            <p:cNvPr id="13" name="円/楕円 12">
+              <a:extLst>
+                <a:ext uri="{FF2B5EF4-FFF2-40B4-BE49-F238E27FC236}">
+                  <a16:creationId xmlns:a16="http://schemas.microsoft.com/office/drawing/2014/main" id="{4C70BD3A-CA85-7EA8-543D-88C12DDD0143}"/>
+                </a:ext>
+              </a:extLst>
+            </p:cNvPr>
+            <p:cNvSpPr/>
+            <p:nvPr/>
+          </p:nvSpPr>
+          <p:spPr>
+            <a:xfrm rot="10800000">
+              <a:off x="5076640" y="3532941"/>
+              <a:ext cx="168339" cy="174795"/>
+            </a:xfrm>
+            <a:prstGeom prst="ellipse">
+              <a:avLst/>
+            </a:prstGeom>
+            <a:solidFill>
+              <a:schemeClr val="bg1"/>
+            </a:solidFill>
+            <a:ln>
+              <a:solidFill>
+                <a:schemeClr val="tx1"/>
+              </a:solidFill>
+            </a:ln>
+          </p:spPr>
+          <p:style>
+            <a:lnRef idx="2">
+              <a:schemeClr val="accent1">
+                <a:shade val="15000"/>
+              </a:schemeClr>
+            </a:lnRef>
+            <a:fillRef idx="1">
+              <a:schemeClr val="accent1"/>
+            </a:fillRef>
+            <a:effectRef idx="0">
+              <a:schemeClr val="accent1"/>
+            </a:effectRef>
+            <a:fontRef idx="minor">
+              <a:schemeClr val="lt1"/>
+            </a:fontRef>
+          </p:style>
+          <p:txBody>
+            <a:bodyPr rtlCol="0" anchor="ctr"/>
+            <a:lstStyle/>
+            <a:p>
+              <a:pPr algn="ctr"/>
+              <a:endParaRPr kumimoji="1" lang="ja-JP" altLang="en-US"/>
+            </a:p>
+          </p:txBody>
+        </p:sp>
+        <p:sp>
+          <p:nvSpPr>
+            <p:cNvPr id="20" name="円/楕円 19">
+              <a:extLst>
+                <a:ext uri="{FF2B5EF4-FFF2-40B4-BE49-F238E27FC236}">
+                  <a16:creationId xmlns:a16="http://schemas.microsoft.com/office/drawing/2014/main" id="{BAC35295-F138-CAE5-15E3-39AA1680C898}"/>
+                </a:ext>
+              </a:extLst>
+            </p:cNvPr>
+            <p:cNvSpPr/>
+            <p:nvPr/>
+          </p:nvSpPr>
+          <p:spPr>
+            <a:xfrm rot="10800000">
+              <a:off x="5086536" y="3214287"/>
+              <a:ext cx="168339" cy="174795"/>
+            </a:xfrm>
+            <a:prstGeom prst="ellipse">
+              <a:avLst/>
+            </a:prstGeom>
+            <a:solidFill>
+              <a:schemeClr val="bg1"/>
+            </a:solidFill>
+            <a:ln>
+              <a:solidFill>
+                <a:schemeClr val="tx1"/>
+              </a:solidFill>
+            </a:ln>
+          </p:spPr>
+          <p:style>
+            <a:lnRef idx="2">
+              <a:schemeClr val="accent1">
+                <a:shade val="15000"/>
+              </a:schemeClr>
+            </a:lnRef>
+            <a:fillRef idx="1">
+              <a:schemeClr val="accent1"/>
+            </a:fillRef>
+            <a:effectRef idx="0">
+              <a:schemeClr val="accent1"/>
+            </a:effectRef>
+            <a:fontRef idx="minor">
+              <a:schemeClr val="lt1"/>
+            </a:fontRef>
+          </p:style>
+          <p:txBody>
+            <a:bodyPr rtlCol="0" anchor="ctr"/>
+            <a:lstStyle/>
+            <a:p>
+              <a:pPr algn="ctr"/>
+              <a:endParaRPr kumimoji="1" lang="ja-JP" altLang="en-US"/>
+            </a:p>
+          </p:txBody>
+        </p:sp>
+        <p:sp>
+          <p:nvSpPr>
+            <p:cNvPr id="28" name="円/楕円 27">
+              <a:extLst>
+                <a:ext uri="{FF2B5EF4-FFF2-40B4-BE49-F238E27FC236}">
+                  <a16:creationId xmlns:a16="http://schemas.microsoft.com/office/drawing/2014/main" id="{B50DA537-EE25-FCA0-B8D9-7F4CEA143662}"/>
+                </a:ext>
+              </a:extLst>
+            </p:cNvPr>
+            <p:cNvSpPr/>
+            <p:nvPr/>
+          </p:nvSpPr>
+          <p:spPr>
+            <a:xfrm rot="10800000">
+              <a:off x="6022707" y="4154414"/>
+              <a:ext cx="168339" cy="174795"/>
+            </a:xfrm>
+            <a:prstGeom prst="ellipse">
+              <a:avLst/>
+            </a:prstGeom>
+            <a:solidFill>
+              <a:schemeClr val="bg1"/>
+            </a:solidFill>
+            <a:ln>
+              <a:solidFill>
+                <a:schemeClr val="tx1"/>
+              </a:solidFill>
+            </a:ln>
+          </p:spPr>
+          <p:style>
+            <a:lnRef idx="2">
+              <a:schemeClr val="accent1">
+                <a:shade val="15000"/>
+              </a:schemeClr>
+            </a:lnRef>
+            <a:fillRef idx="1">
+              <a:schemeClr val="accent1"/>
+            </a:fillRef>
+            <a:effectRef idx="0">
+              <a:schemeClr val="accent1"/>
+            </a:effectRef>
+            <a:fontRef idx="minor">
+              <a:schemeClr val="lt1"/>
+            </a:fontRef>
+          </p:style>
+          <p:txBody>
+            <a:bodyPr rtlCol="0" anchor="ctr"/>
+            <a:lstStyle/>
+            <a:p>
+              <a:pPr algn="ctr"/>
+              <a:endParaRPr kumimoji="1" lang="ja-JP" altLang="en-US"/>
+            </a:p>
+          </p:txBody>
+        </p:sp>
+        <p:sp>
+          <p:nvSpPr>
+            <p:cNvPr id="30" name="円/楕円 29">
+              <a:extLst>
+                <a:ext uri="{FF2B5EF4-FFF2-40B4-BE49-F238E27FC236}">
+                  <a16:creationId xmlns:a16="http://schemas.microsoft.com/office/drawing/2014/main" id="{11357DC4-D384-FE22-AF96-31559E62160F}"/>
+                </a:ext>
+              </a:extLst>
+            </p:cNvPr>
+            <p:cNvSpPr/>
+            <p:nvPr/>
+          </p:nvSpPr>
+          <p:spPr>
+            <a:xfrm rot="10800000">
+              <a:off x="6020729" y="3206368"/>
+              <a:ext cx="168339" cy="174795"/>
+            </a:xfrm>
+            <a:prstGeom prst="ellipse">
+              <a:avLst/>
+            </a:prstGeom>
+            <a:solidFill>
+              <a:schemeClr val="bg1"/>
+            </a:solidFill>
+            <a:ln>
+              <a:solidFill>
+                <a:schemeClr val="tx1"/>
+              </a:solidFill>
+            </a:ln>
+          </p:spPr>
+          <p:style>
+            <a:lnRef idx="2">
+              <a:schemeClr val="accent1">
+                <a:shade val="15000"/>
+              </a:schemeClr>
+            </a:lnRef>
+            <a:fillRef idx="1">
+              <a:schemeClr val="accent1"/>
+            </a:fillRef>
+            <a:effectRef idx="0">
+              <a:schemeClr val="accent1"/>
+            </a:effectRef>
+            <a:fontRef idx="minor">
+              <a:schemeClr val="lt1"/>
+            </a:fontRef>
+          </p:style>
+          <p:txBody>
+            <a:bodyPr rtlCol="0" anchor="ctr"/>
+            <a:lstStyle/>
+            <a:p>
+              <a:pPr algn="ctr"/>
+              <a:endParaRPr kumimoji="1" lang="ja-JP" altLang="en-US"/>
+            </a:p>
+          </p:txBody>
+        </p:sp>
+        <p:sp>
+          <p:nvSpPr>
+            <p:cNvPr id="36" name="円/楕円 35">
+              <a:extLst>
+                <a:ext uri="{FF2B5EF4-FFF2-40B4-BE49-F238E27FC236}">
+                  <a16:creationId xmlns:a16="http://schemas.microsoft.com/office/drawing/2014/main" id="{5E0E293C-115D-AC3D-841A-E7F517AE377F}"/>
+                </a:ext>
+              </a:extLst>
+            </p:cNvPr>
+            <p:cNvSpPr/>
+            <p:nvPr/>
+          </p:nvSpPr>
+          <p:spPr>
+            <a:xfrm rot="10800000">
+              <a:off x="5074662" y="4164313"/>
+              <a:ext cx="168339" cy="174795"/>
+            </a:xfrm>
+            <a:prstGeom prst="ellipse">
+              <a:avLst/>
+            </a:prstGeom>
+            <a:solidFill>
+              <a:schemeClr val="bg1"/>
+            </a:solidFill>
+            <a:ln>
+              <a:solidFill>
+                <a:schemeClr val="tx1"/>
+              </a:solidFill>
+            </a:ln>
+          </p:spPr>
+          <p:style>
+            <a:lnRef idx="2">
+              <a:schemeClr val="accent1">
+                <a:shade val="15000"/>
+              </a:schemeClr>
+            </a:lnRef>
+            <a:fillRef idx="1">
+              <a:schemeClr val="accent1"/>
+            </a:fillRef>
+            <a:effectRef idx="0">
+              <a:schemeClr val="accent1"/>
+            </a:effectRef>
+            <a:fontRef idx="minor">
+              <a:schemeClr val="lt1"/>
+            </a:fontRef>
+          </p:style>
+          <p:txBody>
+            <a:bodyPr rtlCol="0" anchor="ctr"/>
+            <a:lstStyle/>
+            <a:p>
+              <a:pPr algn="ctr"/>
+              <a:endParaRPr kumimoji="1" lang="ja-JP" altLang="en-US"/>
+            </a:p>
+          </p:txBody>
+        </p:sp>
+        <p:sp>
+          <p:nvSpPr>
+            <p:cNvPr id="37" name="円/楕円 36">
+              <a:extLst>
+                <a:ext uri="{FF2B5EF4-FFF2-40B4-BE49-F238E27FC236}">
+                  <a16:creationId xmlns:a16="http://schemas.microsoft.com/office/drawing/2014/main" id="{EE1D514D-E009-381E-D998-1F49FDA6DA25}"/>
+                </a:ext>
+              </a:extLst>
+            </p:cNvPr>
+            <p:cNvSpPr/>
+            <p:nvPr/>
+          </p:nvSpPr>
+          <p:spPr>
+            <a:xfrm rot="10800000">
+              <a:off x="6034583" y="3536900"/>
+              <a:ext cx="168339" cy="174795"/>
+            </a:xfrm>
+            <a:prstGeom prst="ellipse">
+              <a:avLst/>
+            </a:prstGeom>
+            <a:solidFill>
+              <a:schemeClr val="bg1"/>
+            </a:solidFill>
+            <a:ln>
+              <a:solidFill>
+                <a:schemeClr val="tx1"/>
+              </a:solidFill>
+            </a:ln>
+          </p:spPr>
+          <p:style>
+            <a:lnRef idx="2">
+              <a:schemeClr val="accent1">
+                <a:shade val="15000"/>
+              </a:schemeClr>
+            </a:lnRef>
+            <a:fillRef idx="1">
+              <a:schemeClr val="accent1"/>
+            </a:fillRef>
+            <a:effectRef idx="0">
+              <a:schemeClr val="accent1"/>
+            </a:effectRef>
+            <a:fontRef idx="minor">
+              <a:schemeClr val="lt1"/>
+            </a:fontRef>
+          </p:style>
+          <p:txBody>
+            <a:bodyPr rtlCol="0" anchor="ctr"/>
+            <a:lstStyle/>
+            <a:p>
+              <a:pPr algn="ctr"/>
+              <a:endParaRPr kumimoji="1" lang="ja-JP" altLang="en-US"/>
+            </a:p>
+          </p:txBody>
+        </p:sp>
+        <p:sp>
+          <p:nvSpPr>
+            <p:cNvPr id="71" name="円/楕円 70">
+              <a:extLst>
+                <a:ext uri="{FF2B5EF4-FFF2-40B4-BE49-F238E27FC236}">
+                  <a16:creationId xmlns:a16="http://schemas.microsoft.com/office/drawing/2014/main" id="{5F6FFBE0-78BA-9BDE-64BF-3881F8EBE76D}"/>
+                </a:ext>
+              </a:extLst>
+            </p:cNvPr>
+            <p:cNvSpPr/>
+            <p:nvPr/>
+          </p:nvSpPr>
+          <p:spPr>
+            <a:xfrm rot="10800000">
+              <a:off x="5611031" y="3532939"/>
+              <a:ext cx="168339" cy="174795"/>
+            </a:xfrm>
+            <a:prstGeom prst="ellipse">
+              <a:avLst/>
+            </a:prstGeom>
+            <a:solidFill>
+              <a:schemeClr val="bg1"/>
+            </a:solidFill>
+            <a:ln>
+              <a:solidFill>
+                <a:schemeClr val="tx1"/>
+              </a:solidFill>
+            </a:ln>
+          </p:spPr>
+          <p:style>
+            <a:lnRef idx="2">
+              <a:schemeClr val="accent1">
+                <a:shade val="15000"/>
+              </a:schemeClr>
+            </a:lnRef>
+            <a:fillRef idx="1">
+              <a:schemeClr val="accent1"/>
+            </a:fillRef>
+            <a:effectRef idx="0">
+              <a:schemeClr val="accent1"/>
+            </a:effectRef>
+            <a:fontRef idx="minor">
+              <a:schemeClr val="lt1"/>
+            </a:fontRef>
+          </p:style>
+          <p:txBody>
+            <a:bodyPr rtlCol="0" anchor="ctr"/>
+            <a:lstStyle/>
+            <a:p>
+              <a:pPr algn="ctr"/>
+              <a:endParaRPr kumimoji="1" lang="ja-JP" altLang="en-US"/>
+            </a:p>
+          </p:txBody>
+        </p:sp>
+        <p:sp>
+          <p:nvSpPr>
+            <p:cNvPr id="52" name="円/楕円 51">
+              <a:extLst>
+                <a:ext uri="{FF2B5EF4-FFF2-40B4-BE49-F238E27FC236}">
+                  <a16:creationId xmlns:a16="http://schemas.microsoft.com/office/drawing/2014/main" id="{D073A55C-E93E-34B8-BC1A-AEC153177911}"/>
+                </a:ext>
+              </a:extLst>
+            </p:cNvPr>
+            <p:cNvSpPr/>
+            <p:nvPr/>
+          </p:nvSpPr>
+          <p:spPr>
+            <a:xfrm rot="10800000">
+              <a:off x="5084559" y="3841701"/>
+              <a:ext cx="168339" cy="174795"/>
+            </a:xfrm>
+            <a:prstGeom prst="ellipse">
+              <a:avLst/>
+            </a:prstGeom>
+            <a:solidFill>
+              <a:schemeClr val="bg1"/>
+            </a:solidFill>
+            <a:ln>
+              <a:solidFill>
+                <a:schemeClr val="tx1"/>
+              </a:solidFill>
+            </a:ln>
+          </p:spPr>
+          <p:style>
+            <a:lnRef idx="2">
+              <a:schemeClr val="accent1">
+                <a:shade val="15000"/>
+              </a:schemeClr>
+            </a:lnRef>
+            <a:fillRef idx="1">
+              <a:schemeClr val="accent1"/>
+            </a:fillRef>
+            <a:effectRef idx="0">
+              <a:schemeClr val="accent1"/>
+            </a:effectRef>
+            <a:fontRef idx="minor">
+              <a:schemeClr val="lt1"/>
+            </a:fontRef>
+          </p:style>
+          <p:txBody>
+            <a:bodyPr rtlCol="0" anchor="ctr"/>
+            <a:lstStyle/>
+            <a:p>
+              <a:pPr algn="ctr"/>
+              <a:endParaRPr kumimoji="1" lang="ja-JP" altLang="en-US"/>
+            </a:p>
+          </p:txBody>
+        </p:sp>
+        <p:cxnSp>
+          <p:nvCxnSpPr>
+            <p:cNvPr id="65" name="カギ線コネクタ 64">
+              <a:extLst>
+                <a:ext uri="{FF2B5EF4-FFF2-40B4-BE49-F238E27FC236}">
+                  <a16:creationId xmlns:a16="http://schemas.microsoft.com/office/drawing/2014/main" id="{6F1D7049-6415-8EDA-76F7-26D6EEDF5279}"/>
+                </a:ext>
+              </a:extLst>
+            </p:cNvPr>
+            <p:cNvCxnSpPr>
+              <a:cxnSpLocks/>
+              <a:stCxn id="71" idx="6"/>
+              <a:endCxn id="52" idx="2"/>
+            </p:cNvCxnSpPr>
+            <p:nvPr/>
+          </p:nvCxnSpPr>
+          <p:spPr>
+            <a:xfrm rot="10800000" flipV="1">
+              <a:off x="5252898" y="3620336"/>
+              <a:ext cx="358133" cy="308762"/>
+            </a:xfrm>
+            <a:prstGeom prst="bentConnector3">
+              <a:avLst>
+                <a:gd name="adj1" fmla="val 50000"/>
+              </a:avLst>
+            </a:prstGeom>
+            <a:ln w="63500">
+              <a:solidFill>
+                <a:schemeClr val="tx1">
+                  <a:lumMod val="50000"/>
+                  <a:lumOff val="50000"/>
+                </a:schemeClr>
+              </a:solidFill>
+              <a:prstDash val="sysDot"/>
+            </a:ln>
+          </p:spPr>
+          <p:style>
+            <a:lnRef idx="2">
+              <a:schemeClr val="accent1"/>
+            </a:lnRef>
+            <a:fillRef idx="0">
+              <a:schemeClr val="accent1"/>
+            </a:fillRef>
+            <a:effectRef idx="1">
+              <a:schemeClr val="accent1"/>
+            </a:effectRef>
+            <a:fontRef idx="minor">
+              <a:schemeClr val="tx1"/>
+            </a:fontRef>
+          </p:style>
+        </p:cxnSp>
+      </p:grpSp>
+      <p:sp>
+        <p:nvSpPr>
+          <p:cNvPr id="55" name="正方形/長方形 54">
+            <a:extLst>
+              <a:ext uri="{FF2B5EF4-FFF2-40B4-BE49-F238E27FC236}">
+                <a16:creationId xmlns:a16="http://schemas.microsoft.com/office/drawing/2014/main" id="{3753A14B-242F-5788-63D4-AF9303585198}"/>
+              </a:ext>
+            </a:extLst>
+          </p:cNvPr>
+          <p:cNvSpPr/>
+          <p:nvPr/>
+        </p:nvSpPr>
+        <p:spPr>
+          <a:xfrm>
+            <a:off x="8319226" y="1582151"/>
+            <a:ext cx="304622" cy="2399924"/>
+          </a:xfrm>
+          <a:prstGeom prst="rect">
+            <a:avLst/>
+          </a:prstGeom>
+        </p:spPr>
+        <p:style>
+          <a:lnRef idx="2">
+            <a:schemeClr val="accent1">
+              <a:shade val="15000"/>
+            </a:schemeClr>
+          </a:lnRef>
+          <a:fillRef idx="1">
+            <a:schemeClr val="accent1"/>
+          </a:fillRef>
+          <a:effectRef idx="0">
+            <a:schemeClr val="accent1"/>
+          </a:effectRef>
+          <a:fontRef idx="minor">
+            <a:schemeClr val="lt1"/>
+          </a:fontRef>
+        </p:style>
+        <p:txBody>
+          <a:bodyPr rtlCol="0" anchor="ctr"/>
+          <a:lstStyle/>
+          <a:p>
+            <a:pPr algn="ctr"/>
+            <a:endParaRPr kumimoji="1" lang="ja-JP" altLang="en-US"/>
+          </a:p>
+        </p:txBody>
+      </p:sp>
+      <p:grpSp>
+        <p:nvGrpSpPr>
+          <p:cNvPr id="66" name="グループ化 65">
+            <a:extLst>
+              <a:ext uri="{FF2B5EF4-FFF2-40B4-BE49-F238E27FC236}">
+                <a16:creationId xmlns:a16="http://schemas.microsoft.com/office/drawing/2014/main" id="{CBC92C1A-861D-FDC8-DE2A-EFF82ADEB76F}"/>
+              </a:ext>
+            </a:extLst>
+          </p:cNvPr>
+          <p:cNvGrpSpPr/>
+          <p:nvPr/>
+        </p:nvGrpSpPr>
+        <p:grpSpPr>
+          <a:xfrm>
+            <a:off x="8367579" y="1605506"/>
+            <a:ext cx="195648" cy="2000390"/>
+            <a:chOff x="7331138" y="1309815"/>
+            <a:chExt cx="195648" cy="2000390"/>
+          </a:xfrm>
+        </p:grpSpPr>
+        <p:grpSp>
+          <p:nvGrpSpPr>
+            <p:cNvPr id="60" name="グループ化 59">
+              <a:extLst>
+                <a:ext uri="{FF2B5EF4-FFF2-40B4-BE49-F238E27FC236}">
+                  <a16:creationId xmlns:a16="http://schemas.microsoft.com/office/drawing/2014/main" id="{35E63B24-C2EA-D8A5-0F82-A60979F6C332}"/>
+                </a:ext>
+              </a:extLst>
+            </p:cNvPr>
+            <p:cNvGrpSpPr/>
+            <p:nvPr/>
+          </p:nvGrpSpPr>
+          <p:grpSpPr>
+            <a:xfrm>
+              <a:off x="7341967" y="1309815"/>
+              <a:ext cx="184819" cy="1097435"/>
+              <a:chOff x="7341967" y="1309815"/>
+              <a:chExt cx="184819" cy="1097435"/>
+            </a:xfrm>
+          </p:grpSpPr>
+          <p:sp>
+            <p:nvSpPr>
+              <p:cNvPr id="56" name="円/楕円 55">
+                <a:extLst>
+                  <a:ext uri="{FF2B5EF4-FFF2-40B4-BE49-F238E27FC236}">
+                    <a16:creationId xmlns:a16="http://schemas.microsoft.com/office/drawing/2014/main" id="{CC4AF59A-F126-6253-D6F8-95FF5025BC5A}"/>
+                  </a:ext>
+                </a:extLst>
+              </p:cNvPr>
+              <p:cNvSpPr/>
+              <p:nvPr/>
+            </p:nvSpPr>
+            <p:spPr>
+              <a:xfrm>
+                <a:off x="7358447" y="1309815"/>
+                <a:ext cx="168339" cy="174795"/>
+              </a:xfrm>
+              <a:prstGeom prst="ellipse">
+                <a:avLst/>
+              </a:prstGeom>
+              <a:solidFill>
+                <a:schemeClr val="bg1"/>
+              </a:solidFill>
+              <a:ln>
+                <a:solidFill>
+                  <a:schemeClr val="tx1"/>
+                </a:solidFill>
+              </a:ln>
+            </p:spPr>
+            <p:style>
+              <a:lnRef idx="2">
+                <a:schemeClr val="accent1">
+                  <a:shade val="15000"/>
+                </a:schemeClr>
+              </a:lnRef>
+              <a:fillRef idx="1">
+                <a:schemeClr val="accent1"/>
+              </a:fillRef>
+              <a:effectRef idx="0">
+                <a:schemeClr val="accent1"/>
+              </a:effectRef>
+              <a:fontRef idx="minor">
+                <a:schemeClr val="lt1"/>
+              </a:fontRef>
+            </p:style>
+            <p:txBody>
+              <a:bodyPr rtlCol="0" anchor="ctr"/>
+              <a:lstStyle/>
+              <a:p>
+                <a:pPr algn="ctr"/>
+                <a:endParaRPr kumimoji="1" lang="ja-JP" altLang="en-US"/>
+              </a:p>
+            </p:txBody>
+          </p:sp>
+          <p:sp>
+            <p:nvSpPr>
+              <p:cNvPr id="57" name="円/楕円 56">
+                <a:extLst>
+                  <a:ext uri="{FF2B5EF4-FFF2-40B4-BE49-F238E27FC236}">
+                    <a16:creationId xmlns:a16="http://schemas.microsoft.com/office/drawing/2014/main" id="{582FF93E-4B46-327A-B054-84F04E5A6874}"/>
+                  </a:ext>
+                </a:extLst>
+              </p:cNvPr>
+              <p:cNvSpPr/>
+              <p:nvPr/>
+            </p:nvSpPr>
+            <p:spPr>
+              <a:xfrm>
+                <a:off x="7350207" y="1622853"/>
+                <a:ext cx="168339" cy="174795"/>
+              </a:xfrm>
+              <a:prstGeom prst="ellipse">
+                <a:avLst/>
+              </a:prstGeom>
+              <a:solidFill>
+                <a:schemeClr val="bg1"/>
+              </a:solidFill>
+              <a:ln>
+                <a:solidFill>
+                  <a:schemeClr val="tx1"/>
+                </a:solidFill>
+              </a:ln>
+            </p:spPr>
+            <p:style>
+              <a:lnRef idx="2">
+                <a:schemeClr val="accent1">
+                  <a:shade val="15000"/>
+                </a:schemeClr>
+              </a:lnRef>
+              <a:fillRef idx="1">
+                <a:schemeClr val="accent1"/>
+              </a:fillRef>
+              <a:effectRef idx="0">
+                <a:schemeClr val="accent1"/>
+              </a:effectRef>
+              <a:fontRef idx="minor">
+                <a:schemeClr val="lt1"/>
+              </a:fontRef>
+            </p:style>
+            <p:txBody>
+              <a:bodyPr rtlCol="0" anchor="ctr"/>
+              <a:lstStyle/>
+              <a:p>
+                <a:pPr algn="ctr"/>
+                <a:endParaRPr kumimoji="1" lang="ja-JP" altLang="en-US"/>
+              </a:p>
+            </p:txBody>
+          </p:sp>
+          <p:sp>
+            <p:nvSpPr>
+              <p:cNvPr id="58" name="円/楕円 57">
+                <a:extLst>
+                  <a:ext uri="{FF2B5EF4-FFF2-40B4-BE49-F238E27FC236}">
+                    <a16:creationId xmlns:a16="http://schemas.microsoft.com/office/drawing/2014/main" id="{AD5E25D9-A6DE-C95F-FCE1-800E743DA1D5}"/>
+                  </a:ext>
+                </a:extLst>
+              </p:cNvPr>
+              <p:cNvSpPr/>
+              <p:nvPr/>
+            </p:nvSpPr>
+            <p:spPr>
+              <a:xfrm>
+                <a:off x="7350207" y="1919417"/>
+                <a:ext cx="168339" cy="174795"/>
+              </a:xfrm>
+              <a:prstGeom prst="ellipse">
+                <a:avLst/>
+              </a:prstGeom>
+              <a:solidFill>
+                <a:schemeClr val="bg1"/>
+              </a:solidFill>
+              <a:ln>
+                <a:solidFill>
+                  <a:schemeClr val="tx1"/>
+                </a:solidFill>
+              </a:ln>
+            </p:spPr>
+            <p:style>
+              <a:lnRef idx="2">
+                <a:schemeClr val="accent1">
+                  <a:shade val="15000"/>
+                </a:schemeClr>
+              </a:lnRef>
+              <a:fillRef idx="1">
+                <a:schemeClr val="accent1"/>
+              </a:fillRef>
+              <a:effectRef idx="0">
+                <a:schemeClr val="accent1"/>
+              </a:effectRef>
+              <a:fontRef idx="minor">
+                <a:schemeClr val="lt1"/>
+              </a:fontRef>
+            </p:style>
+            <p:txBody>
+              <a:bodyPr rtlCol="0" anchor="ctr"/>
+              <a:lstStyle/>
+              <a:p>
+                <a:pPr algn="ctr"/>
+                <a:endParaRPr kumimoji="1" lang="ja-JP" altLang="en-US"/>
+              </a:p>
+            </p:txBody>
+          </p:sp>
+          <p:sp>
+            <p:nvSpPr>
+              <p:cNvPr id="59" name="円/楕円 58">
+                <a:extLst>
+                  <a:ext uri="{FF2B5EF4-FFF2-40B4-BE49-F238E27FC236}">
+                    <a16:creationId xmlns:a16="http://schemas.microsoft.com/office/drawing/2014/main" id="{063B204A-3E57-5E97-960B-A82F62E7D812}"/>
+                  </a:ext>
+                </a:extLst>
+              </p:cNvPr>
+              <p:cNvSpPr/>
+              <p:nvPr/>
+            </p:nvSpPr>
+            <p:spPr>
+              <a:xfrm>
+                <a:off x="7341967" y="2232455"/>
+                <a:ext cx="168339" cy="174795"/>
+              </a:xfrm>
+              <a:prstGeom prst="ellipse">
+                <a:avLst/>
+              </a:prstGeom>
+              <a:solidFill>
+                <a:schemeClr val="bg1"/>
+              </a:solidFill>
+              <a:ln>
+                <a:solidFill>
+                  <a:schemeClr val="tx1"/>
+                </a:solidFill>
+              </a:ln>
+            </p:spPr>
+            <p:style>
+              <a:lnRef idx="2">
+                <a:schemeClr val="accent1">
+                  <a:shade val="15000"/>
+                </a:schemeClr>
+              </a:lnRef>
+              <a:fillRef idx="1">
+                <a:schemeClr val="accent1"/>
+              </a:fillRef>
+              <a:effectRef idx="0">
+                <a:schemeClr val="accent1"/>
+              </a:effectRef>
+              <a:fontRef idx="minor">
+                <a:schemeClr val="lt1"/>
+              </a:fontRef>
+            </p:style>
+            <p:txBody>
+              <a:bodyPr rtlCol="0" anchor="ctr"/>
+              <a:lstStyle/>
+              <a:p>
+                <a:pPr algn="ctr"/>
+                <a:endParaRPr kumimoji="1" lang="ja-JP" altLang="en-US"/>
+              </a:p>
+            </p:txBody>
+          </p:sp>
+        </p:grpSp>
+        <p:grpSp>
+          <p:nvGrpSpPr>
+            <p:cNvPr id="61" name="グループ化 60">
+              <a:extLst>
+                <a:ext uri="{FF2B5EF4-FFF2-40B4-BE49-F238E27FC236}">
+                  <a16:creationId xmlns:a16="http://schemas.microsoft.com/office/drawing/2014/main" id="{91A68626-8B00-AD1C-9EBA-63237E0418ED}"/>
+                </a:ext>
+              </a:extLst>
+            </p:cNvPr>
+            <p:cNvGrpSpPr/>
+            <p:nvPr/>
+          </p:nvGrpSpPr>
+          <p:grpSpPr>
+            <a:xfrm>
+              <a:off x="7331138" y="2525808"/>
+              <a:ext cx="176579" cy="784397"/>
+              <a:chOff x="7350207" y="1309815"/>
+              <a:chExt cx="176579" cy="784397"/>
+            </a:xfrm>
+          </p:grpSpPr>
+          <p:sp>
+            <p:nvSpPr>
+              <p:cNvPr id="62" name="円/楕円 61">
+                <a:extLst>
+                  <a:ext uri="{FF2B5EF4-FFF2-40B4-BE49-F238E27FC236}">
+                    <a16:creationId xmlns:a16="http://schemas.microsoft.com/office/drawing/2014/main" id="{C96C262A-953A-A7E2-E1A4-E153ED09FB93}"/>
+                  </a:ext>
+                </a:extLst>
+              </p:cNvPr>
+              <p:cNvSpPr/>
+              <p:nvPr/>
+            </p:nvSpPr>
+            <p:spPr>
+              <a:xfrm>
+                <a:off x="7358447" y="1309815"/>
+                <a:ext cx="168339" cy="174795"/>
+              </a:xfrm>
+              <a:prstGeom prst="ellipse">
+                <a:avLst/>
+              </a:prstGeom>
+              <a:solidFill>
+                <a:schemeClr val="bg1"/>
+              </a:solidFill>
+              <a:ln>
+                <a:solidFill>
+                  <a:schemeClr val="tx1"/>
+                </a:solidFill>
+              </a:ln>
+            </p:spPr>
+            <p:style>
+              <a:lnRef idx="2">
+                <a:schemeClr val="accent1">
+                  <a:shade val="15000"/>
+                </a:schemeClr>
+              </a:lnRef>
+              <a:fillRef idx="1">
+                <a:schemeClr val="accent1"/>
+              </a:fillRef>
+              <a:effectRef idx="0">
+                <a:schemeClr val="accent1"/>
+              </a:effectRef>
+              <a:fontRef idx="minor">
+                <a:schemeClr val="lt1"/>
+              </a:fontRef>
+            </p:style>
+            <p:txBody>
+              <a:bodyPr rtlCol="0" anchor="ctr"/>
+              <a:lstStyle/>
+              <a:p>
+                <a:pPr algn="ctr"/>
+                <a:endParaRPr kumimoji="1" lang="ja-JP" altLang="en-US"/>
+              </a:p>
+            </p:txBody>
+          </p:sp>
+          <p:sp>
+            <p:nvSpPr>
+              <p:cNvPr id="63" name="円/楕円 62">
+                <a:extLst>
+                  <a:ext uri="{FF2B5EF4-FFF2-40B4-BE49-F238E27FC236}">
+                    <a16:creationId xmlns:a16="http://schemas.microsoft.com/office/drawing/2014/main" id="{0605865D-A44A-2B30-BB9C-DEB813C5A3CF}"/>
+                  </a:ext>
+                </a:extLst>
+              </p:cNvPr>
+              <p:cNvSpPr/>
+              <p:nvPr/>
+            </p:nvSpPr>
+            <p:spPr>
+              <a:xfrm>
+                <a:off x="7350207" y="1622853"/>
+                <a:ext cx="168339" cy="174795"/>
+              </a:xfrm>
+              <a:prstGeom prst="ellipse">
+                <a:avLst/>
+              </a:prstGeom>
+              <a:solidFill>
+                <a:schemeClr val="bg1"/>
+              </a:solidFill>
+              <a:ln>
+                <a:solidFill>
+                  <a:schemeClr val="tx1"/>
+                </a:solidFill>
+              </a:ln>
+            </p:spPr>
+            <p:style>
+              <a:lnRef idx="2">
+                <a:schemeClr val="accent1">
+                  <a:shade val="15000"/>
+                </a:schemeClr>
+              </a:lnRef>
+              <a:fillRef idx="1">
+                <a:schemeClr val="accent1"/>
+              </a:fillRef>
+              <a:effectRef idx="0">
+                <a:schemeClr val="accent1"/>
+              </a:effectRef>
+              <a:fontRef idx="minor">
+                <a:schemeClr val="lt1"/>
+              </a:fontRef>
+            </p:style>
+            <p:txBody>
+              <a:bodyPr rtlCol="0" anchor="ctr"/>
+              <a:lstStyle/>
+              <a:p>
+                <a:pPr algn="ctr"/>
+                <a:endParaRPr kumimoji="1" lang="ja-JP" altLang="en-US"/>
+              </a:p>
+            </p:txBody>
+          </p:sp>
+          <p:sp>
+            <p:nvSpPr>
+              <p:cNvPr id="64" name="円/楕円 63">
+                <a:extLst>
+                  <a:ext uri="{FF2B5EF4-FFF2-40B4-BE49-F238E27FC236}">
+                    <a16:creationId xmlns:a16="http://schemas.microsoft.com/office/drawing/2014/main" id="{FFFC84E9-8423-2C6D-EE8C-07500CA0B942}"/>
+                  </a:ext>
+                </a:extLst>
+              </p:cNvPr>
+              <p:cNvSpPr/>
+              <p:nvPr/>
+            </p:nvSpPr>
+            <p:spPr>
+              <a:xfrm>
+                <a:off x="7350207" y="1919417"/>
+                <a:ext cx="168339" cy="174795"/>
+              </a:xfrm>
+              <a:prstGeom prst="ellipse">
+                <a:avLst/>
+              </a:prstGeom>
+              <a:solidFill>
+                <a:schemeClr val="bg1"/>
+              </a:solidFill>
+              <a:ln>
+                <a:solidFill>
+                  <a:schemeClr val="tx1"/>
+                </a:solidFill>
+              </a:ln>
+            </p:spPr>
+            <p:style>
+              <a:lnRef idx="2">
+                <a:schemeClr val="accent1">
+                  <a:shade val="15000"/>
+                </a:schemeClr>
+              </a:lnRef>
+              <a:fillRef idx="1">
+                <a:schemeClr val="accent1"/>
+              </a:fillRef>
+              <a:effectRef idx="0">
+                <a:schemeClr val="accent1"/>
+              </a:effectRef>
+              <a:fontRef idx="minor">
+                <a:schemeClr val="lt1"/>
+              </a:fontRef>
+            </p:style>
+            <p:txBody>
+              <a:bodyPr rtlCol="0" anchor="ctr"/>
+              <a:lstStyle/>
+              <a:p>
+                <a:pPr algn="ctr"/>
+                <a:endParaRPr kumimoji="1" lang="ja-JP" altLang="en-US"/>
+              </a:p>
+            </p:txBody>
+          </p:sp>
+        </p:grpSp>
+      </p:grpSp>
+      <p:sp>
+        <p:nvSpPr>
+          <p:cNvPr id="67" name="テキスト ボックス 66">
+            <a:extLst>
+              <a:ext uri="{FF2B5EF4-FFF2-40B4-BE49-F238E27FC236}">
+                <a16:creationId xmlns:a16="http://schemas.microsoft.com/office/drawing/2014/main" id="{F5E32B19-C5AC-9355-A655-5E2894E11F2B}"/>
+              </a:ext>
+            </a:extLst>
+          </p:cNvPr>
+          <p:cNvSpPr txBox="1"/>
+          <p:nvPr/>
+        </p:nvSpPr>
+        <p:spPr>
+          <a:xfrm>
+            <a:off x="8680441" y="1627951"/>
+            <a:ext cx="697627" cy="2031325"/>
+          </a:xfrm>
+          <a:prstGeom prst="rect">
+            <a:avLst/>
+          </a:prstGeom>
+          <a:noFill/>
+        </p:spPr>
+        <p:txBody>
+          <a:bodyPr wrap="none" rtlCol="0">
+            <a:spAutoFit/>
+          </a:bodyPr>
+          <a:lstStyle/>
+          <a:p>
+            <a:r>
+              <a:rPr kumimoji="1" lang="en-US" altLang="ja-JP" dirty="0"/>
+              <a:t>GND</a:t>
+            </a:r>
+          </a:p>
+          <a:p>
+            <a:r>
+              <a:rPr lang="en-US" altLang="ja-JP" dirty="0"/>
+              <a:t>VCC</a:t>
+            </a:r>
+          </a:p>
+          <a:p>
+            <a:r>
+              <a:rPr kumimoji="1" lang="en-US" altLang="ja-JP" dirty="0"/>
+              <a:t>SCL</a:t>
+            </a:r>
+          </a:p>
+          <a:p>
+            <a:r>
+              <a:rPr lang="en-US" altLang="ja-JP" dirty="0"/>
+              <a:t>SDA</a:t>
+            </a:r>
+          </a:p>
+          <a:p>
+            <a:r>
+              <a:rPr kumimoji="1" lang="en-US" altLang="ja-JP" dirty="0"/>
+              <a:t>RES</a:t>
+            </a:r>
+          </a:p>
+          <a:p>
+            <a:r>
+              <a:rPr kumimoji="1" lang="en-US" altLang="ja-JP" dirty="0"/>
+              <a:t>DC</a:t>
+            </a:r>
+          </a:p>
+          <a:p>
+            <a:r>
+              <a:rPr lang="en-US" altLang="ja-JP" dirty="0"/>
+              <a:t>CS</a:t>
+            </a:r>
+          </a:p>
+        </p:txBody>
+      </p:sp>
+      <p:cxnSp>
+        <p:nvCxnSpPr>
+          <p:cNvPr id="90" name="カギ線コネクタ 89">
+            <a:extLst>
+              <a:ext uri="{FF2B5EF4-FFF2-40B4-BE49-F238E27FC236}">
+                <a16:creationId xmlns:a16="http://schemas.microsoft.com/office/drawing/2014/main" id="{E0A4C6FC-77A8-FC15-E0D2-08AAE7430313}"/>
+              </a:ext>
+            </a:extLst>
+          </p:cNvPr>
+          <p:cNvCxnSpPr>
+            <a:cxnSpLocks/>
+            <a:stCxn id="80" idx="0"/>
+            <a:endCxn id="64" idx="2"/>
+          </p:cNvCxnSpPr>
+          <p:nvPr/>
+        </p:nvCxnSpPr>
+        <p:spPr>
+          <a:xfrm>
+            <a:off x="7594580" y="1592768"/>
+            <a:ext cx="772999" cy="1925731"/>
+          </a:xfrm>
+          <a:prstGeom prst="straightConnector1">
+            <a:avLst/>
+          </a:prstGeom>
+          <a:ln w="63500">
+            <a:solidFill>
+              <a:schemeClr val="accent2"/>
+            </a:solidFill>
+            <a:prstDash val="sysDot"/>
+          </a:ln>
+        </p:spPr>
+        <p:style>
+          <a:lnRef idx="2">
+            <a:schemeClr val="accent1"/>
+          </a:lnRef>
+          <a:fillRef idx="0">
+            <a:schemeClr val="accent1"/>
+          </a:fillRef>
+          <a:effectRef idx="1">
+            <a:schemeClr val="accent1"/>
+          </a:effectRef>
+          <a:fontRef idx="minor">
+            <a:schemeClr val="tx1"/>
+          </a:fontRef>
+        </p:style>
+      </p:cxnSp>
+      <p:cxnSp>
+        <p:nvCxnSpPr>
+          <p:cNvPr id="18" name="カギ線コネクタ 17">
+            <a:extLst>
+              <a:ext uri="{FF2B5EF4-FFF2-40B4-BE49-F238E27FC236}">
+                <a16:creationId xmlns:a16="http://schemas.microsoft.com/office/drawing/2014/main" id="{08F0763C-91C7-8CE8-C178-22E20AAAC456}"/>
+              </a:ext>
+            </a:extLst>
+          </p:cNvPr>
+          <p:cNvCxnSpPr>
+            <a:cxnSpLocks/>
+            <a:stCxn id="28" idx="6"/>
+            <a:endCxn id="30" idx="6"/>
+          </p:cNvCxnSpPr>
+          <p:nvPr/>
+        </p:nvCxnSpPr>
+        <p:spPr>
+          <a:xfrm>
+            <a:off x="4157276" y="2788481"/>
+            <a:ext cx="1978" cy="948046"/>
+          </a:xfrm>
+          <a:prstGeom prst="bentConnector3">
+            <a:avLst>
+              <a:gd name="adj1" fmla="val 11657128"/>
+            </a:avLst>
+          </a:prstGeom>
+          <a:ln w="63500">
+            <a:solidFill>
+              <a:srgbClr val="FF0000"/>
+            </a:solidFill>
+            <a:prstDash val="solid"/>
+          </a:ln>
+        </p:spPr>
+        <p:style>
+          <a:lnRef idx="2">
+            <a:schemeClr val="accent1"/>
+          </a:lnRef>
+          <a:fillRef idx="0">
+            <a:schemeClr val="accent1"/>
+          </a:fillRef>
+          <a:effectRef idx="1">
+            <a:schemeClr val="accent1"/>
+          </a:effectRef>
+          <a:fontRef idx="minor">
+            <a:schemeClr val="tx1"/>
+          </a:fontRef>
+        </p:style>
+      </p:cxnSp>
+      <p:cxnSp>
+        <p:nvCxnSpPr>
+          <p:cNvPr id="33" name="カギ線コネクタ 32">
+            <a:extLst>
+              <a:ext uri="{FF2B5EF4-FFF2-40B4-BE49-F238E27FC236}">
+                <a16:creationId xmlns:a16="http://schemas.microsoft.com/office/drawing/2014/main" id="{A1CBD64D-4545-840A-3463-EE4504C653BF}"/>
+              </a:ext>
+            </a:extLst>
+          </p:cNvPr>
+          <p:cNvCxnSpPr>
+            <a:cxnSpLocks/>
+            <a:stCxn id="20" idx="6"/>
+            <a:endCxn id="21" idx="6"/>
+          </p:cNvCxnSpPr>
+          <p:nvPr/>
+        </p:nvCxnSpPr>
+        <p:spPr>
+          <a:xfrm flipV="1">
+            <a:off x="5093447" y="3497820"/>
+            <a:ext cx="2417698" cy="230788"/>
+          </a:xfrm>
+          <a:prstGeom prst="bentConnector2">
+            <a:avLst/>
+          </a:prstGeom>
+          <a:ln w="63500">
+            <a:solidFill>
+              <a:srgbClr val="00B0F0"/>
+            </a:solidFill>
+            <a:prstDash val="sysDot"/>
+          </a:ln>
+        </p:spPr>
+        <p:style>
+          <a:lnRef idx="2">
+            <a:schemeClr val="accent1"/>
+          </a:lnRef>
+          <a:fillRef idx="0">
+            <a:schemeClr val="accent1"/>
+          </a:fillRef>
+          <a:effectRef idx="1">
+            <a:schemeClr val="accent1"/>
+          </a:effectRef>
+          <a:fontRef idx="minor">
+            <a:schemeClr val="tx1"/>
+          </a:fontRef>
+        </p:style>
+      </p:cxnSp>
+      <p:cxnSp>
+        <p:nvCxnSpPr>
+          <p:cNvPr id="50" name="カギ線コネクタ 49">
+            <a:extLst>
+              <a:ext uri="{FF2B5EF4-FFF2-40B4-BE49-F238E27FC236}">
+                <a16:creationId xmlns:a16="http://schemas.microsoft.com/office/drawing/2014/main" id="{EC932B0F-169A-CA8B-669F-65EDA45FDAB0}"/>
+              </a:ext>
+            </a:extLst>
+          </p:cNvPr>
+          <p:cNvCxnSpPr>
+            <a:cxnSpLocks/>
+            <a:stCxn id="13" idx="6"/>
+            <a:endCxn id="17" idx="4"/>
+          </p:cNvCxnSpPr>
+          <p:nvPr/>
+        </p:nvCxnSpPr>
+        <p:spPr>
+          <a:xfrm flipV="1">
+            <a:off x="5103343" y="3399794"/>
+            <a:ext cx="810259" cy="10160"/>
+          </a:xfrm>
+          <a:prstGeom prst="bentConnector3">
+            <a:avLst>
+              <a:gd name="adj1" fmla="val 50000"/>
+            </a:avLst>
+          </a:prstGeom>
+          <a:ln w="63500">
+            <a:solidFill>
+              <a:srgbClr val="00B050"/>
+            </a:solidFill>
+            <a:prstDash val="sysDot"/>
+          </a:ln>
+        </p:spPr>
+        <p:style>
+          <a:lnRef idx="2">
+            <a:schemeClr val="accent1"/>
+          </a:lnRef>
+          <a:fillRef idx="0">
+            <a:schemeClr val="accent1"/>
+          </a:fillRef>
+          <a:effectRef idx="1">
+            <a:schemeClr val="accent1"/>
+          </a:effectRef>
+          <a:fontRef idx="minor">
+            <a:schemeClr val="tx1"/>
+          </a:fontRef>
+        </p:style>
+      </p:cxnSp>
+      <p:cxnSp>
+        <p:nvCxnSpPr>
+          <p:cNvPr id="93" name="カギ線コネクタ 92">
+            <a:extLst>
+              <a:ext uri="{FF2B5EF4-FFF2-40B4-BE49-F238E27FC236}">
+                <a16:creationId xmlns:a16="http://schemas.microsoft.com/office/drawing/2014/main" id="{1422AF6A-32BA-8A07-A46D-EFEBE247BD1F}"/>
+              </a:ext>
+            </a:extLst>
+          </p:cNvPr>
+          <p:cNvCxnSpPr>
+            <a:cxnSpLocks/>
+            <a:stCxn id="301" idx="4"/>
+            <a:endCxn id="302" idx="6"/>
+          </p:cNvCxnSpPr>
+          <p:nvPr/>
+        </p:nvCxnSpPr>
+        <p:spPr>
+          <a:xfrm rot="10800000" flipV="1">
+            <a:off x="4157500" y="688262"/>
+            <a:ext cx="1764019" cy="2399801"/>
+          </a:xfrm>
+          <a:prstGeom prst="bentConnector3">
+            <a:avLst>
+              <a:gd name="adj1" fmla="val 90392"/>
+            </a:avLst>
+          </a:prstGeom>
+          <a:ln w="63500">
+            <a:solidFill>
+              <a:schemeClr val="accent5"/>
+            </a:solidFill>
+            <a:prstDash val="sysDot"/>
+          </a:ln>
+        </p:spPr>
+        <p:style>
+          <a:lnRef idx="2">
+            <a:schemeClr val="accent1"/>
+          </a:lnRef>
+          <a:fillRef idx="0">
+            <a:schemeClr val="accent1"/>
+          </a:fillRef>
+          <a:effectRef idx="1">
+            <a:schemeClr val="accent1"/>
+          </a:effectRef>
+          <a:fontRef idx="minor">
+            <a:schemeClr val="tx1"/>
+          </a:fontRef>
+        </p:style>
+      </p:cxnSp>
+      <p:cxnSp>
+        <p:nvCxnSpPr>
+          <p:cNvPr id="171" name="カギ線コネクタ 170">
+            <a:extLst>
+              <a:ext uri="{FF2B5EF4-FFF2-40B4-BE49-F238E27FC236}">
+                <a16:creationId xmlns:a16="http://schemas.microsoft.com/office/drawing/2014/main" id="{1AB5F148-AEAB-AD0C-128D-2F24898C269A}"/>
+              </a:ext>
+            </a:extLst>
+          </p:cNvPr>
+          <p:cNvCxnSpPr>
+            <a:cxnSpLocks/>
+            <a:stCxn id="95" idx="0"/>
+            <a:endCxn id="63" idx="2"/>
+          </p:cNvCxnSpPr>
+          <p:nvPr/>
+        </p:nvCxnSpPr>
+        <p:spPr>
+          <a:xfrm>
+            <a:off x="7596559" y="1297865"/>
+            <a:ext cx="771020" cy="1924070"/>
+          </a:xfrm>
+          <a:prstGeom prst="straightConnector1">
+            <a:avLst/>
+          </a:prstGeom>
+          <a:ln w="63500">
+            <a:solidFill>
+              <a:srgbClr val="00B0F0"/>
+            </a:solidFill>
+            <a:prstDash val="sysDot"/>
+          </a:ln>
+        </p:spPr>
+        <p:style>
+          <a:lnRef idx="2">
+            <a:schemeClr val="accent1"/>
+          </a:lnRef>
+          <a:fillRef idx="0">
+            <a:schemeClr val="accent1"/>
+          </a:fillRef>
+          <a:effectRef idx="1">
+            <a:schemeClr val="accent1"/>
+          </a:effectRef>
+          <a:fontRef idx="minor">
+            <a:schemeClr val="tx1"/>
+          </a:fontRef>
+        </p:style>
+      </p:cxnSp>
+      <p:cxnSp>
+        <p:nvCxnSpPr>
+          <p:cNvPr id="217" name="カギ線コネクタ 216">
+            <a:extLst>
+              <a:ext uri="{FF2B5EF4-FFF2-40B4-BE49-F238E27FC236}">
+                <a16:creationId xmlns:a16="http://schemas.microsoft.com/office/drawing/2014/main" id="{9013995A-D51C-BC43-67EB-B1A5158A5F4B}"/>
+              </a:ext>
+            </a:extLst>
+          </p:cNvPr>
+          <p:cNvCxnSpPr>
+            <a:cxnSpLocks/>
+            <a:stCxn id="56" idx="2"/>
+            <a:endCxn id="70" idx="0"/>
+          </p:cNvCxnSpPr>
+          <p:nvPr/>
+        </p:nvCxnSpPr>
+        <p:spPr>
+          <a:xfrm flipH="1">
+            <a:off x="7592602" y="1692904"/>
+            <a:ext cx="802286" cy="503523"/>
+          </a:xfrm>
+          <a:prstGeom prst="straightConnector1">
+            <a:avLst/>
+          </a:prstGeom>
+          <a:ln w="63500">
+            <a:solidFill>
+              <a:schemeClr val="tx1">
+                <a:lumMod val="50000"/>
+                <a:lumOff val="50000"/>
+              </a:schemeClr>
+            </a:solidFill>
+            <a:prstDash val="solid"/>
+          </a:ln>
+        </p:spPr>
+        <p:style>
+          <a:lnRef idx="2">
+            <a:schemeClr val="accent1"/>
+          </a:lnRef>
+          <a:fillRef idx="0">
+            <a:schemeClr val="accent1"/>
+          </a:fillRef>
+          <a:effectRef idx="1">
+            <a:schemeClr val="accent1"/>
+          </a:effectRef>
+          <a:fontRef idx="minor">
+            <a:schemeClr val="tx1"/>
+          </a:fontRef>
+        </p:style>
+      </p:cxnSp>
+      <p:cxnSp>
+        <p:nvCxnSpPr>
+          <p:cNvPr id="47" name="カギ線コネクタ 46">
+            <a:extLst>
+              <a:ext uri="{FF2B5EF4-FFF2-40B4-BE49-F238E27FC236}">
+                <a16:creationId xmlns:a16="http://schemas.microsoft.com/office/drawing/2014/main" id="{0B1F6B28-E487-7650-479F-E39B68201F1C}"/>
+              </a:ext>
+            </a:extLst>
+          </p:cNvPr>
+          <p:cNvCxnSpPr>
+            <a:cxnSpLocks/>
+            <a:stCxn id="53" idx="0"/>
+            <a:endCxn id="30" idx="4"/>
+          </p:cNvCxnSpPr>
+          <p:nvPr/>
+        </p:nvCxnSpPr>
+        <p:spPr>
+          <a:xfrm flipH="1">
+            <a:off x="4075085" y="2513106"/>
+            <a:ext cx="3525437" cy="1310818"/>
+          </a:xfrm>
+          <a:prstGeom prst="bentConnector4">
+            <a:avLst>
+              <a:gd name="adj1" fmla="val -6393"/>
+              <a:gd name="adj2" fmla="val 117439"/>
+            </a:avLst>
+          </a:prstGeom>
+          <a:ln w="63500">
+            <a:solidFill>
+              <a:srgbClr val="FF0000"/>
+            </a:solidFill>
+            <a:prstDash val="sysDot"/>
+          </a:ln>
+        </p:spPr>
+        <p:style>
+          <a:lnRef idx="2">
+            <a:schemeClr val="accent1"/>
+          </a:lnRef>
+          <a:fillRef idx="0">
+            <a:schemeClr val="accent1"/>
+          </a:fillRef>
+          <a:effectRef idx="1">
+            <a:schemeClr val="accent1"/>
+          </a:effectRef>
+          <a:fontRef idx="minor">
+            <a:schemeClr val="tx1"/>
+          </a:fontRef>
+        </p:style>
+      </p:cxnSp>
+      <p:cxnSp>
+        <p:nvCxnSpPr>
+          <p:cNvPr id="102" name="カギ線コネクタ 101">
+            <a:extLst>
+              <a:ext uri="{FF2B5EF4-FFF2-40B4-BE49-F238E27FC236}">
+                <a16:creationId xmlns:a16="http://schemas.microsoft.com/office/drawing/2014/main" id="{DF13A28E-B43F-95A1-0CCB-A8FE6F35D6C9}"/>
+              </a:ext>
+            </a:extLst>
+          </p:cNvPr>
+          <p:cNvCxnSpPr>
+            <a:cxnSpLocks/>
+            <a:stCxn id="101" idx="0"/>
+            <a:endCxn id="19" idx="4"/>
+          </p:cNvCxnSpPr>
+          <p:nvPr/>
+        </p:nvCxnSpPr>
+        <p:spPr>
+          <a:xfrm flipV="1">
+            <a:off x="6083900" y="377038"/>
+            <a:ext cx="386247" cy="618116"/>
+          </a:xfrm>
+          <a:prstGeom prst="bentConnector2">
+            <a:avLst/>
+          </a:prstGeom>
+          <a:ln w="63500">
+            <a:solidFill>
+              <a:srgbClr val="FFC000"/>
+            </a:solidFill>
+            <a:prstDash val="sysDot"/>
+          </a:ln>
+        </p:spPr>
+        <p:style>
+          <a:lnRef idx="2">
+            <a:schemeClr val="accent1"/>
+          </a:lnRef>
+          <a:fillRef idx="0">
+            <a:schemeClr val="accent1"/>
+          </a:fillRef>
+          <a:effectRef idx="1">
+            <a:schemeClr val="accent1"/>
+          </a:effectRef>
+          <a:fontRef idx="minor">
+            <a:schemeClr val="tx1"/>
+          </a:fontRef>
+        </p:style>
+      </p:cxnSp>
+      <p:cxnSp>
+        <p:nvCxnSpPr>
+          <p:cNvPr id="84" name="カギ線コネクタ 83">
+            <a:extLst>
+              <a:ext uri="{FF2B5EF4-FFF2-40B4-BE49-F238E27FC236}">
+                <a16:creationId xmlns:a16="http://schemas.microsoft.com/office/drawing/2014/main" id="{A3947912-1BCC-6E49-A9A2-F8BBA3A31DAF}"/>
+              </a:ext>
+            </a:extLst>
+          </p:cNvPr>
+          <p:cNvCxnSpPr>
+            <a:cxnSpLocks/>
+            <a:stCxn id="70" idx="4"/>
+            <a:endCxn id="36" idx="0"/>
+          </p:cNvCxnSpPr>
+          <p:nvPr/>
+        </p:nvCxnSpPr>
+        <p:spPr>
+          <a:xfrm rot="10800000" flipV="1">
+            <a:off x="5021153" y="2196426"/>
+            <a:ext cx="2396655" cy="494757"/>
+          </a:xfrm>
+          <a:prstGeom prst="bentConnector2">
+            <a:avLst/>
+          </a:prstGeom>
+          <a:ln w="63500">
+            <a:solidFill>
+              <a:schemeClr val="tx1">
+                <a:lumMod val="50000"/>
+                <a:lumOff val="50000"/>
+              </a:schemeClr>
+            </a:solidFill>
+            <a:prstDash val="solid"/>
+          </a:ln>
+        </p:spPr>
+        <p:style>
+          <a:lnRef idx="2">
+            <a:schemeClr val="accent1"/>
+          </a:lnRef>
+          <a:fillRef idx="0">
+            <a:schemeClr val="accent1"/>
+          </a:fillRef>
+          <a:effectRef idx="1">
+            <a:schemeClr val="accent1"/>
+          </a:effectRef>
+          <a:fontRef idx="minor">
+            <a:schemeClr val="tx1"/>
+          </a:fontRef>
+        </p:style>
+      </p:cxnSp>
+      <p:cxnSp>
+        <p:nvCxnSpPr>
+          <p:cNvPr id="78" name="カギ線コネクタ 77">
+            <a:extLst>
+              <a:ext uri="{FF2B5EF4-FFF2-40B4-BE49-F238E27FC236}">
+                <a16:creationId xmlns:a16="http://schemas.microsoft.com/office/drawing/2014/main" id="{0A4241DB-9B79-A192-C6EA-780E9468FE78}"/>
+              </a:ext>
+            </a:extLst>
+          </p:cNvPr>
+          <p:cNvCxnSpPr>
+            <a:cxnSpLocks/>
+            <a:stCxn id="74" idx="0"/>
+            <a:endCxn id="62" idx="2"/>
+          </p:cNvCxnSpPr>
+          <p:nvPr/>
+        </p:nvCxnSpPr>
+        <p:spPr>
+          <a:xfrm>
+            <a:off x="7570829" y="1002962"/>
+            <a:ext cx="804990" cy="1905935"/>
+          </a:xfrm>
+          <a:prstGeom prst="straightConnector1">
+            <a:avLst/>
+          </a:prstGeom>
+          <a:ln w="63500">
+            <a:solidFill>
+              <a:schemeClr val="accent6"/>
+            </a:solidFill>
+            <a:prstDash val="sysDot"/>
+          </a:ln>
+        </p:spPr>
+        <p:style>
+          <a:lnRef idx="2">
+            <a:schemeClr val="accent1"/>
+          </a:lnRef>
+          <a:fillRef idx="0">
+            <a:schemeClr val="accent1"/>
+          </a:fillRef>
+          <a:effectRef idx="1">
+            <a:schemeClr val="accent1"/>
+          </a:effectRef>
+          <a:fontRef idx="minor">
+            <a:schemeClr val="tx1"/>
+          </a:fontRef>
+        </p:style>
+      </p:cxnSp>
+      <p:cxnSp>
+        <p:nvCxnSpPr>
+          <p:cNvPr id="11" name="カギ線コネクタ 10">
+            <a:extLst>
+              <a:ext uri="{FF2B5EF4-FFF2-40B4-BE49-F238E27FC236}">
+                <a16:creationId xmlns:a16="http://schemas.microsoft.com/office/drawing/2014/main" id="{20561645-1787-CCAF-A1C6-D0390010BEF2}"/>
+              </a:ext>
+            </a:extLst>
+          </p:cNvPr>
+          <p:cNvCxnSpPr>
+            <a:cxnSpLocks/>
+            <a:stCxn id="57" idx="2"/>
+            <a:endCxn id="53" idx="0"/>
+          </p:cNvCxnSpPr>
+          <p:nvPr/>
+        </p:nvCxnSpPr>
+        <p:spPr>
+          <a:xfrm flipH="1">
+            <a:off x="7600522" y="2005942"/>
+            <a:ext cx="786126" cy="507164"/>
+          </a:xfrm>
+          <a:prstGeom prst="straightConnector1">
+            <a:avLst/>
+          </a:prstGeom>
+          <a:ln w="63500">
+            <a:solidFill>
+              <a:srgbClr val="FF0000"/>
+            </a:solidFill>
+          </a:ln>
+        </p:spPr>
+        <p:style>
+          <a:lnRef idx="2">
+            <a:schemeClr val="accent1"/>
+          </a:lnRef>
+          <a:fillRef idx="0">
+            <a:schemeClr val="accent1"/>
+          </a:fillRef>
+          <a:effectRef idx="1">
+            <a:schemeClr val="accent1"/>
+          </a:effectRef>
+          <a:fontRef idx="minor">
+            <a:schemeClr val="tx1"/>
+          </a:fontRef>
+        </p:style>
+      </p:cxnSp>
+      <p:sp>
+        <p:nvSpPr>
+          <p:cNvPr id="19" name="円/楕円 18">
+            <a:extLst>
+              <a:ext uri="{FF2B5EF4-FFF2-40B4-BE49-F238E27FC236}">
+                <a16:creationId xmlns:a16="http://schemas.microsoft.com/office/drawing/2014/main" id="{03BDAA98-2E9F-C8D3-202F-1869A9542B4A}"/>
+              </a:ext>
+            </a:extLst>
+          </p:cNvPr>
+          <p:cNvSpPr/>
+          <p:nvPr/>
+        </p:nvSpPr>
+        <p:spPr>
+          <a:xfrm>
+            <a:off x="6385977" y="202243"/>
+            <a:ext cx="168339" cy="174795"/>
+          </a:xfrm>
+          <a:prstGeom prst="ellipse">
+            <a:avLst/>
+          </a:prstGeom>
+          <a:solidFill>
+            <a:schemeClr val="bg1"/>
+          </a:solidFill>
+          <a:ln>
+            <a:solidFill>
+              <a:schemeClr val="tx1"/>
+            </a:solidFill>
+          </a:ln>
+        </p:spPr>
+        <p:style>
+          <a:lnRef idx="2">
+            <a:schemeClr val="accent1">
+              <a:shade val="15000"/>
+            </a:schemeClr>
+          </a:lnRef>
+          <a:fillRef idx="1">
+            <a:schemeClr val="accent1"/>
+          </a:fillRef>
+          <a:effectRef idx="0">
+            <a:schemeClr val="accent1"/>
+          </a:effectRef>
+          <a:fontRef idx="minor">
+            <a:schemeClr val="lt1"/>
+          </a:fontRef>
+        </p:style>
+        <p:txBody>
+          <a:bodyPr rtlCol="0" anchor="ctr"/>
+          <a:lstStyle/>
+          <a:p>
+            <a:pPr algn="ctr"/>
+            <a:endParaRPr kumimoji="1" lang="ja-JP" altLang="en-US"/>
+          </a:p>
+        </p:txBody>
+      </p:sp>
+      <p:sp>
+        <p:nvSpPr>
+          <p:cNvPr id="22" name="円/楕円 21">
+            <a:extLst>
+              <a:ext uri="{FF2B5EF4-FFF2-40B4-BE49-F238E27FC236}">
+                <a16:creationId xmlns:a16="http://schemas.microsoft.com/office/drawing/2014/main" id="{B3C69EAD-569C-1357-DC62-3930FF566E73}"/>
+              </a:ext>
+            </a:extLst>
+          </p:cNvPr>
+          <p:cNvSpPr/>
+          <p:nvPr/>
+        </p:nvSpPr>
+        <p:spPr>
+          <a:xfrm>
+            <a:off x="6609631" y="414018"/>
+            <a:ext cx="168339" cy="174795"/>
+          </a:xfrm>
+          <a:prstGeom prst="ellipse">
+            <a:avLst/>
+          </a:prstGeom>
+          <a:solidFill>
+            <a:schemeClr val="bg1"/>
+          </a:solidFill>
+          <a:ln>
+            <a:solidFill>
+              <a:schemeClr val="tx1"/>
+            </a:solidFill>
+          </a:ln>
+        </p:spPr>
+        <p:style>
+          <a:lnRef idx="2">
+            <a:schemeClr val="accent1">
+              <a:shade val="15000"/>
+            </a:schemeClr>
+          </a:lnRef>
+          <a:fillRef idx="1">
+            <a:schemeClr val="accent1"/>
+          </a:fillRef>
+          <a:effectRef idx="0">
+            <a:schemeClr val="accent1"/>
+          </a:effectRef>
+          <a:fontRef idx="minor">
+            <a:schemeClr val="lt1"/>
+          </a:fontRef>
+        </p:style>
+        <p:txBody>
+          <a:bodyPr rtlCol="0" anchor="ctr"/>
+          <a:lstStyle/>
+          <a:p>
+            <a:pPr algn="ctr"/>
+            <a:endParaRPr kumimoji="1" lang="ja-JP" altLang="en-US"/>
+          </a:p>
+        </p:txBody>
+      </p:sp>
+      <p:cxnSp>
+        <p:nvCxnSpPr>
+          <p:cNvPr id="24" name="カギ線コネクタ 23">
+            <a:extLst>
+              <a:ext uri="{FF2B5EF4-FFF2-40B4-BE49-F238E27FC236}">
+                <a16:creationId xmlns:a16="http://schemas.microsoft.com/office/drawing/2014/main" id="{B8A1DCD7-DCFF-AD48-5612-0CC7FB652AE2}"/>
+              </a:ext>
+            </a:extLst>
+          </p:cNvPr>
+          <p:cNvCxnSpPr>
+            <a:cxnSpLocks/>
+            <a:stCxn id="19" idx="6"/>
+            <a:endCxn id="49" idx="0"/>
+          </p:cNvCxnSpPr>
+          <p:nvPr/>
+        </p:nvCxnSpPr>
+        <p:spPr>
+          <a:xfrm>
+            <a:off x="6554316" y="289641"/>
+            <a:ext cx="1550671" cy="644912"/>
+          </a:xfrm>
+          <a:prstGeom prst="bentConnector2">
+            <a:avLst/>
+          </a:prstGeom>
+          <a:ln w="63500">
+            <a:solidFill>
+              <a:srgbClr val="FFC000"/>
+            </a:solidFill>
+            <a:prstDash val="sysDot"/>
+          </a:ln>
+        </p:spPr>
+        <p:style>
+          <a:lnRef idx="2">
+            <a:schemeClr val="accent1"/>
+          </a:lnRef>
+          <a:fillRef idx="0">
+            <a:schemeClr val="accent1"/>
+          </a:fillRef>
+          <a:effectRef idx="1">
+            <a:schemeClr val="accent1"/>
+          </a:effectRef>
+          <a:fontRef idx="minor">
+            <a:schemeClr val="tx1"/>
+          </a:fontRef>
+        </p:style>
+      </p:cxnSp>
+      <p:cxnSp>
+        <p:nvCxnSpPr>
+          <p:cNvPr id="40" name="カギ線コネクタ 39">
+            <a:extLst>
+              <a:ext uri="{FF2B5EF4-FFF2-40B4-BE49-F238E27FC236}">
+                <a16:creationId xmlns:a16="http://schemas.microsoft.com/office/drawing/2014/main" id="{6DC12CC3-C334-1C56-1FB5-BFEFC4BC20A3}"/>
+              </a:ext>
+            </a:extLst>
+          </p:cNvPr>
+          <p:cNvCxnSpPr>
+            <a:cxnSpLocks/>
+            <a:stCxn id="22" idx="6"/>
+            <a:endCxn id="48" idx="0"/>
+          </p:cNvCxnSpPr>
+          <p:nvPr/>
+        </p:nvCxnSpPr>
+        <p:spPr>
+          <a:xfrm>
+            <a:off x="6777970" y="501416"/>
+            <a:ext cx="1103363" cy="684497"/>
+          </a:xfrm>
+          <a:prstGeom prst="bentConnector2">
+            <a:avLst/>
+          </a:prstGeom>
+          <a:ln w="63500">
+            <a:solidFill>
+              <a:schemeClr val="tx1">
+                <a:lumMod val="50000"/>
+                <a:lumOff val="50000"/>
+              </a:schemeClr>
+            </a:solidFill>
+            <a:prstDash val="sysDot"/>
+          </a:ln>
+        </p:spPr>
+        <p:style>
+          <a:lnRef idx="2">
+            <a:schemeClr val="accent1"/>
+          </a:lnRef>
+          <a:fillRef idx="0">
+            <a:schemeClr val="accent1"/>
+          </a:fillRef>
+          <a:effectRef idx="1">
+            <a:schemeClr val="accent1"/>
+          </a:effectRef>
+          <a:fontRef idx="minor">
+            <a:schemeClr val="tx1"/>
+          </a:fontRef>
+        </p:style>
+      </p:cxnSp>
+      <p:sp>
+        <p:nvSpPr>
+          <p:cNvPr id="48" name="円/楕円 47">
+            <a:extLst>
+              <a:ext uri="{FF2B5EF4-FFF2-40B4-BE49-F238E27FC236}">
+                <a16:creationId xmlns:a16="http://schemas.microsoft.com/office/drawing/2014/main" id="{E665B1D0-5EA8-D20F-20F7-B97960EB6B7C}"/>
+              </a:ext>
+            </a:extLst>
+          </p:cNvPr>
+          <p:cNvSpPr/>
+          <p:nvPr/>
+        </p:nvSpPr>
+        <p:spPr>
+          <a:xfrm>
+            <a:off x="7797163" y="1185913"/>
+            <a:ext cx="168339" cy="174795"/>
+          </a:xfrm>
+          <a:prstGeom prst="ellipse">
+            <a:avLst/>
+          </a:prstGeom>
+          <a:solidFill>
+            <a:schemeClr val="bg1"/>
+          </a:solidFill>
+          <a:ln>
+            <a:solidFill>
+              <a:schemeClr val="tx1"/>
+            </a:solidFill>
+          </a:ln>
+        </p:spPr>
+        <p:style>
+          <a:lnRef idx="2">
+            <a:schemeClr val="accent1">
+              <a:shade val="15000"/>
+            </a:schemeClr>
+          </a:lnRef>
+          <a:fillRef idx="1">
+            <a:schemeClr val="accent1"/>
+          </a:fillRef>
+          <a:effectRef idx="0">
+            <a:schemeClr val="accent1"/>
+          </a:effectRef>
+          <a:fontRef idx="minor">
+            <a:schemeClr val="lt1"/>
+          </a:fontRef>
+        </p:style>
+        <p:txBody>
+          <a:bodyPr rtlCol="0" anchor="ctr"/>
+          <a:lstStyle/>
+          <a:p>
+            <a:pPr algn="ctr"/>
+            <a:endParaRPr kumimoji="1" lang="ja-JP" altLang="en-US"/>
+          </a:p>
+        </p:txBody>
+      </p:sp>
+      <p:sp>
+        <p:nvSpPr>
+          <p:cNvPr id="49" name="円/楕円 48">
+            <a:extLst>
+              <a:ext uri="{FF2B5EF4-FFF2-40B4-BE49-F238E27FC236}">
+                <a16:creationId xmlns:a16="http://schemas.microsoft.com/office/drawing/2014/main" id="{663C3100-C2EE-9F6B-54DC-B66373C82ACD}"/>
+              </a:ext>
+            </a:extLst>
+          </p:cNvPr>
+          <p:cNvSpPr/>
+          <p:nvPr/>
+        </p:nvSpPr>
+        <p:spPr>
+          <a:xfrm>
+            <a:off x="8020817" y="934553"/>
+            <a:ext cx="168339" cy="174795"/>
+          </a:xfrm>
+          <a:prstGeom prst="ellipse">
+            <a:avLst/>
+          </a:prstGeom>
+          <a:solidFill>
+            <a:schemeClr val="bg1"/>
+          </a:solidFill>
+          <a:ln>
+            <a:solidFill>
+              <a:schemeClr val="tx1"/>
+            </a:solidFill>
+          </a:ln>
+        </p:spPr>
+        <p:style>
+          <a:lnRef idx="2">
+            <a:schemeClr val="accent1">
+              <a:shade val="15000"/>
+            </a:schemeClr>
+          </a:lnRef>
+          <a:fillRef idx="1">
+            <a:schemeClr val="accent1"/>
+          </a:fillRef>
+          <a:effectRef idx="0">
+            <a:schemeClr val="accent1"/>
+          </a:effectRef>
+          <a:fontRef idx="minor">
+            <a:schemeClr val="lt1"/>
+          </a:fontRef>
+        </p:style>
+        <p:txBody>
+          <a:bodyPr rtlCol="0" anchor="ctr"/>
+          <a:lstStyle/>
+          <a:p>
+            <a:pPr algn="ctr"/>
+            <a:endParaRPr kumimoji="1" lang="ja-JP" altLang="en-US"/>
+          </a:p>
+        </p:txBody>
+      </p:sp>
+      <p:cxnSp>
+        <p:nvCxnSpPr>
+          <p:cNvPr id="54" name="カギ線コネクタ 53">
+            <a:extLst>
+              <a:ext uri="{FF2B5EF4-FFF2-40B4-BE49-F238E27FC236}">
+                <a16:creationId xmlns:a16="http://schemas.microsoft.com/office/drawing/2014/main" id="{3EE0843D-9E9E-5178-A0CA-62A5879E4A79}"/>
+              </a:ext>
+            </a:extLst>
+          </p:cNvPr>
+          <p:cNvCxnSpPr>
+            <a:cxnSpLocks/>
+            <a:stCxn id="59" idx="2"/>
+            <a:endCxn id="48" idx="4"/>
+          </p:cNvCxnSpPr>
+          <p:nvPr/>
+        </p:nvCxnSpPr>
+        <p:spPr>
+          <a:xfrm flipH="1" flipV="1">
+            <a:off x="7881333" y="1360708"/>
+            <a:ext cx="497075" cy="1254836"/>
+          </a:xfrm>
+          <a:prstGeom prst="straightConnector1">
+            <a:avLst/>
+          </a:prstGeom>
+          <a:ln w="63500">
+            <a:solidFill>
+              <a:schemeClr val="tx1">
+                <a:lumMod val="50000"/>
+                <a:lumOff val="50000"/>
+              </a:schemeClr>
+            </a:solidFill>
+            <a:prstDash val="sysDot"/>
+          </a:ln>
+        </p:spPr>
+        <p:style>
+          <a:lnRef idx="2">
+            <a:schemeClr val="accent1"/>
+          </a:lnRef>
+          <a:fillRef idx="0">
+            <a:schemeClr val="accent1"/>
+          </a:fillRef>
+          <a:effectRef idx="1">
+            <a:schemeClr val="accent1"/>
+          </a:effectRef>
+          <a:fontRef idx="minor">
+            <a:schemeClr val="tx1"/>
+          </a:fontRef>
+        </p:style>
+      </p:cxnSp>
+      <p:cxnSp>
+        <p:nvCxnSpPr>
+          <p:cNvPr id="79" name="カギ線コネクタ 78">
+            <a:extLst>
+              <a:ext uri="{FF2B5EF4-FFF2-40B4-BE49-F238E27FC236}">
+                <a16:creationId xmlns:a16="http://schemas.microsoft.com/office/drawing/2014/main" id="{A062C659-2DC0-25AB-C9DF-0C396013118C}"/>
+              </a:ext>
+            </a:extLst>
+          </p:cNvPr>
+          <p:cNvCxnSpPr>
+            <a:cxnSpLocks/>
+            <a:stCxn id="49" idx="4"/>
+            <a:endCxn id="58" idx="2"/>
+          </p:cNvCxnSpPr>
+          <p:nvPr/>
+        </p:nvCxnSpPr>
+        <p:spPr>
+          <a:xfrm>
+            <a:off x="8104987" y="1109348"/>
+            <a:ext cx="281661" cy="1193158"/>
+          </a:xfrm>
+          <a:prstGeom prst="straightConnector1">
+            <a:avLst/>
+          </a:prstGeom>
+          <a:ln w="63500">
+            <a:solidFill>
+              <a:srgbClr val="FFC000"/>
+            </a:solidFill>
+            <a:prstDash val="sysDot"/>
+          </a:ln>
+        </p:spPr>
+        <p:style>
+          <a:lnRef idx="2">
+            <a:schemeClr val="accent1"/>
+          </a:lnRef>
+          <a:fillRef idx="0">
+            <a:schemeClr val="accent1"/>
+          </a:fillRef>
+          <a:effectRef idx="1">
+            <a:schemeClr val="accent1"/>
+          </a:effectRef>
+          <a:fontRef idx="minor">
+            <a:schemeClr val="tx1"/>
+          </a:fontRef>
+        </p:style>
+      </p:cxnSp>
+      <p:grpSp>
+        <p:nvGrpSpPr>
+          <p:cNvPr id="99" name="グループ化 98">
+            <a:extLst>
+              <a:ext uri="{FF2B5EF4-FFF2-40B4-BE49-F238E27FC236}">
+                <a16:creationId xmlns:a16="http://schemas.microsoft.com/office/drawing/2014/main" id="{CBFA37E9-A83E-BD19-D886-FBD6C8A2B32C}"/>
+              </a:ext>
+            </a:extLst>
+          </p:cNvPr>
+          <p:cNvGrpSpPr/>
+          <p:nvPr/>
+        </p:nvGrpSpPr>
+        <p:grpSpPr>
+          <a:xfrm rot="10800000">
+            <a:off x="3228976" y="2169077"/>
+            <a:ext cx="422151" cy="746987"/>
+            <a:chOff x="4618386" y="586941"/>
+            <a:chExt cx="422151" cy="746987"/>
+          </a:xfrm>
+        </p:grpSpPr>
+        <p:sp>
+          <p:nvSpPr>
+            <p:cNvPr id="100" name="正方形/長方形 99">
+              <a:extLst>
+                <a:ext uri="{FF2B5EF4-FFF2-40B4-BE49-F238E27FC236}">
+                  <a16:creationId xmlns:a16="http://schemas.microsoft.com/office/drawing/2014/main" id="{C78E386F-BCD1-77F4-5E10-998F304B3A0A}"/>
+                </a:ext>
+              </a:extLst>
+            </p:cNvPr>
+            <p:cNvSpPr/>
+            <p:nvPr/>
+          </p:nvSpPr>
+          <p:spPr>
+            <a:xfrm>
+              <a:off x="4618386" y="586941"/>
+              <a:ext cx="422151" cy="746987"/>
+            </a:xfrm>
+            <a:prstGeom prst="rect">
+              <a:avLst/>
+            </a:prstGeom>
+          </p:spPr>
+          <p:style>
+            <a:lnRef idx="2">
+              <a:schemeClr val="accent1">
+                <a:shade val="15000"/>
+              </a:schemeClr>
+            </a:lnRef>
+            <a:fillRef idx="1">
+              <a:schemeClr val="accent1"/>
+            </a:fillRef>
+            <a:effectRef idx="0">
+              <a:schemeClr val="accent1"/>
+            </a:effectRef>
+            <a:fontRef idx="minor">
+              <a:schemeClr val="lt1"/>
+            </a:fontRef>
+          </p:style>
+          <p:txBody>
+            <a:bodyPr rtlCol="0" anchor="ctr"/>
+            <a:lstStyle/>
+            <a:p>
+              <a:pPr algn="ctr"/>
+              <a:endParaRPr kumimoji="1" lang="ja-JP" altLang="en-US"/>
+            </a:p>
+          </p:txBody>
+        </p:sp>
+        <p:grpSp>
+          <p:nvGrpSpPr>
+            <p:cNvPr id="103" name="グループ化 102">
+              <a:extLst>
+                <a:ext uri="{FF2B5EF4-FFF2-40B4-BE49-F238E27FC236}">
+                  <a16:creationId xmlns:a16="http://schemas.microsoft.com/office/drawing/2014/main" id="{A276CE52-B0AD-9AEB-DCBB-E4EEC28CBC16}"/>
+                </a:ext>
+              </a:extLst>
+            </p:cNvPr>
+            <p:cNvGrpSpPr/>
+            <p:nvPr/>
+          </p:nvGrpSpPr>
+          <p:grpSpPr>
+            <a:xfrm>
+              <a:off x="4735154" y="680547"/>
+              <a:ext cx="176579" cy="487833"/>
+              <a:chOff x="8159036" y="1423788"/>
+              <a:chExt cx="176579" cy="487833"/>
+            </a:xfrm>
+          </p:grpSpPr>
+          <p:sp>
+            <p:nvSpPr>
+              <p:cNvPr id="104" name="円/楕円 103">
+                <a:extLst>
+                  <a:ext uri="{FF2B5EF4-FFF2-40B4-BE49-F238E27FC236}">
+                    <a16:creationId xmlns:a16="http://schemas.microsoft.com/office/drawing/2014/main" id="{5209DB94-24AA-FBD3-4DE6-949E26B5E764}"/>
+                  </a:ext>
+                </a:extLst>
+              </p:cNvPr>
+              <p:cNvSpPr/>
+              <p:nvPr/>
+            </p:nvSpPr>
+            <p:spPr>
+              <a:xfrm>
+                <a:off x="8167276" y="1423788"/>
+                <a:ext cx="168339" cy="174795"/>
+              </a:xfrm>
+              <a:prstGeom prst="ellipse">
+                <a:avLst/>
+              </a:prstGeom>
+              <a:solidFill>
+                <a:schemeClr val="bg1"/>
+              </a:solidFill>
+              <a:ln>
+                <a:solidFill>
+                  <a:schemeClr val="tx1"/>
+                </a:solidFill>
+              </a:ln>
+            </p:spPr>
+            <p:style>
+              <a:lnRef idx="2">
+                <a:schemeClr val="accent1">
+                  <a:shade val="15000"/>
+                </a:schemeClr>
+              </a:lnRef>
+              <a:fillRef idx="1">
+                <a:schemeClr val="accent1"/>
+              </a:fillRef>
+              <a:effectRef idx="0">
+                <a:schemeClr val="accent1"/>
+              </a:effectRef>
+              <a:fontRef idx="minor">
+                <a:schemeClr val="lt1"/>
+              </a:fontRef>
+            </p:style>
+            <p:txBody>
+              <a:bodyPr rtlCol="0" anchor="ctr"/>
+              <a:lstStyle/>
+              <a:p>
+                <a:pPr algn="ctr"/>
+                <a:endParaRPr kumimoji="1" lang="ja-JP" altLang="en-US"/>
+              </a:p>
+            </p:txBody>
+          </p:sp>
+          <p:sp>
+            <p:nvSpPr>
+              <p:cNvPr id="105" name="円/楕円 104">
+                <a:extLst>
+                  <a:ext uri="{FF2B5EF4-FFF2-40B4-BE49-F238E27FC236}">
+                    <a16:creationId xmlns:a16="http://schemas.microsoft.com/office/drawing/2014/main" id="{4E13CBCC-55E0-765F-0635-94EC610F4597}"/>
+                  </a:ext>
+                </a:extLst>
+              </p:cNvPr>
+              <p:cNvSpPr/>
+              <p:nvPr/>
+            </p:nvSpPr>
+            <p:spPr>
+              <a:xfrm>
+                <a:off x="8159036" y="1736826"/>
+                <a:ext cx="168339" cy="174795"/>
+              </a:xfrm>
+              <a:prstGeom prst="ellipse">
+                <a:avLst/>
+              </a:prstGeom>
+              <a:solidFill>
+                <a:schemeClr val="bg1"/>
+              </a:solidFill>
+              <a:ln>
+                <a:solidFill>
+                  <a:schemeClr val="tx1"/>
+                </a:solidFill>
+              </a:ln>
+            </p:spPr>
+            <p:style>
+              <a:lnRef idx="2">
+                <a:schemeClr val="accent1">
+                  <a:shade val="15000"/>
+                </a:schemeClr>
+              </a:lnRef>
+              <a:fillRef idx="1">
+                <a:schemeClr val="accent1"/>
+              </a:fillRef>
+              <a:effectRef idx="0">
+                <a:schemeClr val="accent1"/>
+              </a:effectRef>
+              <a:fontRef idx="minor">
+                <a:schemeClr val="lt1"/>
+              </a:fontRef>
+            </p:style>
+            <p:txBody>
+              <a:bodyPr rtlCol="0" anchor="ctr"/>
+              <a:lstStyle/>
+              <a:p>
+                <a:pPr algn="ctr"/>
+                <a:endParaRPr kumimoji="1" lang="ja-JP" altLang="en-US"/>
+              </a:p>
+            </p:txBody>
+          </p:sp>
+        </p:grpSp>
+      </p:grpSp>
+      <p:sp>
+        <p:nvSpPr>
+          <p:cNvPr id="106" name="テキスト ボックス 105">
+            <a:extLst>
+              <a:ext uri="{FF2B5EF4-FFF2-40B4-BE49-F238E27FC236}">
+                <a16:creationId xmlns:a16="http://schemas.microsoft.com/office/drawing/2014/main" id="{990952C8-2602-53ED-B6C4-F49ED68FE9DA}"/>
+              </a:ext>
+            </a:extLst>
+          </p:cNvPr>
+          <p:cNvSpPr txBox="1"/>
+          <p:nvPr/>
+        </p:nvSpPr>
+        <p:spPr>
+          <a:xfrm>
+            <a:off x="2414699" y="2269734"/>
+            <a:ext cx="785793" cy="646331"/>
+          </a:xfrm>
+          <a:prstGeom prst="rect">
+            <a:avLst/>
+          </a:prstGeom>
+          <a:noFill/>
+        </p:spPr>
+        <p:txBody>
+          <a:bodyPr wrap="none" rtlCol="0">
+            <a:spAutoFit/>
+          </a:bodyPr>
+          <a:lstStyle/>
+          <a:p>
+            <a:r>
+              <a:rPr kumimoji="1" lang="en-US" altLang="ja-JP" dirty="0"/>
+              <a:t>VBAT</a:t>
+            </a:r>
+          </a:p>
+          <a:p>
+            <a:r>
+              <a:rPr kumimoji="1" lang="en-US" altLang="ja-JP" dirty="0"/>
+              <a:t>GND</a:t>
+            </a:r>
+            <a:endParaRPr kumimoji="1" lang="ja-JP" altLang="en-US"/>
+          </a:p>
+        </p:txBody>
+      </p:sp>
+      <p:cxnSp>
+        <p:nvCxnSpPr>
+          <p:cNvPr id="107" name="カギ線コネクタ 106">
+            <a:extLst>
+              <a:ext uri="{FF2B5EF4-FFF2-40B4-BE49-F238E27FC236}">
+                <a16:creationId xmlns:a16="http://schemas.microsoft.com/office/drawing/2014/main" id="{798933F6-F9DD-1338-5129-C1CEA391A8DD}"/>
+              </a:ext>
+            </a:extLst>
+          </p:cNvPr>
+          <p:cNvCxnSpPr>
+            <a:cxnSpLocks/>
+            <a:stCxn id="105" idx="2"/>
+            <a:endCxn id="28" idx="2"/>
+          </p:cNvCxnSpPr>
+          <p:nvPr/>
+        </p:nvCxnSpPr>
+        <p:spPr>
+          <a:xfrm>
+            <a:off x="3534359" y="2422022"/>
+            <a:ext cx="454578" cy="366459"/>
+          </a:xfrm>
+          <a:prstGeom prst="straightConnector1">
+            <a:avLst/>
+          </a:prstGeom>
+          <a:ln w="63500">
+            <a:solidFill>
+              <a:srgbClr val="FF0000"/>
+            </a:solidFill>
+            <a:prstDash val="sysDot"/>
+          </a:ln>
+        </p:spPr>
+        <p:style>
+          <a:lnRef idx="2">
+            <a:schemeClr val="accent1"/>
+          </a:lnRef>
+          <a:fillRef idx="0">
+            <a:schemeClr val="accent1"/>
+          </a:fillRef>
+          <a:effectRef idx="1">
+            <a:schemeClr val="accent1"/>
+          </a:effectRef>
+          <a:fontRef idx="minor">
+            <a:schemeClr val="tx1"/>
+          </a:fontRef>
+        </p:style>
+      </p:cxnSp>
+      <p:cxnSp>
+        <p:nvCxnSpPr>
+          <p:cNvPr id="120" name="カギ線コネクタ 119">
+            <a:extLst>
+              <a:ext uri="{FF2B5EF4-FFF2-40B4-BE49-F238E27FC236}">
+                <a16:creationId xmlns:a16="http://schemas.microsoft.com/office/drawing/2014/main" id="{35AFE3B7-A421-8319-E408-487EF3BED573}"/>
+              </a:ext>
+            </a:extLst>
+          </p:cNvPr>
+          <p:cNvCxnSpPr>
+            <a:cxnSpLocks/>
+            <a:stCxn id="104" idx="0"/>
+            <a:endCxn id="123" idx="0"/>
+          </p:cNvCxnSpPr>
+          <p:nvPr/>
+        </p:nvCxnSpPr>
+        <p:spPr>
+          <a:xfrm rot="5400000">
+            <a:off x="3162346" y="2975971"/>
+            <a:ext cx="433117" cy="126091"/>
+          </a:xfrm>
+          <a:prstGeom prst="bentConnector3">
+            <a:avLst>
+              <a:gd name="adj1" fmla="val 50000"/>
+            </a:avLst>
+          </a:prstGeom>
+          <a:ln w="63500">
+            <a:solidFill>
+              <a:schemeClr val="tx1">
+                <a:lumMod val="50000"/>
+                <a:lumOff val="50000"/>
+              </a:schemeClr>
+            </a:solidFill>
+            <a:prstDash val="sysDot"/>
+          </a:ln>
+        </p:spPr>
+        <p:style>
+          <a:lnRef idx="2">
+            <a:schemeClr val="accent1"/>
+          </a:lnRef>
+          <a:fillRef idx="0">
+            <a:schemeClr val="accent1"/>
+          </a:fillRef>
+          <a:effectRef idx="1">
+            <a:schemeClr val="accent1"/>
+          </a:effectRef>
+          <a:fontRef idx="minor">
+            <a:schemeClr val="tx1"/>
+          </a:fontRef>
+        </p:style>
+      </p:cxnSp>
+      <p:grpSp>
+        <p:nvGrpSpPr>
+          <p:cNvPr id="125" name="グループ化 124">
+            <a:extLst>
+              <a:ext uri="{FF2B5EF4-FFF2-40B4-BE49-F238E27FC236}">
+                <a16:creationId xmlns:a16="http://schemas.microsoft.com/office/drawing/2014/main" id="{AD714E79-93F7-5203-EEB6-F30B97D0B25F}"/>
+              </a:ext>
+            </a:extLst>
+          </p:cNvPr>
+          <p:cNvGrpSpPr/>
+          <p:nvPr/>
+        </p:nvGrpSpPr>
+        <p:grpSpPr>
+          <a:xfrm>
+            <a:off x="3164016" y="3255575"/>
+            <a:ext cx="211403" cy="384340"/>
+            <a:chOff x="3164016" y="3255575"/>
+            <a:chExt cx="211403" cy="384340"/>
+          </a:xfrm>
+        </p:grpSpPr>
+        <p:sp>
+          <p:nvSpPr>
+            <p:cNvPr id="123" name="正方形/長方形 122">
+              <a:extLst>
+                <a:ext uri="{FF2B5EF4-FFF2-40B4-BE49-F238E27FC236}">
+                  <a16:creationId xmlns:a16="http://schemas.microsoft.com/office/drawing/2014/main" id="{6BBAE06F-522F-85C5-8527-5E627C7E2F2E}"/>
+                </a:ext>
+              </a:extLst>
+            </p:cNvPr>
+            <p:cNvSpPr/>
+            <p:nvPr/>
+          </p:nvSpPr>
+          <p:spPr>
+            <a:xfrm>
+              <a:off x="3256429" y="3255575"/>
+              <a:ext cx="118858" cy="384340"/>
+            </a:xfrm>
+            <a:prstGeom prst="rect">
+              <a:avLst/>
+            </a:prstGeom>
+            <a:ln>
+              <a:noFill/>
+            </a:ln>
+          </p:spPr>
+          <p:style>
+            <a:lnRef idx="2">
+              <a:schemeClr val="accent1">
+                <a:shade val="15000"/>
+              </a:schemeClr>
+            </a:lnRef>
+            <a:fillRef idx="1">
+              <a:schemeClr val="accent1"/>
+            </a:fillRef>
+            <a:effectRef idx="0">
+              <a:schemeClr val="accent1"/>
+            </a:effectRef>
+            <a:fontRef idx="minor">
+              <a:schemeClr val="lt1"/>
+            </a:fontRef>
+          </p:style>
+          <p:txBody>
+            <a:bodyPr rtlCol="0" anchor="ctr"/>
+            <a:lstStyle/>
+            <a:p>
+              <a:pPr algn="ctr"/>
+              <a:endParaRPr kumimoji="1" lang="ja-JP" altLang="en-US"/>
+            </a:p>
+          </p:txBody>
+        </p:sp>
+        <p:sp>
+          <p:nvSpPr>
+            <p:cNvPr id="124" name="正方形/長方形 123">
+              <a:extLst>
+                <a:ext uri="{FF2B5EF4-FFF2-40B4-BE49-F238E27FC236}">
+                  <a16:creationId xmlns:a16="http://schemas.microsoft.com/office/drawing/2014/main" id="{112C5B89-FDE3-C782-0A07-2AEB289A868B}"/>
+                </a:ext>
+              </a:extLst>
+            </p:cNvPr>
+            <p:cNvSpPr/>
+            <p:nvPr/>
+          </p:nvSpPr>
+          <p:spPr>
+            <a:xfrm rot="5400000">
+              <a:off x="3209575" y="3352654"/>
+              <a:ext cx="120286" cy="211403"/>
+            </a:xfrm>
+            <a:prstGeom prst="rect">
+              <a:avLst/>
+            </a:prstGeom>
+            <a:ln>
+              <a:noFill/>
+            </a:ln>
+          </p:spPr>
+          <p:style>
+            <a:lnRef idx="2">
+              <a:schemeClr val="accent1">
+                <a:shade val="15000"/>
+              </a:schemeClr>
+            </a:lnRef>
+            <a:fillRef idx="1">
+              <a:schemeClr val="accent1"/>
+            </a:fillRef>
+            <a:effectRef idx="0">
+              <a:schemeClr val="accent1"/>
+            </a:effectRef>
+            <a:fontRef idx="minor">
+              <a:schemeClr val="lt1"/>
+            </a:fontRef>
+          </p:style>
+          <p:txBody>
+            <a:bodyPr rtlCol="0" anchor="ctr"/>
+            <a:lstStyle/>
+            <a:p>
+              <a:pPr algn="ctr"/>
+              <a:endParaRPr kumimoji="1" lang="ja-JP" altLang="en-US"/>
+            </a:p>
+          </p:txBody>
+        </p:sp>
+      </p:grpSp>
+      <p:cxnSp>
+        <p:nvCxnSpPr>
+          <p:cNvPr id="132" name="カギ線コネクタ 131">
+            <a:extLst>
+              <a:ext uri="{FF2B5EF4-FFF2-40B4-BE49-F238E27FC236}">
+                <a16:creationId xmlns:a16="http://schemas.microsoft.com/office/drawing/2014/main" id="{37CFAEE7-FE86-5732-4DF4-DF08B7A04931}"/>
+              </a:ext>
+            </a:extLst>
+          </p:cNvPr>
+          <p:cNvCxnSpPr>
+            <a:cxnSpLocks/>
+            <a:stCxn id="37" idx="2"/>
+            <a:endCxn id="124" idx="0"/>
+          </p:cNvCxnSpPr>
+          <p:nvPr/>
+        </p:nvCxnSpPr>
+        <p:spPr>
+          <a:xfrm rot="10800000" flipV="1">
+            <a:off x="3375421" y="3405994"/>
+            <a:ext cx="601641" cy="52361"/>
+          </a:xfrm>
+          <a:prstGeom prst="bentConnector3">
+            <a:avLst>
+              <a:gd name="adj1" fmla="val 50000"/>
+            </a:avLst>
+          </a:prstGeom>
+          <a:ln w="63500">
+            <a:solidFill>
+              <a:schemeClr val="tx1">
+                <a:lumMod val="50000"/>
+                <a:lumOff val="50000"/>
+              </a:schemeClr>
+            </a:solidFill>
+            <a:prstDash val="sysDot"/>
+          </a:ln>
+        </p:spPr>
+        <p:style>
+          <a:lnRef idx="2">
+            <a:schemeClr val="accent1"/>
+          </a:lnRef>
+          <a:fillRef idx="0">
+            <a:schemeClr val="accent1"/>
+          </a:fillRef>
+          <a:effectRef idx="1">
+            <a:schemeClr val="accent1"/>
+          </a:effectRef>
+          <a:fontRef idx="minor">
+            <a:schemeClr val="tx1"/>
+          </a:fontRef>
+        </p:style>
+      </p:cxnSp>
+    </p:spTree>
+    <p:extLst>
+      <p:ext uri="{BB962C8B-B14F-4D97-AF65-F5344CB8AC3E}">
+        <p14:creationId xmlns:p14="http://schemas.microsoft.com/office/powerpoint/2010/main" val="4088955109"/>
+      </p:ext>
+    </p:extLst>
+  </p:cSld>
+  <p:clrMapOvr>
+    <a:masterClrMapping/>
+  </p:clrMapOvr>
+</p:sld>
+</file>
+
 <file path=ppt/theme/theme1.xml><?xml version="1.0" encoding="utf-8"?>
 <a:theme xmlns:a="http://schemas.openxmlformats.org/drawingml/2006/main" name="Office テーマ">
   <a:themeElements>
